--- a/docs/lectures/lecture_07/07_lecture_powerpoint.pptx
+++ b/docs/lectures/lecture_07/07_lecture_powerpoint.pptx
@@ -7,6 +7,22 @@
   <p:sldIdLst>
     <p:sldId id="256" r:id="rId2"/>
     <p:sldId id="257" r:id="rId3"/>
+    <p:sldId id="258" r:id="rId4"/>
+    <p:sldId id="259" r:id="rId5"/>
+    <p:sldId id="260" r:id="rId6"/>
+    <p:sldId id="261" r:id="rId7"/>
+    <p:sldId id="262" r:id="rId8"/>
+    <p:sldId id="263" r:id="rId9"/>
+    <p:sldId id="264" r:id="rId10"/>
+    <p:sldId id="265" r:id="rId11"/>
+    <p:sldId id="266" r:id="rId12"/>
+    <p:sldId id="267" r:id="rId13"/>
+    <p:sldId id="268" r:id="rId14"/>
+    <p:sldId id="269" r:id="rId15"/>
+    <p:sldId id="270" r:id="rId16"/>
+    <p:sldId id="271" r:id="rId17"/>
+    <p:sldId id="272" r:id="rId18"/>
+    <p:sldId id="273" r:id="rId19"/>
   </p:sldIdLst>
   <p:sldSz cx="9144000" cy="5143500" type="screen16x9"/>
   <p:notesSz cx="6858000" cy="9144000"/>
@@ -3280,7 +3296,7 @@
             </a:pPr>
             <a:r>
               <a:rPr/>
-              <a:t>Lecture 07</a:t>
+              <a:t>Lecture 07 — Wide, Long, and Wild: Pivoting Real Data</a:t>
             </a:r>
           </a:p>
         </p:txBody>
@@ -3310,7 +3326,5255 @@
             </a:pPr>
             <a:r>
               <a:rPr/>
+              <a:t>Reshaping Lake Superior ice cover data with pivot_longer() and pivot_wider()</a:t>
+            </a:r>
+            <a:br/>
+            <a:br/>
+            <a:r>
+              <a:rPr/>
               <a:t>Bill Perry</a:t>
+            </a:r>
+          </a:p>
+        </p:txBody>
+      </p:sp>
+      <p:sp>
+        <p:nvSpPr>
+          <p:cNvPr id="4" name="Date Placeholder 3"/>
+          <p:cNvSpPr>
+            <a:spLocks noGrp="1"/>
+          </p:cNvSpPr>
+          <p:nvPr>
+            <p:ph idx="10" sz="half" type="dt"/>
+          </p:nvPr>
+        </p:nvSpPr>
+        <p:spPr/>
+        <p:txBody>
+          <a:bodyPr/>
+          <a:lstStyle/>
+          <a:p>
+            <a:pPr lvl="0" indent="0" marL="0">
+              <a:buNone/>
+            </a:pPr>
+            <a:r>
+              <a:rPr/>
+              <a:t>2026-06-30</a:t>
+            </a:r>
+          </a:p>
+        </p:txBody>
+      </p:sp>
+    </p:spTree>
+  </p:cSld>
+</p:sld>
+</file>
+
+<file path=ppt/slides/slide10.xml><?xml version="1.0" encoding="utf-8"?>
+<p:sld xmlns:a="http://schemas.openxmlformats.org/drawingml/2006/main" xmlns:r="http://schemas.openxmlformats.org/officeDocument/2006/relationships" xmlns:p="http://schemas.openxmlformats.org/presentationml/2006/main">
+  <p:cSld>
+    <p:spTree>
+      <p:nvGrpSpPr>
+        <p:cNvPr id="1" name=""/>
+        <p:cNvGrpSpPr/>
+        <p:nvPr/>
+      </p:nvGrpSpPr>
+      <p:grpSpPr>
+        <a:xfrm>
+          <a:off x="0" y="0"/>
+          <a:ext cx="0" cy="0"/>
+          <a:chOff x="0" y="0"/>
+          <a:chExt cx="0" cy="0"/>
+        </a:xfrm>
+      </p:grpSpPr>
+      <p:sp>
+        <p:nvSpPr>
+          <p:cNvPr id="2" name="Title 1"/>
+          <p:cNvSpPr>
+            <a:spLocks noGrp="1"/>
+          </p:cNvSpPr>
+          <p:nvPr>
+            <p:ph type="title"/>
+          </p:nvPr>
+        </p:nvSpPr>
+        <p:spPr>
+          <a:xfrm>
+            <a:off x="0" y="0"/>
+            <a:ext cx="9144000" cy="602780"/>
+          </a:xfrm>
+          <a:solidFill>
+            <a:srgbClr val="1A1A2E"/>
+          </a:solidFill>
+        </p:spPr>
+        <p:txBody>
+          <a:bodyPr/>
+          <a:lstStyle/>
+          <a:p>
+            <a:pPr lvl="0" indent="0" marL="0">
+              <a:buNone/>
+            </a:pPr>
+            <a:r>
+              <a:rPr/>
+              <a:t>Summarize Now That We’re Long</a:t>
+            </a:r>
+          </a:p>
+        </p:txBody>
+      </p:sp>
+      <p:sp>
+        <p:nvSpPr>
+          <p:cNvPr id="3" name="Content Placeholder 2"/>
+          <p:cNvSpPr>
+            <a:spLocks noGrp="1"/>
+          </p:cNvSpPr>
+          <p:nvPr>
+            <p:ph idx="1" sz="half"/>
+          </p:nvPr>
+        </p:nvSpPr>
+        <p:spPr/>
+        <p:txBody>
+          <a:bodyPr/>
+          <a:lstStyle/>
+          <a:p>
+            <a:pPr lvl="0" indent="0">
+              <a:buNone/>
+            </a:pPr>
+            <a:r>
+              <a:rPr>
+                <a:solidFill>
+                  <a:srgbClr val="5E5E5E"/>
+                </a:solidFill>
+                <a:latin typeface="Courier"/>
+              </a:rPr>
+              <a:t># Mean ice cover per year-month --------------------------</a:t>
+            </a:r>
+            <a:br/>
+            <a:r>
+              <a:rPr>
+                <a:solidFill>
+                  <a:srgbClr val="003B4F"/>
+                </a:solidFill>
+                <a:latin typeface="Courier"/>
+              </a:rPr>
+              <a:t>monthly_avg &lt;- ice_clean </a:t>
+            </a:r>
+            <a:r>
+              <a:rPr>
+                <a:solidFill>
+                  <a:srgbClr val="5E5E5E"/>
+                </a:solidFill>
+                <a:latin typeface="Courier"/>
+              </a:rPr>
+              <a:t>%&gt;%</a:t>
+            </a:r>
+            <a:br/>
+            <a:r>
+              <a:rPr>
+                <a:solidFill>
+                  <a:srgbClr val="003B4F"/>
+                </a:solidFill>
+                <a:latin typeface="Courier"/>
+              </a:rPr>
+              <a:t>  </a:t>
+            </a:r>
+            <a:r>
+              <a:rPr>
+                <a:solidFill>
+                  <a:srgbClr val="4758AB"/>
+                </a:solidFill>
+                <a:latin typeface="Courier"/>
+              </a:rPr>
+              <a:t>group_by</a:t>
+            </a:r>
+            <a:r>
+              <a:rPr>
+                <a:solidFill>
+                  <a:srgbClr val="003B4F"/>
+                </a:solidFill>
+                <a:latin typeface="Courier"/>
+              </a:rPr>
+              <a:t>(year, month) </a:t>
+            </a:r>
+            <a:r>
+              <a:rPr>
+                <a:solidFill>
+                  <a:srgbClr val="5E5E5E"/>
+                </a:solidFill>
+                <a:latin typeface="Courier"/>
+              </a:rPr>
+              <a:t>%&gt;%</a:t>
+            </a:r>
+            <a:br/>
+            <a:r>
+              <a:rPr>
+                <a:solidFill>
+                  <a:srgbClr val="003B4F"/>
+                </a:solidFill>
+                <a:latin typeface="Courier"/>
+              </a:rPr>
+              <a:t>  </a:t>
+            </a:r>
+            <a:r>
+              <a:rPr>
+                <a:solidFill>
+                  <a:srgbClr val="4758AB"/>
+                </a:solidFill>
+                <a:latin typeface="Courier"/>
+              </a:rPr>
+              <a:t>summarize</a:t>
+            </a:r>
+            <a:r>
+              <a:rPr>
+                <a:solidFill>
+                  <a:srgbClr val="003B4F"/>
+                </a:solidFill>
+                <a:latin typeface="Courier"/>
+              </a:rPr>
+              <a:t>(</a:t>
+            </a:r>
+            <a:br/>
+            <a:r>
+              <a:rPr>
+                <a:solidFill>
+                  <a:srgbClr val="003B4F"/>
+                </a:solidFill>
+                <a:latin typeface="Courier"/>
+              </a:rPr>
+              <a:t>    </a:t>
+            </a:r>
+            <a:r>
+              <a:rPr>
+                <a:solidFill>
+                  <a:srgbClr val="657422"/>
+                </a:solidFill>
+                <a:latin typeface="Courier"/>
+              </a:rPr>
+              <a:t>mean_ice =</a:t>
+            </a:r>
+            <a:r>
+              <a:rPr>
+                <a:solidFill>
+                  <a:srgbClr val="003B4F"/>
+                </a:solidFill>
+                <a:latin typeface="Courier"/>
+              </a:rPr>
+              <a:t> </a:t>
+            </a:r>
+            <a:r>
+              <a:rPr>
+                <a:solidFill>
+                  <a:srgbClr val="4758AB"/>
+                </a:solidFill>
+                <a:latin typeface="Courier"/>
+              </a:rPr>
+              <a:t>mean</a:t>
+            </a:r>
+            <a:r>
+              <a:rPr>
+                <a:solidFill>
+                  <a:srgbClr val="003B4F"/>
+                </a:solidFill>
+                <a:latin typeface="Courier"/>
+              </a:rPr>
+              <a:t>(ice_cover, </a:t>
+            </a:r>
+            <a:r>
+              <a:rPr>
+                <a:solidFill>
+                  <a:srgbClr val="657422"/>
+                </a:solidFill>
+                <a:latin typeface="Courier"/>
+              </a:rPr>
+              <a:t>na.rm =</a:t>
+            </a:r>
+            <a:r>
+              <a:rPr>
+                <a:solidFill>
+                  <a:srgbClr val="003B4F"/>
+                </a:solidFill>
+                <a:latin typeface="Courier"/>
+              </a:rPr>
+              <a:t> </a:t>
+            </a:r>
+            <a:r>
+              <a:rPr>
+                <a:solidFill>
+                  <a:srgbClr val="8F5902"/>
+                </a:solidFill>
+                <a:latin typeface="Courier"/>
+              </a:rPr>
+              <a:t>TRUE</a:t>
+            </a:r>
+            <a:r>
+              <a:rPr>
+                <a:solidFill>
+                  <a:srgbClr val="003B4F"/>
+                </a:solidFill>
+                <a:latin typeface="Courier"/>
+              </a:rPr>
+              <a:t>),</a:t>
+            </a:r>
+            <a:br/>
+            <a:r>
+              <a:rPr>
+                <a:solidFill>
+                  <a:srgbClr val="003B4F"/>
+                </a:solidFill>
+                <a:latin typeface="Courier"/>
+              </a:rPr>
+              <a:t>    </a:t>
+            </a:r>
+            <a:r>
+              <a:rPr>
+                <a:solidFill>
+                  <a:srgbClr val="657422"/>
+                </a:solidFill>
+                <a:latin typeface="Courier"/>
+              </a:rPr>
+              <a:t>.groups  =</a:t>
+            </a:r>
+            <a:r>
+              <a:rPr>
+                <a:solidFill>
+                  <a:srgbClr val="003B4F"/>
+                </a:solidFill>
+                <a:latin typeface="Courier"/>
+              </a:rPr>
+              <a:t> </a:t>
+            </a:r>
+            <a:r>
+              <a:rPr>
+                <a:solidFill>
+                  <a:srgbClr val="20794D"/>
+                </a:solidFill>
+                <a:latin typeface="Courier"/>
+              </a:rPr>
+              <a:t>"drop"</a:t>
+            </a:r>
+            <a:br/>
+            <a:r>
+              <a:rPr>
+                <a:solidFill>
+                  <a:srgbClr val="003B4F"/>
+                </a:solidFill>
+                <a:latin typeface="Courier"/>
+              </a:rPr>
+              <a:t>  )</a:t>
+            </a:r>
+            <a:br/>
+            <a:br/>
+            <a:r>
+              <a:rPr>
+                <a:solidFill>
+                  <a:srgbClr val="003B4F"/>
+                </a:solidFill>
+                <a:latin typeface="Courier"/>
+              </a:rPr>
+              <a:t>monthly_avg &lt;- monthly_avg </a:t>
+            </a:r>
+            <a:r>
+              <a:rPr>
+                <a:solidFill>
+                  <a:srgbClr val="5E5E5E"/>
+                </a:solidFill>
+                <a:latin typeface="Courier"/>
+              </a:rPr>
+              <a:t>%&gt;%</a:t>
+            </a:r>
+            <a:br/>
+            <a:r>
+              <a:rPr>
+                <a:solidFill>
+                  <a:srgbClr val="003B4F"/>
+                </a:solidFill>
+                <a:latin typeface="Courier"/>
+              </a:rPr>
+              <a:t>  </a:t>
+            </a:r>
+            <a:r>
+              <a:rPr>
+                <a:solidFill>
+                  <a:srgbClr val="4758AB"/>
+                </a:solidFill>
+                <a:latin typeface="Courier"/>
+              </a:rPr>
+              <a:t>mutate</a:t>
+            </a:r>
+            <a:r>
+              <a:rPr>
+                <a:solidFill>
+                  <a:srgbClr val="003B4F"/>
+                </a:solidFill>
+                <a:latin typeface="Courier"/>
+              </a:rPr>
+              <a:t>(</a:t>
+            </a:r>
+            <a:r>
+              <a:rPr>
+                <a:solidFill>
+                  <a:srgbClr val="657422"/>
+                </a:solidFill>
+                <a:latin typeface="Courier"/>
+              </a:rPr>
+              <a:t>month_date =</a:t>
+            </a:r>
+            <a:r>
+              <a:rPr>
+                <a:solidFill>
+                  <a:srgbClr val="003B4F"/>
+                </a:solidFill>
+                <a:latin typeface="Courier"/>
+              </a:rPr>
+              <a:t> </a:t>
+            </a:r>
+            <a:r>
+              <a:rPr>
+                <a:solidFill>
+                  <a:srgbClr val="4758AB"/>
+                </a:solidFill>
+                <a:latin typeface="Courier"/>
+              </a:rPr>
+              <a:t>ymd</a:t>
+            </a:r>
+            <a:r>
+              <a:rPr>
+                <a:solidFill>
+                  <a:srgbClr val="003B4F"/>
+                </a:solidFill>
+                <a:latin typeface="Courier"/>
+              </a:rPr>
+              <a:t>(</a:t>
+            </a:r>
+            <a:r>
+              <a:rPr>
+                <a:solidFill>
+                  <a:srgbClr val="4758AB"/>
+                </a:solidFill>
+                <a:latin typeface="Courier"/>
+              </a:rPr>
+              <a:t>paste</a:t>
+            </a:r>
+            <a:r>
+              <a:rPr>
+                <a:solidFill>
+                  <a:srgbClr val="003B4F"/>
+                </a:solidFill>
+                <a:latin typeface="Courier"/>
+              </a:rPr>
+              <a:t>(year, month, </a:t>
+            </a:r>
+            <a:r>
+              <a:rPr>
+                <a:solidFill>
+                  <a:srgbClr val="20794D"/>
+                </a:solidFill>
+                <a:latin typeface="Courier"/>
+              </a:rPr>
+              <a:t>"01"</a:t>
+            </a:r>
+            <a:r>
+              <a:rPr>
+                <a:solidFill>
+                  <a:srgbClr val="003B4F"/>
+                </a:solidFill>
+                <a:latin typeface="Courier"/>
+              </a:rPr>
+              <a:t>, </a:t>
+            </a:r>
+            <a:r>
+              <a:rPr>
+                <a:solidFill>
+                  <a:srgbClr val="657422"/>
+                </a:solidFill>
+                <a:latin typeface="Courier"/>
+              </a:rPr>
+              <a:t>sep =</a:t>
+            </a:r>
+            <a:r>
+              <a:rPr>
+                <a:solidFill>
+                  <a:srgbClr val="003B4F"/>
+                </a:solidFill>
+                <a:latin typeface="Courier"/>
+              </a:rPr>
+              <a:t> </a:t>
+            </a:r>
+            <a:r>
+              <a:rPr>
+                <a:solidFill>
+                  <a:srgbClr val="20794D"/>
+                </a:solidFill>
+                <a:latin typeface="Courier"/>
+              </a:rPr>
+              <a:t>"-"</a:t>
+            </a:r>
+            <a:r>
+              <a:rPr>
+                <a:solidFill>
+                  <a:srgbClr val="003B4F"/>
+                </a:solidFill>
+                <a:latin typeface="Courier"/>
+              </a:rPr>
+              <a:t>)))</a:t>
+            </a:r>
+            <a:br/>
+            <a:br/>
+            <a:r>
+              <a:rPr>
+                <a:solidFill>
+                  <a:srgbClr val="4758AB"/>
+                </a:solidFill>
+                <a:latin typeface="Courier"/>
+              </a:rPr>
+              <a:t>head</a:t>
+            </a:r>
+            <a:r>
+              <a:rPr>
+                <a:solidFill>
+                  <a:srgbClr val="003B4F"/>
+                </a:solidFill>
+                <a:latin typeface="Courier"/>
+              </a:rPr>
+              <a:t>(monthly_avg)</a:t>
+            </a:r>
+          </a:p>
+          <a:p>
+            <a:pPr lvl="0" indent="0">
+              <a:buNone/>
+            </a:pPr>
+            <a:r>
+              <a:rPr>
+                <a:latin typeface="Courier"/>
+              </a:rPr>
+              <a:t># A tibble: 6 × 4
+   year month mean_ice month_date
+  &lt;dbl&gt; &lt;ord&gt;    &lt;dbl&gt; &lt;date&gt;    
+1  1973 Jan       18.1 1973-01-01
+2  1973 Feb       32.8 1973-02-01
+3  1973 Mar       28.2 1973-03-01
+4  1973 Apr        2.2 1973-04-01
+5  1973 Dec       12.0 1973-12-01
+6  1974 Jan       24.1 1974-01-01</a:t>
+            </a:r>
+          </a:p>
+        </p:txBody>
+      </p:sp>
+      <p:sp>
+        <p:nvSpPr>
+          <p:cNvPr id="4" name="Content Placeholder 3"/>
+          <p:cNvSpPr>
+            <a:spLocks noGrp="1"/>
+          </p:cNvSpPr>
+          <p:nvPr>
+            <p:ph idx="2" sz="half"/>
+          </p:nvPr>
+        </p:nvSpPr>
+        <p:spPr/>
+        <p:txBody>
+          <a:bodyPr/>
+          <a:lstStyle/>
+          <a:p>
+            <a:pPr lvl="0" indent="0" marL="0">
+              <a:buNone/>
+            </a:pPr>
+            <a:r>
+              <a:rPr b="1"/>
+              <a:t>This should look familiar.</a:t>
+            </a:r>
+          </a:p>
+          <a:p>
+            <a:pPr lvl="0"/>
+            <a:r>
+              <a:rPr/>
+              <a:t>Exactly the same </a:t>
+            </a:r>
+            <a:r>
+              <a:rPr>
+                <a:latin typeface="Courier"/>
+              </a:rPr>
+              <a:t>group_by() %&gt;% summarize()</a:t>
+            </a:r>
+            <a:r>
+              <a:rPr/>
+              <a:t> pattern from Lecture 06’s Duluth weather data</a:t>
+            </a:r>
+          </a:p>
+          <a:p>
+            <a:pPr lvl="0"/>
+            <a:r>
+              <a:rPr/>
+              <a:t>We could </a:t>
+            </a:r>
+            <a:r>
+              <a:rPr b="1"/>
+              <a:t>not</a:t>
+            </a:r>
+            <a:r>
+              <a:rPr/>
+              <a:t> have written this on the wide data — there was no </a:t>
+            </a:r>
+            <a:r>
+              <a:rPr>
+                <a:latin typeface="Courier"/>
+              </a:rPr>
+              <a:t>year</a:t>
+            </a:r>
+            <a:r>
+              <a:rPr/>
+              <a:t> or </a:t>
+            </a:r>
+            <a:r>
+              <a:rPr>
+                <a:latin typeface="Courier"/>
+              </a:rPr>
+              <a:t>month</a:t>
+            </a:r>
+            <a:r>
+              <a:rPr/>
+              <a:t> column to group by until we pivoted</a:t>
+            </a:r>
+          </a:p>
+          <a:p>
+            <a:pPr lvl="0" indent="0" marL="0">
+              <a:buNone/>
+            </a:pPr>
+            <a:r>
+              <a:rPr/>
+              <a:t>The reshape wasn’t just cosmetic — it </a:t>
+            </a:r>
+            <a:r>
+              <a:rPr b="1"/>
+              <a:t>unlocked</a:t>
+            </a:r>
+            <a:r>
+              <a:rPr/>
+              <a:t> every tidyverse tool we already know.</a:t>
+            </a:r>
+          </a:p>
+        </p:txBody>
+      </p:sp>
+    </p:spTree>
+  </p:cSld>
+</p:sld>
+</file>
+
+<file path=ppt/slides/slide11.xml><?xml version="1.0" encoding="utf-8"?>
+<p:sld xmlns:a="http://schemas.openxmlformats.org/drawingml/2006/main" xmlns:r="http://schemas.openxmlformats.org/officeDocument/2006/relationships" xmlns:p="http://schemas.openxmlformats.org/presentationml/2006/main">
+  <p:cSld>
+    <p:spTree>
+      <p:nvGrpSpPr>
+        <p:cNvPr id="1" name=""/>
+        <p:cNvGrpSpPr/>
+        <p:nvPr/>
+      </p:nvGrpSpPr>
+      <p:grpSpPr>
+        <a:xfrm>
+          <a:off x="0" y="0"/>
+          <a:ext cx="0" cy="0"/>
+          <a:chOff x="0" y="0"/>
+          <a:chExt cx="0" cy="0"/>
+        </a:xfrm>
+      </p:grpSpPr>
+      <p:sp>
+        <p:nvSpPr>
+          <p:cNvPr id="2" name="Title 1"/>
+          <p:cNvSpPr>
+            <a:spLocks noGrp="1"/>
+          </p:cNvSpPr>
+          <p:nvPr>
+            <p:ph type="title"/>
+          </p:nvPr>
+        </p:nvSpPr>
+        <p:spPr>
+          <a:xfrm>
+            <a:off x="0" y="0"/>
+            <a:ext cx="9144000" cy="602780"/>
+          </a:xfrm>
+          <a:solidFill>
+            <a:srgbClr val="1A1A2E"/>
+          </a:solidFill>
+        </p:spPr>
+        <p:txBody>
+          <a:bodyPr/>
+          <a:lstStyle/>
+          <a:p>
+            <a:pPr lvl="0" indent="0" marL="0">
+              <a:buNone/>
+            </a:pPr>
+            <a:r>
+              <a:rPr>
+                <a:latin typeface="Courier"/>
+              </a:rPr>
+              <a:t>pivot_wider()</a:t>
+            </a:r>
+            <a:r>
+              <a:rPr/>
+              <a:t> — Going Back the Other Direction</a:t>
+            </a:r>
+          </a:p>
+        </p:txBody>
+      </p:sp>
+      <p:sp>
+        <p:nvSpPr>
+          <p:cNvPr id="3" name="Content Placeholder 2"/>
+          <p:cNvSpPr>
+            <a:spLocks noGrp="1"/>
+          </p:cNvSpPr>
+          <p:nvPr>
+            <p:ph idx="1" sz="half"/>
+          </p:nvPr>
+        </p:nvSpPr>
+        <p:spPr/>
+        <p:txBody>
+          <a:bodyPr/>
+          <a:lstStyle/>
+          <a:p>
+            <a:pPr lvl="0" indent="0">
+              <a:buNone/>
+            </a:pPr>
+            <a:r>
+              <a:rPr>
+                <a:solidFill>
+                  <a:srgbClr val="5E5E5E"/>
+                </a:solidFill>
+                <a:latin typeface="Courier"/>
+              </a:rPr>
+              <a:t># Turn long data into a year-by-month summary table ------</a:t>
+            </a:r>
+            <a:br/>
+            <a:r>
+              <a:rPr>
+                <a:solidFill>
+                  <a:srgbClr val="003B4F"/>
+                </a:solidFill>
+                <a:latin typeface="Courier"/>
+              </a:rPr>
+              <a:t>ice_pivot_table &lt;- ice_clean </a:t>
+            </a:r>
+            <a:r>
+              <a:rPr>
+                <a:solidFill>
+                  <a:srgbClr val="5E5E5E"/>
+                </a:solidFill>
+                <a:latin typeface="Courier"/>
+              </a:rPr>
+              <a:t>%&gt;%</a:t>
+            </a:r>
+            <a:br/>
+            <a:r>
+              <a:rPr>
+                <a:solidFill>
+                  <a:srgbClr val="003B4F"/>
+                </a:solidFill>
+                <a:latin typeface="Courier"/>
+              </a:rPr>
+              <a:t>  </a:t>
+            </a:r>
+            <a:r>
+              <a:rPr>
+                <a:solidFill>
+                  <a:srgbClr val="4758AB"/>
+                </a:solidFill>
+                <a:latin typeface="Courier"/>
+              </a:rPr>
+              <a:t>pivot_wider</a:t>
+            </a:r>
+            <a:r>
+              <a:rPr>
+                <a:solidFill>
+                  <a:srgbClr val="003B4F"/>
+                </a:solidFill>
+                <a:latin typeface="Courier"/>
+              </a:rPr>
+              <a:t>(</a:t>
+            </a:r>
+            <a:br/>
+            <a:r>
+              <a:rPr>
+                <a:solidFill>
+                  <a:srgbClr val="003B4F"/>
+                </a:solidFill>
+                <a:latin typeface="Courier"/>
+              </a:rPr>
+              <a:t>    </a:t>
+            </a:r>
+            <a:r>
+              <a:rPr>
+                <a:solidFill>
+                  <a:srgbClr val="657422"/>
+                </a:solidFill>
+                <a:latin typeface="Courier"/>
+              </a:rPr>
+              <a:t>id_cols    =</a:t>
+            </a:r>
+            <a:r>
+              <a:rPr>
+                <a:solidFill>
+                  <a:srgbClr val="003B4F"/>
+                </a:solidFill>
+                <a:latin typeface="Courier"/>
+              </a:rPr>
+              <a:t> year,</a:t>
+            </a:r>
+            <a:br/>
+            <a:r>
+              <a:rPr>
+                <a:solidFill>
+                  <a:srgbClr val="003B4F"/>
+                </a:solidFill>
+                <a:latin typeface="Courier"/>
+              </a:rPr>
+              <a:t>    </a:t>
+            </a:r>
+            <a:r>
+              <a:rPr>
+                <a:solidFill>
+                  <a:srgbClr val="657422"/>
+                </a:solidFill>
+                <a:latin typeface="Courier"/>
+              </a:rPr>
+              <a:t>names_from =</a:t>
+            </a:r>
+            <a:r>
+              <a:rPr>
+                <a:solidFill>
+                  <a:srgbClr val="003B4F"/>
+                </a:solidFill>
+                <a:latin typeface="Courier"/>
+              </a:rPr>
+              <a:t> month,</a:t>
+            </a:r>
+            <a:br/>
+            <a:r>
+              <a:rPr>
+                <a:solidFill>
+                  <a:srgbClr val="003B4F"/>
+                </a:solidFill>
+                <a:latin typeface="Courier"/>
+              </a:rPr>
+              <a:t>    </a:t>
+            </a:r>
+            <a:r>
+              <a:rPr>
+                <a:solidFill>
+                  <a:srgbClr val="657422"/>
+                </a:solidFill>
+                <a:latin typeface="Courier"/>
+              </a:rPr>
+              <a:t>values_from =</a:t>
+            </a:r>
+            <a:r>
+              <a:rPr>
+                <a:solidFill>
+                  <a:srgbClr val="003B4F"/>
+                </a:solidFill>
+                <a:latin typeface="Courier"/>
+              </a:rPr>
+              <a:t> ice_cover,</a:t>
+            </a:r>
+            <a:br/>
+            <a:r>
+              <a:rPr>
+                <a:solidFill>
+                  <a:srgbClr val="003B4F"/>
+                </a:solidFill>
+                <a:latin typeface="Courier"/>
+              </a:rPr>
+              <a:t>    </a:t>
+            </a:r>
+            <a:r>
+              <a:rPr>
+                <a:solidFill>
+                  <a:srgbClr val="657422"/>
+                </a:solidFill>
+                <a:latin typeface="Courier"/>
+              </a:rPr>
+              <a:t>values_fn  =</a:t>
+            </a:r>
+            <a:r>
+              <a:rPr>
+                <a:solidFill>
+                  <a:srgbClr val="003B4F"/>
+                </a:solidFill>
+                <a:latin typeface="Courier"/>
+              </a:rPr>
+              <a:t> mean</a:t>
+            </a:r>
+            <a:br/>
+            <a:r>
+              <a:rPr>
+                <a:solidFill>
+                  <a:srgbClr val="003B4F"/>
+                </a:solidFill>
+                <a:latin typeface="Courier"/>
+              </a:rPr>
+              <a:t>  )</a:t>
+            </a:r>
+            <a:br/>
+            <a:br/>
+            <a:r>
+              <a:rPr>
+                <a:solidFill>
+                  <a:srgbClr val="4758AB"/>
+                </a:solidFill>
+                <a:latin typeface="Courier"/>
+              </a:rPr>
+              <a:t>print</a:t>
+            </a:r>
+            <a:r>
+              <a:rPr>
+                <a:solidFill>
+                  <a:srgbClr val="003B4F"/>
+                </a:solidFill>
+                <a:latin typeface="Courier"/>
+              </a:rPr>
+              <a:t>(ice_pivot_table)</a:t>
+            </a:r>
+          </a:p>
+          <a:p>
+            <a:pPr lvl="0" indent="0">
+              <a:buNone/>
+            </a:pPr>
+            <a:r>
+              <a:rPr>
+                <a:latin typeface="Courier"/>
+              </a:rPr>
+              <a:t># A tibble: 54 × 9
+    year   Apr   Dec   Feb   Jan   Mar   May   Nov   Jun
+   &lt;dbl&gt; &lt;dbl&gt; &lt;dbl&gt; &lt;dbl&gt; &lt;dbl&gt; &lt;dbl&gt; &lt;dbl&gt; &lt;dbl&gt; &lt;dbl&gt;
+ 1  1973  2.2  12.0   32.8 18.1   28.2 NA       NA    NA
+ 2  1974 23.9   8.4   58.4 24.1   64.0  3.3     NA    NA
+ 3  1975  8.70 NA     35.9 10.7   17.2 NA       NA    NA
+ 4  1976  6.52  5.48  27.8 15.4   32.3 NA       NA    NA
+ 5  1977 24.2  19.1   92.0 61.1   78.0  2.15    NA    NA
+ 6  1978  9.67  5.98  55.4 17.3   63.7  2.57    NA    NA
+ 7  1979 48.5   3.31  85.4 36.8   87.6 21.3     NA    NA
+ 8  1980 15.6  NA     58.8  8.95  41.9 NA       NA    NA
+ 9  1981 11.7  14.2   74.5 30.7   41.3 NA       NA    NA
+10  1982 14.5   1.91  66.5 25.2   54.1  2.5     NA    NA
+# ℹ 44 more rows</a:t>
+            </a:r>
+          </a:p>
+        </p:txBody>
+      </p:sp>
+      <p:sp>
+        <p:nvSpPr>
+          <p:cNvPr id="4" name="Content Placeholder 3"/>
+          <p:cNvSpPr>
+            <a:spLocks noGrp="1"/>
+          </p:cNvSpPr>
+          <p:nvPr>
+            <p:ph idx="2" sz="half"/>
+          </p:nvPr>
+        </p:nvSpPr>
+        <p:spPr/>
+        <p:txBody>
+          <a:bodyPr/>
+          <a:lstStyle/>
+          <a:p>
+            <a:pPr lvl="0" indent="0" marL="0">
+              <a:buNone/>
+            </a:pPr>
+            <a:r>
+              <a:rPr b="1">
+                <a:latin typeface="Courier"/>
+              </a:rPr>
+              <a:t>pivot_wider()</a:t>
+            </a:r>
+            <a:r>
+              <a:rPr b="1"/>
+              <a:t> is the mirror image of </a:t>
+            </a:r>
+            <a:r>
+              <a:rPr b="1">
+                <a:latin typeface="Courier"/>
+              </a:rPr>
+              <a:t>pivot_longer()</a:t>
+            </a:r>
+            <a:r>
+              <a:rPr b="1"/>
+              <a:t>:</a:t>
+            </a:r>
+          </a:p>
+          <a:p>
+            <a:pPr lvl="0"/>
+            <a:r>
+              <a:rPr>
+                <a:latin typeface="Courier"/>
+              </a:rPr>
+              <a:t>id_cols = year</a:t>
+            </a:r>
+            <a:r>
+              <a:rPr/>
+              <a:t> — one row per year</a:t>
+            </a:r>
+          </a:p>
+          <a:p>
+            <a:pPr lvl="0"/>
+            <a:r>
+              <a:rPr>
+                <a:latin typeface="Courier"/>
+              </a:rPr>
+              <a:t>names_from = month</a:t>
+            </a:r>
+            <a:r>
+              <a:rPr/>
+              <a:t> — month values become new column headers</a:t>
+            </a:r>
+          </a:p>
+          <a:p>
+            <a:pPr lvl="0"/>
+            <a:r>
+              <a:rPr>
+                <a:latin typeface="Courier"/>
+              </a:rPr>
+              <a:t>values_from = ice_cover</a:t>
+            </a:r>
+            <a:r>
+              <a:rPr/>
+              <a:t> — fills the cells</a:t>
+            </a:r>
+          </a:p>
+          <a:p>
+            <a:pPr lvl="0"/>
+            <a:r>
+              <a:rPr>
+                <a:latin typeface="Courier"/>
+              </a:rPr>
+              <a:t>values_fn = mean</a:t>
+            </a:r>
+            <a:r>
+              <a:rPr/>
+              <a:t> — averages if multiple days land in the same year-month cell</a:t>
+            </a:r>
+          </a:p>
+          <a:p>
+            <a:pPr lvl="0" indent="0" marL="0">
+              <a:buNone/>
+            </a:pPr>
+            <a:r>
+              <a:rPr/>
+              <a:t>This recreates an Excel-style pivot table — but computed, not copy-pasted.</a:t>
+            </a:r>
+          </a:p>
+          <a:p>
+            <a:pPr lvl="0" indent="0" marL="0">
+              <a:buNone/>
+            </a:pPr>
+            <a:r>
+              <a:rPr/>
+              <a:t>📖 R4DS Ch. 5.4 — </a:t>
+            </a:r>
+            <a:r>
+              <a:rPr>
+                <a:latin typeface="Courier"/>
+              </a:rPr>
+              <a:t>pivot_wider()</a:t>
+            </a:r>
+          </a:p>
+        </p:txBody>
+      </p:sp>
+    </p:spTree>
+  </p:cSld>
+</p:sld>
+</file>
+
+<file path=ppt/slides/slide12.xml><?xml version="1.0" encoding="utf-8"?>
+<p:sld xmlns:a="http://schemas.openxmlformats.org/drawingml/2006/main" xmlns:r="http://schemas.openxmlformats.org/officeDocument/2006/relationships" xmlns:p="http://schemas.openxmlformats.org/presentationml/2006/main">
+  <p:cSld>
+    <p:spTree>
+      <p:nvGrpSpPr>
+        <p:cNvPr id="1" name=""/>
+        <p:cNvGrpSpPr/>
+        <p:nvPr/>
+      </p:nvGrpSpPr>
+      <p:grpSpPr>
+        <a:xfrm>
+          <a:off x="0" y="0"/>
+          <a:ext cx="0" cy="0"/>
+          <a:chOff x="0" y="0"/>
+          <a:chExt cx="0" cy="0"/>
+        </a:xfrm>
+      </p:grpSpPr>
+      <p:sp>
+        <p:nvSpPr>
+          <p:cNvPr id="2" name="Title 1"/>
+          <p:cNvSpPr>
+            <a:spLocks noGrp="1"/>
+          </p:cNvSpPr>
+          <p:nvPr>
+            <p:ph type="title"/>
+          </p:nvPr>
+        </p:nvSpPr>
+        <p:spPr>
+          <a:xfrm>
+            <a:off x="0" y="0"/>
+            <a:ext cx="9144000" cy="602780"/>
+          </a:xfrm>
+          <a:solidFill>
+            <a:srgbClr val="1A1A2E"/>
+          </a:solidFill>
+        </p:spPr>
+        <p:txBody>
+          <a:bodyPr/>
+          <a:lstStyle/>
+          <a:p>
+            <a:pPr lvl="0" indent="0" marL="0">
+              <a:buNone/>
+            </a:pPr>
+            <a:r>
+              <a:rPr/>
+              <a:t>Why Learn Both Directions?</a:t>
+            </a:r>
+          </a:p>
+        </p:txBody>
+      </p:sp>
+      <p:graphicFrame>
+        <p:nvGraphicFramePr>
+          <p:cNvPr id="6" name="Content Placeholder 5"/>
+          <p:cNvGraphicFramePr>
+            <a:graphicFrameLocks noGrp="1"/>
+          </p:cNvGraphicFramePr>
+          <p:nvPr>
+            <p:ph idx="1"/>
+          </p:nvPr>
+        </p:nvGraphicFramePr>
+        <p:xfrm>
+          <a:off x="0" y="660400"/>
+          <a:ext cx="4191000" cy="3810000"/>
+        </p:xfrm>
+        <a:graphic>
+          <a:graphicData uri="http://schemas.openxmlformats.org/drawingml/2006/table">
+            <a:tbl>
+              <a:tblPr firstRow="1" bandRow="1">
+                <a:tableStyleId>{5C22544A-7EE6-4342-B048-85BDC9FD1C3A}</a:tableStyleId>
+              </a:tblPr>
+              <a:tblGrid>
+                <a:gridCol w="1752600"/>
+                <a:gridCol w="2438400"/>
+              </a:tblGrid>
+              <a:tr h="0">
+                <a:tc>
+                  <a:txBody>
+                    <a:bodyPr/>
+                    <a:lstStyle/>
+                    <a:p>
+                      <a:pPr lvl="0" indent="0" marL="0">
+                        <a:buNone/>
+                      </a:pPr>
+                      <a:r>
+                        <a:rPr/>
+                        <a:t>Direction</a:t>
+                      </a:r>
+                    </a:p>
+                  </a:txBody>
+                  <a:tcPr/>
+                </a:tc>
+                <a:tc>
+                  <a:txBody>
+                    <a:bodyPr/>
+                    <a:lstStyle/>
+                    <a:p>
+                      <a:pPr lvl="0" indent="0" marL="0">
+                        <a:buNone/>
+                      </a:pPr>
+                      <a:r>
+                        <a:rPr/>
+                        <a:t>When to use it</a:t>
+                      </a:r>
+                    </a:p>
+                  </a:txBody>
+                  <a:tcPr/>
+                </a:tc>
+              </a:tr>
+              <a:tr h="0">
+                <a:tc>
+                  <a:txBody>
+                    <a:bodyPr/>
+                    <a:lstStyle/>
+                    <a:p>
+                      <a:pPr lvl="0" indent="0" marL="0">
+                        <a:buNone/>
+                      </a:pPr>
+                      <a:r>
+                        <a:rPr>
+                          <a:latin typeface="Courier"/>
+                        </a:rPr>
+                        <a:t>pivot_longer()</a:t>
+                      </a:r>
+                    </a:p>
+                  </a:txBody>
+                </a:tc>
+                <a:tc>
+                  <a:txBody>
+                    <a:bodyPr/>
+                    <a:lstStyle/>
+                    <a:p>
+                      <a:pPr lvl="0" indent="0" marL="0">
+                        <a:buNone/>
+                      </a:pPr>
+                      <a:r>
+                        <a:rPr/>
+                        <a:t>Data arrives wide (one column per year/site/etc.) and you need it tidy for </a:t>
+                      </a:r>
+                      <a:r>
+                        <a:rPr>
+                          <a:latin typeface="Courier"/>
+                        </a:rPr>
+                        <a:t>ggplot()</a:t>
+                      </a:r>
+                      <a:r>
+                        <a:rPr/>
+                        <a:t> or </a:t>
+                      </a:r>
+                      <a:r>
+                        <a:rPr>
+                          <a:latin typeface="Courier"/>
+                        </a:rPr>
+                        <a:t>group_by()</a:t>
+                      </a:r>
+                    </a:p>
+                  </a:txBody>
+                </a:tc>
+              </a:tr>
+              <a:tr h="0">
+                <a:tc>
+                  <a:txBody>
+                    <a:bodyPr/>
+                    <a:lstStyle/>
+                    <a:p>
+                      <a:pPr lvl="0" indent="0" marL="0">
+                        <a:buNone/>
+                      </a:pPr>
+                      <a:r>
+                        <a:rPr>
+                          <a:latin typeface="Courier"/>
+                        </a:rPr>
+                        <a:t>pivot_wider()</a:t>
+                      </a:r>
+                    </a:p>
+                  </a:txBody>
+                </a:tc>
+                <a:tc>
+                  <a:txBody>
+                    <a:bodyPr/>
+                    <a:lstStyle/>
+                    <a:p>
+                      <a:pPr lvl="0" indent="0" marL="0">
+                        <a:buNone/>
+                      </a:pPr>
+                      <a:r>
+                        <a:rPr/>
+                        <a:t>You have tidy long data but need a </a:t>
+                      </a:r>
+                      <a:r>
+                        <a:rPr b="1"/>
+                        <a:t>human-readable summary table</a:t>
+                      </a:r>
+                      <a:r>
+                        <a:rPr/>
+                        <a:t> — for a report, a colleague, or Excel</a:t>
+                      </a:r>
+                    </a:p>
+                  </a:txBody>
+                </a:tc>
+              </a:tr>
+            </a:tbl>
+          </a:graphicData>
+        </a:graphic>
+      </p:graphicFrame>
+      <p:sp>
+        <p:nvSpPr>
+          <p:cNvPr id="4" name="Content Placeholder 3"/>
+          <p:cNvSpPr>
+            <a:spLocks noGrp="1"/>
+          </p:cNvSpPr>
+          <p:nvPr>
+            <p:ph idx="2" sz="half"/>
+          </p:nvPr>
+        </p:nvSpPr>
+        <p:spPr/>
+        <p:txBody>
+          <a:bodyPr/>
+          <a:lstStyle/>
+          <a:p>
+            <a:pPr lvl="0" indent="0" marL="1270000">
+              <a:buNone/>
+            </a:pPr>
+            <a:r>
+              <a:rPr sz="2000" b="1"/>
+              <a:t>Important</a:t>
+            </a:r>
+          </a:p>
+          <a:p>
+            <a:pPr lvl="0" indent="0" marL="1270000">
+              <a:buNone/>
+            </a:pPr>
+            <a:r>
+              <a:rPr sz="2000" b="1"/>
+              <a:t>You will use </a:t>
+            </a:r>
+            <a:r>
+              <a:rPr sz="2000" b="1">
+                <a:latin typeface="Courier"/>
+              </a:rPr>
+              <a:t>pivot_longer()</a:t>
+            </a:r>
+            <a:r>
+              <a:rPr sz="2000" b="1"/>
+              <a:t> constantly in your own research.</a:t>
+            </a:r>
+            <a:r>
+              <a:rPr sz="2000"/>
+              <a:t> This is one of the most-used functions in the entire tidyverse.</a:t>
+            </a:r>
+          </a:p>
+        </p:txBody>
+      </p:sp>
+    </p:spTree>
+  </p:cSld>
+</p:sld>
+</file>
+
+<file path=ppt/slides/slide13.xml><?xml version="1.0" encoding="utf-8"?>
+<p:sld xmlns:a="http://schemas.openxmlformats.org/drawingml/2006/main" xmlns:r="http://schemas.openxmlformats.org/officeDocument/2006/relationships" xmlns:p="http://schemas.openxmlformats.org/presentationml/2006/main">
+  <p:cSld>
+    <p:spTree>
+      <p:nvGrpSpPr>
+        <p:cNvPr id="1" name=""/>
+        <p:cNvGrpSpPr/>
+        <p:nvPr/>
+      </p:nvGrpSpPr>
+      <p:grpSpPr>
+        <a:xfrm>
+          <a:off x="0" y="0"/>
+          <a:ext cx="0" cy="0"/>
+          <a:chOff x="0" y="0"/>
+          <a:chExt cx="0" cy="0"/>
+        </a:xfrm>
+      </p:grpSpPr>
+      <p:sp>
+        <p:nvSpPr>
+          <p:cNvPr id="2" name="Title 1"/>
+          <p:cNvSpPr>
+            <a:spLocks noGrp="1"/>
+          </p:cNvSpPr>
+          <p:nvPr>
+            <p:ph type="title"/>
+          </p:nvPr>
+        </p:nvSpPr>
+        <p:spPr>
+          <a:xfrm>
+            <a:off x="139485" y="78119"/>
+            <a:ext cx="8229600" cy="607682"/>
+          </a:xfrm>
+        </p:spPr>
+        <p:txBody>
+          <a:bodyPr/>
+          <a:lstStyle/>
+          <a:p>
+            <a:pPr lvl="0" indent="0" marL="0">
+              <a:buNone/>
+            </a:pPr>
+            <a:r>
+              <a:rPr/>
+              <a:t>NOAA’s Own “Spaghetti Plot”</a:t>
+            </a:r>
+          </a:p>
+        </p:txBody>
+      </p:sp>
+      <p:sp>
+        <p:nvSpPr>
+          <p:cNvPr id="3" name="Text Placeholder 2"/>
+          <p:cNvSpPr>
+            <a:spLocks noGrp="1"/>
+          </p:cNvSpPr>
+          <p:nvPr>
+            <p:ph idx="1" type="body"/>
+          </p:nvPr>
+        </p:nvSpPr>
+        <p:spPr/>
+        <p:txBody>
+          <a:bodyPr/>
+          <a:lstStyle/>
+          <a:p>
+            <a:pPr lvl="0" indent="0" marL="0">
+              <a:buNone/>
+            </a:pPr>
+            <a:r>
+              <a:rPr/>
+              <a:t>NOAA publishes a live version of this exact plot every winter, comparing the </a:t>
+            </a:r>
+            <a:r>
+              <a:rPr b="1"/>
+              <a:t>current year</a:t>
+            </a:r>
+            <a:r>
+              <a:rPr/>
+              <a:t> (black), the </a:t>
+            </a:r>
+            <a:r>
+              <a:rPr b="1"/>
+              <a:t>historical average</a:t>
+            </a:r>
+            <a:r>
+              <a:rPr/>
+              <a:t> (red), and </a:t>
+            </a:r>
+            <a:r>
+              <a:rPr b="1"/>
+              <a:t>every past year</a:t>
+            </a:r>
+            <a:r>
+              <a:rPr/>
+              <a:t> (thin blue lines):</a:t>
+            </a:r>
+          </a:p>
+        </p:txBody>
+      </p:sp>
+      <p:pic>
+        <p:nvPicPr>
+          <p:cNvPr descr="https://www.glerl.noaa.gov/data/ice/spaghetti/sup_ice_compare.png" id="0" name="Picture 1"/>
+          <p:cNvPicPr>
+            <a:picLocks noGrp="1" noChangeAspect="1"/>
+          </p:cNvPicPr>
+          <p:nvPr/>
+        </p:nvPicPr>
+        <p:blipFill>
+          <a:blip r:embed="rId2"/>
+          <a:stretch>
+            <a:fillRect/>
+          </a:stretch>
+        </p:blipFill>
+        <p:spPr bwMode="auto">
+          <a:xfrm>
+            <a:off x="127000" y="1409700"/>
+            <a:ext cx="4432300" cy="2514600"/>
+          </a:xfrm>
+          <a:prstGeom prst="rect">
+            <a:avLst/>
+          </a:prstGeom>
+          <a:noFill/>
+          <a:ln w="9525">
+            <a:noFill/>
+            <a:headEnd/>
+            <a:tailEnd/>
+          </a:ln>
+        </p:spPr>
+      </p:pic>
+      <p:sp>
+        <p:nvSpPr>
+          <p:cNvPr id="1" name="TextBox 3"/>
+          <p:cNvSpPr txBox="1"/>
+          <p:nvPr>
+            <p:ph idx="1"/>
+          </p:nvPr>
+        </p:nvSpPr>
+        <p:spPr>
+          <a:xfrm>
+            <a:off x="127000" y="4064000"/>
+            <a:ext cx="4432300" cy="508000"/>
+          </a:xfrm>
+          <a:prstGeom prst="rect">
+            <a:avLst/>
+          </a:prstGeom>
+          <a:noFill/>
+        </p:spPr>
+        <p:txBody>
+          <a:bodyPr/>
+          <a:lstStyle/>
+          <a:p>
+            <a:pPr lvl="0" indent="0" marL="0" algn="ctr">
+              <a:buNone/>
+            </a:pPr>
+            <a:r>
+              <a:rPr/>
+              <a:t>NOAA’s live Lake Superior ice cover comparison — current season vs. historical average vs. all past years.</a:t>
+            </a:r>
+          </a:p>
+        </p:txBody>
+      </p:sp>
+      <p:sp>
+        <p:nvSpPr>
+          <p:cNvPr id="4" name="Content Placeholder 3"/>
+          <p:cNvSpPr>
+            <a:spLocks noGrp="1"/>
+          </p:cNvSpPr>
+          <p:nvPr>
+            <p:ph idx="2" sz="half"/>
+          </p:nvPr>
+        </p:nvSpPr>
+        <p:spPr/>
+        <p:txBody>
+          <a:bodyPr/>
+          <a:lstStyle/>
+          <a:p>
+            <a:pPr lvl="0" indent="0" marL="0">
+              <a:buNone/>
+            </a:pPr>
+            <a:r>
+              <a:rPr/>
+              <a:t>Today, we’ll build </a:t>
+            </a:r>
+            <a:r>
+              <a:rPr b="1"/>
+              <a:t>our own version</a:t>
+            </a:r>
+            <a:r>
+              <a:rPr/>
+              <a:t> of this plot from the raw data we just tidied.</a:t>
+            </a:r>
+          </a:p>
+        </p:txBody>
+      </p:sp>
+      <p:sp>
+        <p:nvSpPr>
+          <p:cNvPr id="5" name="Text Placeholder 4"/>
+          <p:cNvSpPr>
+            <a:spLocks noGrp="1"/>
+          </p:cNvSpPr>
+          <p:nvPr>
+            <p:ph idx="3" sz="quarter" type="body"/>
+          </p:nvPr>
+        </p:nvSpPr>
+        <p:spPr/>
+        <p:txBody>
+          <a:bodyPr/>
+          <a:lstStyle/>
+          <a:p>
+            <a:pPr lvl="0" indent="0" marL="0">
+              <a:buNone/>
+            </a:pPr>
+            <a:r>
+              <a:rPr b="1"/>
+              <a:t>Why “spaghetti plot”?</a:t>
+            </a:r>
+          </a:p>
+          <a:p>
+            <a:pPr lvl="0"/>
+            <a:r>
+              <a:rPr/>
+              <a:t>Dozens of thin overlapping lines look like noodles</a:t>
+            </a:r>
+          </a:p>
+          <a:p>
+            <a:pPr lvl="0"/>
+            <a:r>
+              <a:rPr/>
+              <a:t>Each line is one year’s entire ice season, Nov → May</a:t>
+            </a:r>
+          </a:p>
+          <a:p>
+            <a:pPr lvl="0"/>
+            <a:r>
+              <a:rPr/>
+              <a:t>The pattern that emerges — or doesn’t — tells the real climate story</a:t>
+            </a:r>
+          </a:p>
+          <a:p>
+            <a:pPr lvl="0" indent="0" marL="0">
+              <a:buNone/>
+            </a:pPr>
+            <a:r>
+              <a:rPr/>
+              <a:t>This is a great example of how the </a:t>
+            </a:r>
+            <a:r>
+              <a:rPr b="1"/>
+              <a:t>same chart type</a:t>
+            </a:r>
+            <a:r>
+              <a:rPr/>
+              <a:t> appears in real published science.</a:t>
+            </a:r>
+          </a:p>
+        </p:txBody>
+      </p:sp>
+    </p:spTree>
+  </p:cSld>
+</p:sld>
+</file>
+
+<file path=ppt/slides/slide14.xml><?xml version="1.0" encoding="utf-8"?>
+<p:sld xmlns:a="http://schemas.openxmlformats.org/drawingml/2006/main" xmlns:r="http://schemas.openxmlformats.org/officeDocument/2006/relationships" xmlns:p="http://schemas.openxmlformats.org/presentationml/2006/main">
+  <p:cSld>
+    <p:spTree>
+      <p:nvGrpSpPr>
+        <p:cNvPr id="1" name=""/>
+        <p:cNvGrpSpPr/>
+        <p:nvPr/>
+      </p:nvGrpSpPr>
+      <p:grpSpPr>
+        <a:xfrm>
+          <a:off x="0" y="0"/>
+          <a:ext cx="0" cy="0"/>
+          <a:chOff x="0" y="0"/>
+          <a:chExt cx="0" cy="0"/>
+        </a:xfrm>
+      </p:grpSpPr>
+      <p:sp>
+        <p:nvSpPr>
+          <p:cNvPr id="2" name="Title 1"/>
+          <p:cNvSpPr>
+            <a:spLocks noGrp="1"/>
+          </p:cNvSpPr>
+          <p:nvPr>
+            <p:ph type="title"/>
+          </p:nvPr>
+        </p:nvSpPr>
+        <p:spPr>
+          <a:xfrm>
+            <a:off x="0" y="0"/>
+            <a:ext cx="9144000" cy="602780"/>
+          </a:xfrm>
+          <a:solidFill>
+            <a:srgbClr val="1A1A2E"/>
+          </a:solidFill>
+        </p:spPr>
+        <p:txBody>
+          <a:bodyPr/>
+          <a:lstStyle/>
+          <a:p>
+            <a:pPr lvl="0" indent="0" marL="0">
+              <a:buNone/>
+            </a:pPr>
+            <a:r>
+              <a:rPr/>
+              <a:t>Prep: Put Every Winter on One Shared Axis</a:t>
+            </a:r>
+          </a:p>
+        </p:txBody>
+      </p:sp>
+      <p:sp>
+        <p:nvSpPr>
+          <p:cNvPr id="3" name="Content Placeholder 2"/>
+          <p:cNvSpPr>
+            <a:spLocks noGrp="1"/>
+          </p:cNvSpPr>
+          <p:nvPr>
+            <p:ph idx="1" sz="half"/>
+          </p:nvPr>
+        </p:nvSpPr>
+        <p:spPr/>
+        <p:txBody>
+          <a:bodyPr/>
+          <a:lstStyle/>
+          <a:p>
+            <a:pPr lvl="0" indent="0">
+              <a:buNone/>
+            </a:pPr>
+            <a:r>
+              <a:rPr>
+                <a:solidFill>
+                  <a:srgbClr val="5E5E5E"/>
+                </a:solidFill>
+                <a:latin typeface="Courier"/>
+              </a:rPr>
+              <a:t># Force every date onto one fake shared year -------------</a:t>
+            </a:r>
+            <a:br/>
+            <a:r>
+              <a:rPr>
+                <a:solidFill>
+                  <a:srgbClr val="003B4F"/>
+                </a:solidFill>
+                <a:latin typeface="Courier"/>
+              </a:rPr>
+              <a:t>ice_plot_data &lt;- ice_clean </a:t>
+            </a:r>
+            <a:r>
+              <a:rPr>
+                <a:solidFill>
+                  <a:srgbClr val="5E5E5E"/>
+                </a:solidFill>
+                <a:latin typeface="Courier"/>
+              </a:rPr>
+              <a:t>%&gt;%</a:t>
+            </a:r>
+            <a:br/>
+            <a:r>
+              <a:rPr>
+                <a:solidFill>
+                  <a:srgbClr val="003B4F"/>
+                </a:solidFill>
+                <a:latin typeface="Courier"/>
+              </a:rPr>
+              <a:t>  </a:t>
+            </a:r>
+            <a:r>
+              <a:rPr>
+                <a:solidFill>
+                  <a:srgbClr val="4758AB"/>
+                </a:solidFill>
+                <a:latin typeface="Courier"/>
+              </a:rPr>
+              <a:t>mutate</a:t>
+            </a:r>
+            <a:r>
+              <a:rPr>
+                <a:solidFill>
+                  <a:srgbClr val="003B4F"/>
+                </a:solidFill>
+                <a:latin typeface="Courier"/>
+              </a:rPr>
+              <a:t>(</a:t>
+            </a:r>
+            <a:br/>
+            <a:r>
+              <a:rPr>
+                <a:solidFill>
+                  <a:srgbClr val="003B4F"/>
+                </a:solidFill>
+                <a:latin typeface="Courier"/>
+              </a:rPr>
+              <a:t>    </a:t>
+            </a:r>
+            <a:r>
+              <a:rPr>
+                <a:solidFill>
+                  <a:srgbClr val="657422"/>
+                </a:solidFill>
+                <a:latin typeface="Courier"/>
+              </a:rPr>
+              <a:t>plot_date =</a:t>
+            </a:r>
+            <a:r>
+              <a:rPr>
+                <a:solidFill>
+                  <a:srgbClr val="003B4F"/>
+                </a:solidFill>
+                <a:latin typeface="Courier"/>
+              </a:rPr>
+              <a:t> </a:t>
+            </a:r>
+            <a:r>
+              <a:rPr>
+                <a:solidFill>
+                  <a:srgbClr val="4758AB"/>
+                </a:solidFill>
+                <a:latin typeface="Courier"/>
+              </a:rPr>
+              <a:t>if_else</a:t>
+            </a:r>
+            <a:r>
+              <a:rPr>
+                <a:solidFill>
+                  <a:srgbClr val="003B4F"/>
+                </a:solidFill>
+                <a:latin typeface="Courier"/>
+              </a:rPr>
+              <a:t>(</a:t>
+            </a:r>
+            <a:br/>
+            <a:r>
+              <a:rPr>
+                <a:solidFill>
+                  <a:srgbClr val="003B4F"/>
+                </a:solidFill>
+                <a:latin typeface="Courier"/>
+              </a:rPr>
+              <a:t>      </a:t>
+            </a:r>
+            <a:r>
+              <a:rPr>
+                <a:solidFill>
+                  <a:srgbClr val="4758AB"/>
+                </a:solidFill>
+                <a:latin typeface="Courier"/>
+              </a:rPr>
+              <a:t>month</a:t>
+            </a:r>
+            <a:r>
+              <a:rPr>
+                <a:solidFill>
+                  <a:srgbClr val="003B4F"/>
+                </a:solidFill>
+                <a:latin typeface="Courier"/>
+              </a:rPr>
+              <a:t>(full_date) </a:t>
+            </a:r>
+            <a:r>
+              <a:rPr>
+                <a:solidFill>
+                  <a:srgbClr val="5E5E5E"/>
+                </a:solidFill>
+                <a:latin typeface="Courier"/>
+              </a:rPr>
+              <a:t>&gt;=</a:t>
+            </a:r>
+            <a:r>
+              <a:rPr>
+                <a:solidFill>
+                  <a:srgbClr val="003B4F"/>
+                </a:solidFill>
+                <a:latin typeface="Courier"/>
+              </a:rPr>
+              <a:t> </a:t>
+            </a:r>
+            <a:r>
+              <a:rPr>
+                <a:solidFill>
+                  <a:srgbClr val="AD0000"/>
+                </a:solidFill>
+                <a:latin typeface="Courier"/>
+              </a:rPr>
+              <a:t>10</a:t>
+            </a:r>
+            <a:r>
+              <a:rPr>
+                <a:solidFill>
+                  <a:srgbClr val="003B4F"/>
+                </a:solidFill>
+                <a:latin typeface="Courier"/>
+              </a:rPr>
+              <a:t>,</a:t>
+            </a:r>
+            <a:br/>
+            <a:r>
+              <a:rPr>
+                <a:solidFill>
+                  <a:srgbClr val="003B4F"/>
+                </a:solidFill>
+                <a:latin typeface="Courier"/>
+              </a:rPr>
+              <a:t>      </a:t>
+            </a:r>
+            <a:r>
+              <a:rPr>
+                <a:solidFill>
+                  <a:srgbClr val="4758AB"/>
+                </a:solidFill>
+                <a:latin typeface="Courier"/>
+              </a:rPr>
+              <a:t>update</a:t>
+            </a:r>
+            <a:r>
+              <a:rPr>
+                <a:solidFill>
+                  <a:srgbClr val="003B4F"/>
+                </a:solidFill>
+                <a:latin typeface="Courier"/>
+              </a:rPr>
+              <a:t>(full_date, </a:t>
+            </a:r>
+            <a:r>
+              <a:rPr>
+                <a:solidFill>
+                  <a:srgbClr val="657422"/>
+                </a:solidFill>
+                <a:latin typeface="Courier"/>
+              </a:rPr>
+              <a:t>year =</a:t>
+            </a:r>
+            <a:r>
+              <a:rPr>
+                <a:solidFill>
+                  <a:srgbClr val="003B4F"/>
+                </a:solidFill>
+                <a:latin typeface="Courier"/>
+              </a:rPr>
+              <a:t> </a:t>
+            </a:r>
+            <a:r>
+              <a:rPr>
+                <a:solidFill>
+                  <a:srgbClr val="AD0000"/>
+                </a:solidFill>
+                <a:latin typeface="Courier"/>
+              </a:rPr>
+              <a:t>1999</a:t>
+            </a:r>
+            <a:r>
+              <a:rPr>
+                <a:solidFill>
+                  <a:srgbClr val="003B4F"/>
+                </a:solidFill>
+                <a:latin typeface="Courier"/>
+              </a:rPr>
+              <a:t>),</a:t>
+            </a:r>
+            <a:br/>
+            <a:r>
+              <a:rPr>
+                <a:solidFill>
+                  <a:srgbClr val="003B4F"/>
+                </a:solidFill>
+                <a:latin typeface="Courier"/>
+              </a:rPr>
+              <a:t>      </a:t>
+            </a:r>
+            <a:r>
+              <a:rPr>
+                <a:solidFill>
+                  <a:srgbClr val="4758AB"/>
+                </a:solidFill>
+                <a:latin typeface="Courier"/>
+              </a:rPr>
+              <a:t>update</a:t>
+            </a:r>
+            <a:r>
+              <a:rPr>
+                <a:solidFill>
+                  <a:srgbClr val="003B4F"/>
+                </a:solidFill>
+                <a:latin typeface="Courier"/>
+              </a:rPr>
+              <a:t>(full_date, </a:t>
+            </a:r>
+            <a:r>
+              <a:rPr>
+                <a:solidFill>
+                  <a:srgbClr val="657422"/>
+                </a:solidFill>
+                <a:latin typeface="Courier"/>
+              </a:rPr>
+              <a:t>year =</a:t>
+            </a:r>
+            <a:r>
+              <a:rPr>
+                <a:solidFill>
+                  <a:srgbClr val="003B4F"/>
+                </a:solidFill>
+                <a:latin typeface="Courier"/>
+              </a:rPr>
+              <a:t> </a:t>
+            </a:r>
+            <a:r>
+              <a:rPr>
+                <a:solidFill>
+                  <a:srgbClr val="AD0000"/>
+                </a:solidFill>
+                <a:latin typeface="Courier"/>
+              </a:rPr>
+              <a:t>2000</a:t>
+            </a:r>
+            <a:r>
+              <a:rPr>
+                <a:solidFill>
+                  <a:srgbClr val="003B4F"/>
+                </a:solidFill>
+                <a:latin typeface="Courier"/>
+              </a:rPr>
+              <a:t>)</a:t>
+            </a:r>
+            <a:br/>
+            <a:r>
+              <a:rPr>
+                <a:solidFill>
+                  <a:srgbClr val="003B4F"/>
+                </a:solidFill>
+                <a:latin typeface="Courier"/>
+              </a:rPr>
+              <a:t>    )</a:t>
+            </a:r>
+            <a:br/>
+            <a:r>
+              <a:rPr>
+                <a:solidFill>
+                  <a:srgbClr val="003B4F"/>
+                </a:solidFill>
+                <a:latin typeface="Courier"/>
+              </a:rPr>
+              <a:t>  )</a:t>
+            </a:r>
+            <a:br/>
+            <a:br/>
+            <a:r>
+              <a:rPr>
+                <a:solidFill>
+                  <a:srgbClr val="5E5E5E"/>
+                </a:solidFill>
+                <a:latin typeface="Courier"/>
+              </a:rPr>
+              <a:t># Historical average for each day-of-winter ---------------</a:t>
+            </a:r>
+            <a:br/>
+            <a:r>
+              <a:rPr>
+                <a:solidFill>
+                  <a:srgbClr val="003B4F"/>
+                </a:solidFill>
+                <a:latin typeface="Courier"/>
+              </a:rPr>
+              <a:t>historical_avg &lt;- ice_plot_data </a:t>
+            </a:r>
+            <a:r>
+              <a:rPr>
+                <a:solidFill>
+                  <a:srgbClr val="5E5E5E"/>
+                </a:solidFill>
+                <a:latin typeface="Courier"/>
+              </a:rPr>
+              <a:t>%&gt;%</a:t>
+            </a:r>
+            <a:br/>
+            <a:r>
+              <a:rPr>
+                <a:solidFill>
+                  <a:srgbClr val="003B4F"/>
+                </a:solidFill>
+                <a:latin typeface="Courier"/>
+              </a:rPr>
+              <a:t>  </a:t>
+            </a:r>
+            <a:r>
+              <a:rPr>
+                <a:solidFill>
+                  <a:srgbClr val="4758AB"/>
+                </a:solidFill>
+                <a:latin typeface="Courier"/>
+              </a:rPr>
+              <a:t>group_by</a:t>
+            </a:r>
+            <a:r>
+              <a:rPr>
+                <a:solidFill>
+                  <a:srgbClr val="003B4F"/>
+                </a:solidFill>
+                <a:latin typeface="Courier"/>
+              </a:rPr>
+              <a:t>(plot_date) </a:t>
+            </a:r>
+            <a:r>
+              <a:rPr>
+                <a:solidFill>
+                  <a:srgbClr val="5E5E5E"/>
+                </a:solidFill>
+                <a:latin typeface="Courier"/>
+              </a:rPr>
+              <a:t>%&gt;%</a:t>
+            </a:r>
+            <a:br/>
+            <a:r>
+              <a:rPr>
+                <a:solidFill>
+                  <a:srgbClr val="003B4F"/>
+                </a:solidFill>
+                <a:latin typeface="Courier"/>
+              </a:rPr>
+              <a:t>  </a:t>
+            </a:r>
+            <a:r>
+              <a:rPr>
+                <a:solidFill>
+                  <a:srgbClr val="4758AB"/>
+                </a:solidFill>
+                <a:latin typeface="Courier"/>
+              </a:rPr>
+              <a:t>summarize</a:t>
+            </a:r>
+            <a:r>
+              <a:rPr>
+                <a:solidFill>
+                  <a:srgbClr val="003B4F"/>
+                </a:solidFill>
+                <a:latin typeface="Courier"/>
+              </a:rPr>
+              <a:t>(</a:t>
+            </a:r>
+            <a:r>
+              <a:rPr>
+                <a:solidFill>
+                  <a:srgbClr val="657422"/>
+                </a:solidFill>
+                <a:latin typeface="Courier"/>
+              </a:rPr>
+              <a:t>avg_ice =</a:t>
+            </a:r>
+            <a:r>
+              <a:rPr>
+                <a:solidFill>
+                  <a:srgbClr val="003B4F"/>
+                </a:solidFill>
+                <a:latin typeface="Courier"/>
+              </a:rPr>
+              <a:t> </a:t>
+            </a:r>
+            <a:r>
+              <a:rPr>
+                <a:solidFill>
+                  <a:srgbClr val="4758AB"/>
+                </a:solidFill>
+                <a:latin typeface="Courier"/>
+              </a:rPr>
+              <a:t>mean</a:t>
+            </a:r>
+            <a:r>
+              <a:rPr>
+                <a:solidFill>
+                  <a:srgbClr val="003B4F"/>
+                </a:solidFill>
+                <a:latin typeface="Courier"/>
+              </a:rPr>
+              <a:t>(ice_cover, </a:t>
+            </a:r>
+            <a:r>
+              <a:rPr>
+                <a:solidFill>
+                  <a:srgbClr val="657422"/>
+                </a:solidFill>
+                <a:latin typeface="Courier"/>
+              </a:rPr>
+              <a:t>na.rm =</a:t>
+            </a:r>
+            <a:r>
+              <a:rPr>
+                <a:solidFill>
+                  <a:srgbClr val="003B4F"/>
+                </a:solidFill>
+                <a:latin typeface="Courier"/>
+              </a:rPr>
+              <a:t> </a:t>
+            </a:r>
+            <a:r>
+              <a:rPr>
+                <a:solidFill>
+                  <a:srgbClr val="8F5902"/>
+                </a:solidFill>
+                <a:latin typeface="Courier"/>
+              </a:rPr>
+              <a:t>TRUE</a:t>
+            </a:r>
+            <a:r>
+              <a:rPr>
+                <a:solidFill>
+                  <a:srgbClr val="003B4F"/>
+                </a:solidFill>
+                <a:latin typeface="Courier"/>
+              </a:rPr>
+              <a:t>))</a:t>
+            </a:r>
+            <a:br/>
+            <a:br/>
+            <a:r>
+              <a:rPr>
+                <a:solidFill>
+                  <a:srgbClr val="003B4F"/>
+                </a:solidFill>
+                <a:latin typeface="Courier"/>
+              </a:rPr>
+              <a:t>current_yr         &lt;- </a:t>
+            </a:r>
+            <a:r>
+              <a:rPr>
+                <a:solidFill>
+                  <a:srgbClr val="4758AB"/>
+                </a:solidFill>
+                <a:latin typeface="Courier"/>
+              </a:rPr>
+              <a:t>max</a:t>
+            </a:r>
+            <a:r>
+              <a:rPr>
+                <a:solidFill>
+                  <a:srgbClr val="003B4F"/>
+                </a:solidFill>
+                <a:latin typeface="Courier"/>
+              </a:rPr>
+              <a:t>(ice_plot_data</a:t>
+            </a:r>
+            <a:r>
+              <a:rPr>
+                <a:solidFill>
+                  <a:srgbClr val="5E5E5E"/>
+                </a:solidFill>
+                <a:latin typeface="Courier"/>
+              </a:rPr>
+              <a:t>$</a:t>
+            </a:r>
+            <a:r>
+              <a:rPr>
+                <a:solidFill>
+                  <a:srgbClr val="003B4F"/>
+                </a:solidFill>
+                <a:latin typeface="Courier"/>
+              </a:rPr>
+              <a:t>year)</a:t>
+            </a:r>
+            <a:br/>
+            <a:r>
+              <a:rPr>
+                <a:solidFill>
+                  <a:srgbClr val="003B4F"/>
+                </a:solidFill>
+                <a:latin typeface="Courier"/>
+              </a:rPr>
+              <a:t>past_years         &lt;- ice_plot_data </a:t>
+            </a:r>
+            <a:r>
+              <a:rPr>
+                <a:solidFill>
+                  <a:srgbClr val="5E5E5E"/>
+                </a:solidFill>
+                <a:latin typeface="Courier"/>
+              </a:rPr>
+              <a:t>%&gt;%</a:t>
+            </a:r>
+            <a:r>
+              <a:rPr>
+                <a:solidFill>
+                  <a:srgbClr val="003B4F"/>
+                </a:solidFill>
+                <a:latin typeface="Courier"/>
+              </a:rPr>
+              <a:t> </a:t>
+            </a:r>
+            <a:r>
+              <a:rPr>
+                <a:solidFill>
+                  <a:srgbClr val="4758AB"/>
+                </a:solidFill>
+                <a:latin typeface="Courier"/>
+              </a:rPr>
+              <a:t>filter</a:t>
+            </a:r>
+            <a:r>
+              <a:rPr>
+                <a:solidFill>
+                  <a:srgbClr val="003B4F"/>
+                </a:solidFill>
+                <a:latin typeface="Courier"/>
+              </a:rPr>
+              <a:t>(year </a:t>
+            </a:r>
+            <a:r>
+              <a:rPr>
+                <a:solidFill>
+                  <a:srgbClr val="5E5E5E"/>
+                </a:solidFill>
+                <a:latin typeface="Courier"/>
+              </a:rPr>
+              <a:t>&lt;</a:t>
+            </a:r>
+            <a:r>
+              <a:rPr>
+                <a:solidFill>
+                  <a:srgbClr val="003B4F"/>
+                </a:solidFill>
+                <a:latin typeface="Courier"/>
+              </a:rPr>
+              <a:t> current_yr)</a:t>
+            </a:r>
+            <a:br/>
+            <a:r>
+              <a:rPr>
+                <a:solidFill>
+                  <a:srgbClr val="003B4F"/>
+                </a:solidFill>
+                <a:latin typeface="Courier"/>
+              </a:rPr>
+              <a:t>current_year_data  &lt;- ice_plot_data </a:t>
+            </a:r>
+            <a:r>
+              <a:rPr>
+                <a:solidFill>
+                  <a:srgbClr val="5E5E5E"/>
+                </a:solidFill>
+                <a:latin typeface="Courier"/>
+              </a:rPr>
+              <a:t>%&gt;%</a:t>
+            </a:r>
+            <a:r>
+              <a:rPr>
+                <a:solidFill>
+                  <a:srgbClr val="003B4F"/>
+                </a:solidFill>
+                <a:latin typeface="Courier"/>
+              </a:rPr>
+              <a:t> </a:t>
+            </a:r>
+            <a:r>
+              <a:rPr>
+                <a:solidFill>
+                  <a:srgbClr val="4758AB"/>
+                </a:solidFill>
+                <a:latin typeface="Courier"/>
+              </a:rPr>
+              <a:t>filter</a:t>
+            </a:r>
+            <a:r>
+              <a:rPr>
+                <a:solidFill>
+                  <a:srgbClr val="003B4F"/>
+                </a:solidFill>
+                <a:latin typeface="Courier"/>
+              </a:rPr>
+              <a:t>(year </a:t>
+            </a:r>
+            <a:r>
+              <a:rPr>
+                <a:solidFill>
+                  <a:srgbClr val="5E5E5E"/>
+                </a:solidFill>
+                <a:latin typeface="Courier"/>
+              </a:rPr>
+              <a:t>==</a:t>
+            </a:r>
+            <a:r>
+              <a:rPr>
+                <a:solidFill>
+                  <a:srgbClr val="003B4F"/>
+                </a:solidFill>
+                <a:latin typeface="Courier"/>
+              </a:rPr>
+              <a:t> current_yr)</a:t>
+            </a:r>
+          </a:p>
+        </p:txBody>
+      </p:sp>
+      <p:sp>
+        <p:nvSpPr>
+          <p:cNvPr id="4" name="Content Placeholder 3"/>
+          <p:cNvSpPr>
+            <a:spLocks noGrp="1"/>
+          </p:cNvSpPr>
+          <p:nvPr>
+            <p:ph idx="2" sz="half"/>
+          </p:nvPr>
+        </p:nvSpPr>
+        <p:spPr/>
+        <p:txBody>
+          <a:bodyPr/>
+          <a:lstStyle/>
+          <a:p>
+            <a:pPr lvl="0" indent="0" marL="0">
+              <a:buNone/>
+            </a:pPr>
+            <a:r>
+              <a:rPr b="1"/>
+              <a:t>The trick:</a:t>
+            </a:r>
+            <a:r>
+              <a:rPr/>
+              <a:t> every winter spans two real calendar years (e.g. Nov 1973–May 1974). To overlay them, we relabel every date onto </a:t>
+            </a:r>
+            <a:r>
+              <a:rPr b="1"/>
+              <a:t>one fake shared year</a:t>
+            </a:r>
+            <a:r>
+              <a:rPr/>
+              <a:t> (1999 for fall, 2000 for spring) — only the month/day matters for the x-axis.</a:t>
+            </a:r>
+          </a:p>
+          <a:p>
+            <a:pPr lvl="0" indent="0" marL="0">
+              <a:buNone/>
+            </a:pPr>
+            <a:r>
+              <a:rPr/>
+              <a:t>This is a common trick for any </a:t>
+            </a:r>
+            <a:r>
+              <a:rPr b="1"/>
+              <a:t>seasonal, cyclical</a:t>
+            </a:r>
+            <a:r>
+              <a:rPr/>
+              <a:t> time series.</a:t>
+            </a:r>
+          </a:p>
+        </p:txBody>
+      </p:sp>
+    </p:spTree>
+  </p:cSld>
+</p:sld>
+</file>
+
+<file path=ppt/slides/slide15.xml><?xml version="1.0" encoding="utf-8"?>
+<p:sld xmlns:a="http://schemas.openxmlformats.org/drawingml/2006/main" xmlns:r="http://schemas.openxmlformats.org/officeDocument/2006/relationships" xmlns:p="http://schemas.openxmlformats.org/presentationml/2006/main">
+  <p:cSld>
+    <p:spTree>
+      <p:nvGrpSpPr>
+        <p:cNvPr id="1" name=""/>
+        <p:cNvGrpSpPr/>
+        <p:nvPr/>
+      </p:nvGrpSpPr>
+      <p:grpSpPr>
+        <a:xfrm>
+          <a:off x="0" y="0"/>
+          <a:ext cx="0" cy="0"/>
+          <a:chOff x="0" y="0"/>
+          <a:chExt cx="0" cy="0"/>
+        </a:xfrm>
+      </p:grpSpPr>
+      <p:sp>
+        <p:nvSpPr>
+          <p:cNvPr id="2" name="Title 1"/>
+          <p:cNvSpPr>
+            <a:spLocks noGrp="1"/>
+          </p:cNvSpPr>
+          <p:nvPr>
+            <p:ph type="title"/>
+          </p:nvPr>
+        </p:nvSpPr>
+        <p:spPr>
+          <a:xfrm>
+            <a:off x="139485" y="78119"/>
+            <a:ext cx="8229600" cy="607682"/>
+          </a:xfrm>
+        </p:spPr>
+        <p:txBody>
+          <a:bodyPr/>
+          <a:lstStyle/>
+          <a:p>
+            <a:pPr lvl="0" indent="0" marL="0">
+              <a:buNone/>
+            </a:pPr>
+            <a:r>
+              <a:rPr/>
+              <a:t>Build the Spaghetti Plot</a:t>
+            </a:r>
+          </a:p>
+        </p:txBody>
+      </p:sp>
+      <p:sp>
+        <p:nvSpPr>
+          <p:cNvPr id="3" name="Text Placeholder 2"/>
+          <p:cNvSpPr>
+            <a:spLocks noGrp="1"/>
+          </p:cNvSpPr>
+          <p:nvPr>
+            <p:ph idx="1" type="body"/>
+          </p:nvPr>
+        </p:nvSpPr>
+        <p:spPr/>
+        <p:txBody>
+          <a:bodyPr/>
+          <a:lstStyle/>
+          <a:p>
+            <a:pPr lvl="0" indent="0">
+              <a:buNone/>
+            </a:pPr>
+            <a:r>
+              <a:rPr>
+                <a:solidFill>
+                  <a:srgbClr val="003B4F"/>
+                </a:solidFill>
+                <a:latin typeface="Courier"/>
+              </a:rPr>
+              <a:t>ice_spaghetti_plot &lt;- </a:t>
+            </a:r>
+            <a:r>
+              <a:rPr>
+                <a:solidFill>
+                  <a:srgbClr val="4758AB"/>
+                </a:solidFill>
+                <a:latin typeface="Courier"/>
+              </a:rPr>
+              <a:t>ggplot</a:t>
+            </a:r>
+            <a:r>
+              <a:rPr>
+                <a:solidFill>
+                  <a:srgbClr val="003B4F"/>
+                </a:solidFill>
+                <a:latin typeface="Courier"/>
+              </a:rPr>
+              <a:t>() </a:t>
+            </a:r>
+            <a:r>
+              <a:rPr>
+                <a:solidFill>
+                  <a:srgbClr val="5E5E5E"/>
+                </a:solidFill>
+                <a:latin typeface="Courier"/>
+              </a:rPr>
+              <a:t>+</a:t>
+            </a:r>
+            <a:br/>
+            <a:r>
+              <a:rPr>
+                <a:solidFill>
+                  <a:srgbClr val="003B4F"/>
+                </a:solidFill>
+                <a:latin typeface="Courier"/>
+              </a:rPr>
+              <a:t>  </a:t>
+            </a:r>
+            <a:r>
+              <a:rPr>
+                <a:solidFill>
+                  <a:srgbClr val="4758AB"/>
+                </a:solidFill>
+                <a:latin typeface="Courier"/>
+              </a:rPr>
+              <a:t>geom_line</a:t>
+            </a:r>
+            <a:r>
+              <a:rPr>
+                <a:solidFill>
+                  <a:srgbClr val="003B4F"/>
+                </a:solidFill>
+                <a:latin typeface="Courier"/>
+              </a:rPr>
+              <a:t>(</a:t>
+            </a:r>
+            <a:br/>
+            <a:r>
+              <a:rPr>
+                <a:solidFill>
+                  <a:srgbClr val="003B4F"/>
+                </a:solidFill>
+                <a:latin typeface="Courier"/>
+              </a:rPr>
+              <a:t>    </a:t>
+            </a:r>
+            <a:r>
+              <a:rPr>
+                <a:solidFill>
+                  <a:srgbClr val="657422"/>
+                </a:solidFill>
+                <a:latin typeface="Courier"/>
+              </a:rPr>
+              <a:t>data =</a:t>
+            </a:r>
+            <a:r>
+              <a:rPr>
+                <a:solidFill>
+                  <a:srgbClr val="003B4F"/>
+                </a:solidFill>
+                <a:latin typeface="Courier"/>
+              </a:rPr>
+              <a:t> past_years,</a:t>
+            </a:r>
+            <a:br/>
+            <a:r>
+              <a:rPr>
+                <a:solidFill>
+                  <a:srgbClr val="003B4F"/>
+                </a:solidFill>
+                <a:latin typeface="Courier"/>
+              </a:rPr>
+              <a:t>    </a:t>
+            </a:r>
+            <a:r>
+              <a:rPr>
+                <a:solidFill>
+                  <a:srgbClr val="4758AB"/>
+                </a:solidFill>
+                <a:latin typeface="Courier"/>
+              </a:rPr>
+              <a:t>aes</a:t>
+            </a:r>
+            <a:r>
+              <a:rPr>
+                <a:solidFill>
+                  <a:srgbClr val="003B4F"/>
+                </a:solidFill>
+                <a:latin typeface="Courier"/>
+              </a:rPr>
+              <a:t>(</a:t>
+            </a:r>
+            <a:r>
+              <a:rPr>
+                <a:solidFill>
+                  <a:srgbClr val="657422"/>
+                </a:solidFill>
+                <a:latin typeface="Courier"/>
+              </a:rPr>
+              <a:t>x =</a:t>
+            </a:r>
+            <a:r>
+              <a:rPr>
+                <a:solidFill>
+                  <a:srgbClr val="003B4F"/>
+                </a:solidFill>
+                <a:latin typeface="Courier"/>
+              </a:rPr>
+              <a:t> plot_date, </a:t>
+            </a:r>
+            <a:r>
+              <a:rPr>
+                <a:solidFill>
+                  <a:srgbClr val="657422"/>
+                </a:solidFill>
+                <a:latin typeface="Courier"/>
+              </a:rPr>
+              <a:t>y =</a:t>
+            </a:r>
+            <a:r>
+              <a:rPr>
+                <a:solidFill>
+                  <a:srgbClr val="003B4F"/>
+                </a:solidFill>
+                <a:latin typeface="Courier"/>
+              </a:rPr>
+              <a:t> ice_cover, </a:t>
+            </a:r>
+            <a:r>
+              <a:rPr>
+                <a:solidFill>
+                  <a:srgbClr val="657422"/>
+                </a:solidFill>
+                <a:latin typeface="Courier"/>
+              </a:rPr>
+              <a:t>group =</a:t>
+            </a:r>
+            <a:r>
+              <a:rPr>
+                <a:solidFill>
+                  <a:srgbClr val="003B4F"/>
+                </a:solidFill>
+                <a:latin typeface="Courier"/>
+              </a:rPr>
+              <a:t> year),</a:t>
+            </a:r>
+            <a:br/>
+            <a:r>
+              <a:rPr>
+                <a:solidFill>
+                  <a:srgbClr val="003B4F"/>
+                </a:solidFill>
+                <a:latin typeface="Courier"/>
+              </a:rPr>
+              <a:t>    </a:t>
+            </a:r>
+            <a:r>
+              <a:rPr>
+                <a:solidFill>
+                  <a:srgbClr val="657422"/>
+                </a:solidFill>
+                <a:latin typeface="Courier"/>
+              </a:rPr>
+              <a:t>color =</a:t>
+            </a:r>
+            <a:r>
+              <a:rPr>
+                <a:solidFill>
+                  <a:srgbClr val="003B4F"/>
+                </a:solidFill>
+                <a:latin typeface="Courier"/>
+              </a:rPr>
+              <a:t> </a:t>
+            </a:r>
+            <a:r>
+              <a:rPr>
+                <a:solidFill>
+                  <a:srgbClr val="20794D"/>
+                </a:solidFill>
+                <a:latin typeface="Courier"/>
+              </a:rPr>
+              <a:t>"blue"</a:t>
+            </a:r>
+            <a:r>
+              <a:rPr>
+                <a:solidFill>
+                  <a:srgbClr val="003B4F"/>
+                </a:solidFill>
+                <a:latin typeface="Courier"/>
+              </a:rPr>
+              <a:t>, </a:t>
+            </a:r>
+            <a:r>
+              <a:rPr>
+                <a:solidFill>
+                  <a:srgbClr val="657422"/>
+                </a:solidFill>
+                <a:latin typeface="Courier"/>
+              </a:rPr>
+              <a:t>alpha =</a:t>
+            </a:r>
+            <a:r>
+              <a:rPr>
+                <a:solidFill>
+                  <a:srgbClr val="003B4F"/>
+                </a:solidFill>
+                <a:latin typeface="Courier"/>
+              </a:rPr>
+              <a:t> </a:t>
+            </a:r>
+            <a:r>
+              <a:rPr>
+                <a:solidFill>
+                  <a:srgbClr val="AD0000"/>
+                </a:solidFill>
+                <a:latin typeface="Courier"/>
+              </a:rPr>
+              <a:t>0.15</a:t>
+            </a:r>
+            <a:br/>
+            <a:r>
+              <a:rPr>
+                <a:solidFill>
+                  <a:srgbClr val="003B4F"/>
+                </a:solidFill>
+                <a:latin typeface="Courier"/>
+              </a:rPr>
+              <a:t>  ) </a:t>
+            </a:r>
+            <a:r>
+              <a:rPr>
+                <a:solidFill>
+                  <a:srgbClr val="5E5E5E"/>
+                </a:solidFill>
+                <a:latin typeface="Courier"/>
+              </a:rPr>
+              <a:t>+</a:t>
+            </a:r>
+            <a:br/>
+            <a:r>
+              <a:rPr>
+                <a:solidFill>
+                  <a:srgbClr val="003B4F"/>
+                </a:solidFill>
+                <a:latin typeface="Courier"/>
+              </a:rPr>
+              <a:t>  </a:t>
+            </a:r>
+            <a:r>
+              <a:rPr>
+                <a:solidFill>
+                  <a:srgbClr val="4758AB"/>
+                </a:solidFill>
+                <a:latin typeface="Courier"/>
+              </a:rPr>
+              <a:t>geom_line</a:t>
+            </a:r>
+            <a:r>
+              <a:rPr>
+                <a:solidFill>
+                  <a:srgbClr val="003B4F"/>
+                </a:solidFill>
+                <a:latin typeface="Courier"/>
+              </a:rPr>
+              <a:t>(</a:t>
+            </a:r>
+            <a:br/>
+            <a:r>
+              <a:rPr>
+                <a:solidFill>
+                  <a:srgbClr val="003B4F"/>
+                </a:solidFill>
+                <a:latin typeface="Courier"/>
+              </a:rPr>
+              <a:t>    </a:t>
+            </a:r>
+            <a:r>
+              <a:rPr>
+                <a:solidFill>
+                  <a:srgbClr val="657422"/>
+                </a:solidFill>
+                <a:latin typeface="Courier"/>
+              </a:rPr>
+              <a:t>data =</a:t>
+            </a:r>
+            <a:r>
+              <a:rPr>
+                <a:solidFill>
+                  <a:srgbClr val="003B4F"/>
+                </a:solidFill>
+                <a:latin typeface="Courier"/>
+              </a:rPr>
+              <a:t> historical_avg,</a:t>
+            </a:r>
+            <a:br/>
+            <a:r>
+              <a:rPr>
+                <a:solidFill>
+                  <a:srgbClr val="003B4F"/>
+                </a:solidFill>
+                <a:latin typeface="Courier"/>
+              </a:rPr>
+              <a:t>    </a:t>
+            </a:r>
+            <a:r>
+              <a:rPr>
+                <a:solidFill>
+                  <a:srgbClr val="4758AB"/>
+                </a:solidFill>
+                <a:latin typeface="Courier"/>
+              </a:rPr>
+              <a:t>aes</a:t>
+            </a:r>
+            <a:r>
+              <a:rPr>
+                <a:solidFill>
+                  <a:srgbClr val="003B4F"/>
+                </a:solidFill>
+                <a:latin typeface="Courier"/>
+              </a:rPr>
+              <a:t>(</a:t>
+            </a:r>
+            <a:r>
+              <a:rPr>
+                <a:solidFill>
+                  <a:srgbClr val="657422"/>
+                </a:solidFill>
+                <a:latin typeface="Courier"/>
+              </a:rPr>
+              <a:t>x =</a:t>
+            </a:r>
+            <a:r>
+              <a:rPr>
+                <a:solidFill>
+                  <a:srgbClr val="003B4F"/>
+                </a:solidFill>
+                <a:latin typeface="Courier"/>
+              </a:rPr>
+              <a:t> plot_date, </a:t>
+            </a:r>
+            <a:r>
+              <a:rPr>
+                <a:solidFill>
+                  <a:srgbClr val="657422"/>
+                </a:solidFill>
+                <a:latin typeface="Courier"/>
+              </a:rPr>
+              <a:t>y =</a:t>
+            </a:r>
+            <a:r>
+              <a:rPr>
+                <a:solidFill>
+                  <a:srgbClr val="003B4F"/>
+                </a:solidFill>
+                <a:latin typeface="Courier"/>
+              </a:rPr>
+              <a:t> avg_ice),</a:t>
+            </a:r>
+            <a:br/>
+            <a:r>
+              <a:rPr>
+                <a:solidFill>
+                  <a:srgbClr val="003B4F"/>
+                </a:solidFill>
+                <a:latin typeface="Courier"/>
+              </a:rPr>
+              <a:t>    </a:t>
+            </a:r>
+            <a:r>
+              <a:rPr>
+                <a:solidFill>
+                  <a:srgbClr val="657422"/>
+                </a:solidFill>
+                <a:latin typeface="Courier"/>
+              </a:rPr>
+              <a:t>color =</a:t>
+            </a:r>
+            <a:r>
+              <a:rPr>
+                <a:solidFill>
+                  <a:srgbClr val="003B4F"/>
+                </a:solidFill>
+                <a:latin typeface="Courier"/>
+              </a:rPr>
+              <a:t> </a:t>
+            </a:r>
+            <a:r>
+              <a:rPr>
+                <a:solidFill>
+                  <a:srgbClr val="20794D"/>
+                </a:solidFill>
+                <a:latin typeface="Courier"/>
+              </a:rPr>
+              <a:t>"red"</a:t>
+            </a:r>
+            <a:r>
+              <a:rPr>
+                <a:solidFill>
+                  <a:srgbClr val="003B4F"/>
+                </a:solidFill>
+                <a:latin typeface="Courier"/>
+              </a:rPr>
+              <a:t>, </a:t>
+            </a:r>
+            <a:r>
+              <a:rPr>
+                <a:solidFill>
+                  <a:srgbClr val="657422"/>
+                </a:solidFill>
+                <a:latin typeface="Courier"/>
+              </a:rPr>
+              <a:t>linewidth =</a:t>
+            </a:r>
+            <a:r>
+              <a:rPr>
+                <a:solidFill>
+                  <a:srgbClr val="003B4F"/>
+                </a:solidFill>
+                <a:latin typeface="Courier"/>
+              </a:rPr>
+              <a:t> </a:t>
+            </a:r>
+            <a:r>
+              <a:rPr>
+                <a:solidFill>
+                  <a:srgbClr val="AD0000"/>
+                </a:solidFill>
+                <a:latin typeface="Courier"/>
+              </a:rPr>
+              <a:t>1.2</a:t>
+            </a:r>
+            <a:br/>
+            <a:r>
+              <a:rPr>
+                <a:solidFill>
+                  <a:srgbClr val="003B4F"/>
+                </a:solidFill>
+                <a:latin typeface="Courier"/>
+              </a:rPr>
+              <a:t>  ) </a:t>
+            </a:r>
+            <a:r>
+              <a:rPr>
+                <a:solidFill>
+                  <a:srgbClr val="5E5E5E"/>
+                </a:solidFill>
+                <a:latin typeface="Courier"/>
+              </a:rPr>
+              <a:t>+</a:t>
+            </a:r>
+            <a:br/>
+            <a:r>
+              <a:rPr>
+                <a:solidFill>
+                  <a:srgbClr val="003B4F"/>
+                </a:solidFill>
+                <a:latin typeface="Courier"/>
+              </a:rPr>
+              <a:t>  </a:t>
+            </a:r>
+            <a:r>
+              <a:rPr>
+                <a:solidFill>
+                  <a:srgbClr val="4758AB"/>
+                </a:solidFill>
+                <a:latin typeface="Courier"/>
+              </a:rPr>
+              <a:t>geom_line</a:t>
+            </a:r>
+            <a:r>
+              <a:rPr>
+                <a:solidFill>
+                  <a:srgbClr val="003B4F"/>
+                </a:solidFill>
+                <a:latin typeface="Courier"/>
+              </a:rPr>
+              <a:t>(</a:t>
+            </a:r>
+            <a:br/>
+            <a:r>
+              <a:rPr>
+                <a:solidFill>
+                  <a:srgbClr val="003B4F"/>
+                </a:solidFill>
+                <a:latin typeface="Courier"/>
+              </a:rPr>
+              <a:t>    </a:t>
+            </a:r>
+            <a:r>
+              <a:rPr>
+                <a:solidFill>
+                  <a:srgbClr val="657422"/>
+                </a:solidFill>
+                <a:latin typeface="Courier"/>
+              </a:rPr>
+              <a:t>data =</a:t>
+            </a:r>
+            <a:r>
+              <a:rPr>
+                <a:solidFill>
+                  <a:srgbClr val="003B4F"/>
+                </a:solidFill>
+                <a:latin typeface="Courier"/>
+              </a:rPr>
+              <a:t> current_year_data,</a:t>
+            </a:r>
+            <a:br/>
+            <a:r>
+              <a:rPr>
+                <a:solidFill>
+                  <a:srgbClr val="003B4F"/>
+                </a:solidFill>
+                <a:latin typeface="Courier"/>
+              </a:rPr>
+              <a:t>    </a:t>
+            </a:r>
+            <a:r>
+              <a:rPr>
+                <a:solidFill>
+                  <a:srgbClr val="4758AB"/>
+                </a:solidFill>
+                <a:latin typeface="Courier"/>
+              </a:rPr>
+              <a:t>aes</a:t>
+            </a:r>
+            <a:r>
+              <a:rPr>
+                <a:solidFill>
+                  <a:srgbClr val="003B4F"/>
+                </a:solidFill>
+                <a:latin typeface="Courier"/>
+              </a:rPr>
+              <a:t>(</a:t>
+            </a:r>
+            <a:r>
+              <a:rPr>
+                <a:solidFill>
+                  <a:srgbClr val="657422"/>
+                </a:solidFill>
+                <a:latin typeface="Courier"/>
+              </a:rPr>
+              <a:t>x =</a:t>
+            </a:r>
+            <a:r>
+              <a:rPr>
+                <a:solidFill>
+                  <a:srgbClr val="003B4F"/>
+                </a:solidFill>
+                <a:latin typeface="Courier"/>
+              </a:rPr>
+              <a:t> plot_date, </a:t>
+            </a:r>
+            <a:r>
+              <a:rPr>
+                <a:solidFill>
+                  <a:srgbClr val="657422"/>
+                </a:solidFill>
+                <a:latin typeface="Courier"/>
+              </a:rPr>
+              <a:t>y =</a:t>
+            </a:r>
+            <a:r>
+              <a:rPr>
+                <a:solidFill>
+                  <a:srgbClr val="003B4F"/>
+                </a:solidFill>
+                <a:latin typeface="Courier"/>
+              </a:rPr>
+              <a:t> ice_cover),</a:t>
+            </a:r>
+            <a:br/>
+            <a:r>
+              <a:rPr>
+                <a:solidFill>
+                  <a:srgbClr val="003B4F"/>
+                </a:solidFill>
+                <a:latin typeface="Courier"/>
+              </a:rPr>
+              <a:t>    </a:t>
+            </a:r>
+            <a:r>
+              <a:rPr>
+                <a:solidFill>
+                  <a:srgbClr val="657422"/>
+                </a:solidFill>
+                <a:latin typeface="Courier"/>
+              </a:rPr>
+              <a:t>color =</a:t>
+            </a:r>
+            <a:r>
+              <a:rPr>
+                <a:solidFill>
+                  <a:srgbClr val="003B4F"/>
+                </a:solidFill>
+                <a:latin typeface="Courier"/>
+              </a:rPr>
+              <a:t> </a:t>
+            </a:r>
+            <a:r>
+              <a:rPr>
+                <a:solidFill>
+                  <a:srgbClr val="20794D"/>
+                </a:solidFill>
+                <a:latin typeface="Courier"/>
+              </a:rPr>
+              <a:t>"black"</a:t>
+            </a:r>
+            <a:r>
+              <a:rPr>
+                <a:solidFill>
+                  <a:srgbClr val="003B4F"/>
+                </a:solidFill>
+                <a:latin typeface="Courier"/>
+              </a:rPr>
+              <a:t>, </a:t>
+            </a:r>
+            <a:r>
+              <a:rPr>
+                <a:solidFill>
+                  <a:srgbClr val="657422"/>
+                </a:solidFill>
+                <a:latin typeface="Courier"/>
+              </a:rPr>
+              <a:t>linewidth =</a:t>
+            </a:r>
+            <a:r>
+              <a:rPr>
+                <a:solidFill>
+                  <a:srgbClr val="003B4F"/>
+                </a:solidFill>
+                <a:latin typeface="Courier"/>
+              </a:rPr>
+              <a:t> </a:t>
+            </a:r>
+            <a:r>
+              <a:rPr>
+                <a:solidFill>
+                  <a:srgbClr val="AD0000"/>
+                </a:solidFill>
+                <a:latin typeface="Courier"/>
+              </a:rPr>
+              <a:t>1.2</a:t>
+            </a:r>
+            <a:br/>
+            <a:r>
+              <a:rPr>
+                <a:solidFill>
+                  <a:srgbClr val="003B4F"/>
+                </a:solidFill>
+                <a:latin typeface="Courier"/>
+              </a:rPr>
+              <a:t>  ) </a:t>
+            </a:r>
+            <a:r>
+              <a:rPr>
+                <a:solidFill>
+                  <a:srgbClr val="5E5E5E"/>
+                </a:solidFill>
+                <a:latin typeface="Courier"/>
+              </a:rPr>
+              <a:t>+</a:t>
+            </a:r>
+            <a:br/>
+            <a:r>
+              <a:rPr>
+                <a:solidFill>
+                  <a:srgbClr val="003B4F"/>
+                </a:solidFill>
+                <a:latin typeface="Courier"/>
+              </a:rPr>
+              <a:t>  </a:t>
+            </a:r>
+            <a:r>
+              <a:rPr>
+                <a:solidFill>
+                  <a:srgbClr val="4758AB"/>
+                </a:solidFill>
+                <a:latin typeface="Courier"/>
+              </a:rPr>
+              <a:t>scale_x_date</a:t>
+            </a:r>
+            <a:r>
+              <a:rPr>
+                <a:solidFill>
+                  <a:srgbClr val="003B4F"/>
+                </a:solidFill>
+                <a:latin typeface="Courier"/>
+              </a:rPr>
+              <a:t>(</a:t>
+            </a:r>
+            <a:r>
+              <a:rPr>
+                <a:solidFill>
+                  <a:srgbClr val="657422"/>
+                </a:solidFill>
+                <a:latin typeface="Courier"/>
+              </a:rPr>
+              <a:t>date_labels =</a:t>
+            </a:r>
+            <a:r>
+              <a:rPr>
+                <a:solidFill>
+                  <a:srgbClr val="003B4F"/>
+                </a:solidFill>
+                <a:latin typeface="Courier"/>
+              </a:rPr>
+              <a:t> </a:t>
+            </a:r>
+            <a:r>
+              <a:rPr>
+                <a:solidFill>
+                  <a:srgbClr val="20794D"/>
+                </a:solidFill>
+                <a:latin typeface="Courier"/>
+              </a:rPr>
+              <a:t>"%b"</a:t>
+            </a:r>
+            <a:r>
+              <a:rPr>
+                <a:solidFill>
+                  <a:srgbClr val="003B4F"/>
+                </a:solidFill>
+                <a:latin typeface="Courier"/>
+              </a:rPr>
+              <a:t>, </a:t>
+            </a:r>
+            <a:r>
+              <a:rPr>
+                <a:solidFill>
+                  <a:srgbClr val="657422"/>
+                </a:solidFill>
+                <a:latin typeface="Courier"/>
+              </a:rPr>
+              <a:t>date_breaks =</a:t>
+            </a:r>
+            <a:r>
+              <a:rPr>
+                <a:solidFill>
+                  <a:srgbClr val="003B4F"/>
+                </a:solidFill>
+                <a:latin typeface="Courier"/>
+              </a:rPr>
+              <a:t> </a:t>
+            </a:r>
+            <a:r>
+              <a:rPr>
+                <a:solidFill>
+                  <a:srgbClr val="20794D"/>
+                </a:solidFill>
+                <a:latin typeface="Courier"/>
+              </a:rPr>
+              <a:t>"1 month"</a:t>
+            </a:r>
+            <a:r>
+              <a:rPr>
+                <a:solidFill>
+                  <a:srgbClr val="003B4F"/>
+                </a:solidFill>
+                <a:latin typeface="Courier"/>
+              </a:rPr>
+              <a:t>) </a:t>
+            </a:r>
+            <a:r>
+              <a:rPr>
+                <a:solidFill>
+                  <a:srgbClr val="5E5E5E"/>
+                </a:solidFill>
+                <a:latin typeface="Courier"/>
+              </a:rPr>
+              <a:t>+</a:t>
+            </a:r>
+            <a:br/>
+            <a:r>
+              <a:rPr>
+                <a:solidFill>
+                  <a:srgbClr val="003B4F"/>
+                </a:solidFill>
+                <a:latin typeface="Courier"/>
+              </a:rPr>
+              <a:t>  </a:t>
+            </a:r>
+            <a:r>
+              <a:rPr>
+                <a:solidFill>
+                  <a:srgbClr val="4758AB"/>
+                </a:solidFill>
+                <a:latin typeface="Courier"/>
+              </a:rPr>
+              <a:t>labs</a:t>
+            </a:r>
+            <a:r>
+              <a:rPr>
+                <a:solidFill>
+                  <a:srgbClr val="003B4F"/>
+                </a:solidFill>
+                <a:latin typeface="Courier"/>
+              </a:rPr>
+              <a:t>(</a:t>
+            </a:r>
+            <a:br/>
+            <a:r>
+              <a:rPr>
+                <a:solidFill>
+                  <a:srgbClr val="003B4F"/>
+                </a:solidFill>
+                <a:latin typeface="Courier"/>
+              </a:rPr>
+              <a:t>    </a:t>
+            </a:r>
+            <a:r>
+              <a:rPr>
+                <a:solidFill>
+                  <a:srgbClr val="657422"/>
+                </a:solidFill>
+                <a:latin typeface="Courier"/>
+              </a:rPr>
+              <a:t>title    =</a:t>
+            </a:r>
+            <a:r>
+              <a:rPr>
+                <a:solidFill>
+                  <a:srgbClr val="003B4F"/>
+                </a:solidFill>
+                <a:latin typeface="Courier"/>
+              </a:rPr>
+              <a:t> </a:t>
+            </a:r>
+            <a:r>
+              <a:rPr>
+                <a:solidFill>
+                  <a:srgbClr val="20794D"/>
+                </a:solidFill>
+                <a:latin typeface="Courier"/>
+              </a:rPr>
+              <a:t>"Lake Superior Average Ice Cover"</a:t>
+            </a:r>
+            <a:r>
+              <a:rPr>
+                <a:solidFill>
+                  <a:srgbClr val="003B4F"/>
+                </a:solidFill>
+                <a:latin typeface="Courier"/>
+              </a:rPr>
+              <a:t>,</a:t>
+            </a:r>
+            <a:br/>
+            <a:r>
+              <a:rPr>
+                <a:solidFill>
+                  <a:srgbClr val="003B4F"/>
+                </a:solidFill>
+                <a:latin typeface="Courier"/>
+              </a:rPr>
+              <a:t>    </a:t>
+            </a:r>
+            <a:r>
+              <a:rPr>
+                <a:solidFill>
+                  <a:srgbClr val="657422"/>
+                </a:solidFill>
+                <a:latin typeface="Courier"/>
+              </a:rPr>
+              <a:t>subtitle =</a:t>
+            </a:r>
+            <a:r>
+              <a:rPr>
+                <a:solidFill>
+                  <a:srgbClr val="003B4F"/>
+                </a:solidFill>
+                <a:latin typeface="Courier"/>
+              </a:rPr>
+              <a:t> </a:t>
+            </a:r>
+            <a:r>
+              <a:rPr>
+                <a:solidFill>
+                  <a:srgbClr val="4758AB"/>
+                </a:solidFill>
+                <a:latin typeface="Courier"/>
+              </a:rPr>
+              <a:t>paste</a:t>
+            </a:r>
+            <a:r>
+              <a:rPr>
+                <a:solidFill>
+                  <a:srgbClr val="003B4F"/>
+                </a:solidFill>
+                <a:latin typeface="Courier"/>
+              </a:rPr>
+              <a:t>(</a:t>
+            </a:r>
+            <a:r>
+              <a:rPr>
+                <a:solidFill>
+                  <a:srgbClr val="20794D"/>
+                </a:solidFill>
+                <a:latin typeface="Courier"/>
+              </a:rPr>
+              <a:t>"Comparing"</a:t>
+            </a:r>
+            <a:r>
+              <a:rPr>
+                <a:solidFill>
+                  <a:srgbClr val="003B4F"/>
+                </a:solidFill>
+                <a:latin typeface="Courier"/>
+              </a:rPr>
+              <a:t>, current_yr, </a:t>
+            </a:r>
+            <a:r>
+              <a:rPr>
+                <a:solidFill>
+                  <a:srgbClr val="20794D"/>
+                </a:solidFill>
+                <a:latin typeface="Courier"/>
+              </a:rPr>
+              <a:t>"to Historical Data"</a:t>
+            </a:r>
+            <a:r>
+              <a:rPr>
+                <a:solidFill>
+                  <a:srgbClr val="003B4F"/>
+                </a:solidFill>
+                <a:latin typeface="Courier"/>
+              </a:rPr>
+              <a:t>),</a:t>
+            </a:r>
+            <a:br/>
+            <a:r>
+              <a:rPr>
+                <a:solidFill>
+                  <a:srgbClr val="003B4F"/>
+                </a:solidFill>
+                <a:latin typeface="Courier"/>
+              </a:rPr>
+              <a:t>    </a:t>
+            </a:r>
+            <a:r>
+              <a:rPr>
+                <a:solidFill>
+                  <a:srgbClr val="657422"/>
+                </a:solidFill>
+                <a:latin typeface="Courier"/>
+              </a:rPr>
+              <a:t>x =</a:t>
+            </a:r>
+            <a:r>
+              <a:rPr>
+                <a:solidFill>
+                  <a:srgbClr val="003B4F"/>
+                </a:solidFill>
+                <a:latin typeface="Courier"/>
+              </a:rPr>
+              <a:t> </a:t>
+            </a:r>
+            <a:r>
+              <a:rPr>
+                <a:solidFill>
+                  <a:srgbClr val="8F5902"/>
+                </a:solidFill>
+                <a:latin typeface="Courier"/>
+              </a:rPr>
+              <a:t>NULL</a:t>
+            </a:r>
+            <a:r>
+              <a:rPr>
+                <a:solidFill>
+                  <a:srgbClr val="003B4F"/>
+                </a:solidFill>
+                <a:latin typeface="Courier"/>
+              </a:rPr>
+              <a:t>, </a:t>
+            </a:r>
+            <a:r>
+              <a:rPr>
+                <a:solidFill>
+                  <a:srgbClr val="657422"/>
+                </a:solidFill>
+                <a:latin typeface="Courier"/>
+              </a:rPr>
+              <a:t>y =</a:t>
+            </a:r>
+            <a:r>
+              <a:rPr>
+                <a:solidFill>
+                  <a:srgbClr val="003B4F"/>
+                </a:solidFill>
+                <a:latin typeface="Courier"/>
+              </a:rPr>
+              <a:t> </a:t>
+            </a:r>
+            <a:r>
+              <a:rPr>
+                <a:solidFill>
+                  <a:srgbClr val="20794D"/>
+                </a:solidFill>
+                <a:latin typeface="Courier"/>
+              </a:rPr>
+              <a:t>"Ice Cover (%)"</a:t>
+            </a:r>
+            <a:br/>
+            <a:r>
+              <a:rPr>
+                <a:solidFill>
+                  <a:srgbClr val="003B4F"/>
+                </a:solidFill>
+                <a:latin typeface="Courier"/>
+              </a:rPr>
+              <a:t>  ) </a:t>
+            </a:r>
+            <a:r>
+              <a:rPr>
+                <a:solidFill>
+                  <a:srgbClr val="5E5E5E"/>
+                </a:solidFill>
+                <a:latin typeface="Courier"/>
+              </a:rPr>
+              <a:t>+</a:t>
+            </a:r>
+            <a:br/>
+            <a:r>
+              <a:rPr>
+                <a:solidFill>
+                  <a:srgbClr val="003B4F"/>
+                </a:solidFill>
+                <a:latin typeface="Courier"/>
+              </a:rPr>
+              <a:t>  </a:t>
+            </a:r>
+            <a:r>
+              <a:rPr>
+                <a:solidFill>
+                  <a:srgbClr val="4758AB"/>
+                </a:solidFill>
+                <a:latin typeface="Courier"/>
+              </a:rPr>
+              <a:t>theme_bw</a:t>
+            </a:r>
+            <a:r>
+              <a:rPr>
+                <a:solidFill>
+                  <a:srgbClr val="003B4F"/>
+                </a:solidFill>
+                <a:latin typeface="Courier"/>
+              </a:rPr>
+              <a:t>()</a:t>
+            </a:r>
+            <a:br/>
+            <a:br/>
+            <a:r>
+              <a:rPr>
+                <a:solidFill>
+                  <a:srgbClr val="003B4F"/>
+                </a:solidFill>
+                <a:latin typeface="Courier"/>
+              </a:rPr>
+              <a:t>ice_spaghetti_plot</a:t>
+            </a:r>
+          </a:p>
+        </p:txBody>
+      </p:sp>
+      <p:pic>
+        <p:nvPicPr>
+          <p:cNvPr descr="07_lecture_powerpoint_files/figure-pptx/spaghetti-plot-07-1.png" id="0" name="Picture 1"/>
+          <p:cNvPicPr>
+            <a:picLocks noGrp="1" noChangeAspect="1"/>
+          </p:cNvPicPr>
+          <p:nvPr/>
+        </p:nvPicPr>
+        <p:blipFill>
+          <a:blip r:embed="rId2"/>
+          <a:stretch>
+            <a:fillRect/>
+          </a:stretch>
+        </p:blipFill>
+        <p:spPr bwMode="auto">
+          <a:xfrm>
+            <a:off x="127000" y="1562100"/>
+            <a:ext cx="4432300" cy="2730500"/>
+          </a:xfrm>
+          <a:prstGeom prst="rect">
+            <a:avLst/>
+          </a:prstGeom>
+          <a:noFill/>
+          <a:ln w="9525">
+            <a:noFill/>
+            <a:headEnd/>
+            <a:tailEnd/>
+          </a:ln>
+        </p:spPr>
+      </p:pic>
+      <p:sp>
+        <p:nvSpPr>
+          <p:cNvPr id="5" name="Text Placeholder 4"/>
+          <p:cNvSpPr>
+            <a:spLocks noGrp="1"/>
+          </p:cNvSpPr>
+          <p:nvPr>
+            <p:ph idx="3" sz="quarter" type="body"/>
+          </p:nvPr>
+        </p:nvSpPr>
+        <p:spPr/>
+        <p:txBody>
+          <a:bodyPr/>
+          <a:lstStyle/>
+          <a:p>
+            <a:pPr lvl="0" indent="0" marL="0">
+              <a:buNone/>
+            </a:pPr>
+            <a:r>
+              <a:rPr b="1"/>
+              <a:t>Three layers, three </a:t>
+            </a:r>
+            <a:r>
+              <a:rPr b="1">
+                <a:latin typeface="Courier"/>
+              </a:rPr>
+              <a:t>geom_line()</a:t>
+            </a:r>
+            <a:r>
+              <a:rPr b="1"/>
+              <a:t> calls:</a:t>
+            </a:r>
+          </a:p>
+          <a:p>
+            <a:pPr lvl="0"/>
+            <a:r>
+              <a:rPr/>
+              <a:t>Thin, transparent blue lines — every past year, faded so patterns (not individual years) stand out</a:t>
+            </a:r>
+          </a:p>
+          <a:p>
+            <a:pPr lvl="0"/>
+            <a:r>
+              <a:rPr/>
+              <a:t>Thick red line — the 50+ year historical average</a:t>
+            </a:r>
+          </a:p>
+          <a:p>
+            <a:pPr lvl="0"/>
+            <a:r>
+              <a:rPr/>
+              <a:t>Thick black line — this year, drawn last so it’s on top</a:t>
+            </a:r>
+          </a:p>
+          <a:p>
+            <a:pPr lvl="0" indent="0" marL="0">
+              <a:buNone/>
+            </a:pPr>
+            <a:r>
+              <a:rPr/>
+              <a:t>Compare your version to NOAA’s published plot — did we recreate it?</a:t>
+            </a:r>
+          </a:p>
+        </p:txBody>
+      </p:sp>
+    </p:spTree>
+  </p:cSld>
+</p:sld>
+</file>
+
+<file path=ppt/slides/slide16.xml><?xml version="1.0" encoding="utf-8"?>
+<p:sld xmlns:a="http://schemas.openxmlformats.org/drawingml/2006/main" xmlns:r="http://schemas.openxmlformats.org/officeDocument/2006/relationships" xmlns:p="http://schemas.openxmlformats.org/presentationml/2006/main">
+  <p:cSld>
+    <p:spTree>
+      <p:nvGrpSpPr>
+        <p:cNvPr id="1" name=""/>
+        <p:cNvGrpSpPr/>
+        <p:nvPr/>
+      </p:nvGrpSpPr>
+      <p:grpSpPr>
+        <a:xfrm>
+          <a:off x="0" y="0"/>
+          <a:ext cx="0" cy="0"/>
+          <a:chOff x="0" y="0"/>
+          <a:chExt cx="0" cy="0"/>
+        </a:xfrm>
+      </p:grpSpPr>
+      <p:sp>
+        <p:nvSpPr>
+          <p:cNvPr id="2" name="Title 1"/>
+          <p:cNvSpPr>
+            <a:spLocks noGrp="1"/>
+          </p:cNvSpPr>
+          <p:nvPr>
+            <p:ph type="title"/>
+          </p:nvPr>
+        </p:nvSpPr>
+        <p:spPr>
+          <a:xfrm>
+            <a:off x="0" y="0"/>
+            <a:ext cx="9144000" cy="602780"/>
+          </a:xfrm>
+          <a:solidFill>
+            <a:srgbClr val="1A1A2E"/>
+          </a:solidFill>
+        </p:spPr>
+        <p:txBody>
+          <a:bodyPr/>
+          <a:lstStyle/>
+          <a:p>
+            <a:pPr lvl="0" indent="0" marL="0">
+              <a:buNone/>
+            </a:pPr>
+            <a:r>
+              <a:rPr/>
+              <a:t>A New Question: Is Maximum Ice Cover Changing?</a:t>
+            </a:r>
+          </a:p>
+        </p:txBody>
+      </p:sp>
+      <p:sp>
+        <p:nvSpPr>
+          <p:cNvPr id="3" name="Content Placeholder 2"/>
+          <p:cNvSpPr>
+            <a:spLocks noGrp="1"/>
+          </p:cNvSpPr>
+          <p:nvPr>
+            <p:ph idx="1" sz="half"/>
+          </p:nvPr>
+        </p:nvSpPr>
+        <p:spPr/>
+        <p:txBody>
+          <a:bodyPr/>
+          <a:lstStyle/>
+          <a:p>
+            <a:pPr lvl="0" indent="0" marL="0">
+              <a:buNone/>
+            </a:pPr>
+            <a:r>
+              <a:rPr b="1"/>
+              <a:t>So far:</a:t>
+            </a:r>
+            <a:r>
+              <a:rPr/>
+              <a:t> we’ve visualized the </a:t>
+            </a:r>
+            <a:r>
+              <a:rPr i="1"/>
+              <a:t>shape</a:t>
+            </a:r>
+            <a:r>
+              <a:rPr/>
+              <a:t> of each ice season.</a:t>
+            </a:r>
+          </a:p>
+          <a:p>
+            <a:pPr lvl="0" indent="0" marL="0">
+              <a:buNone/>
+            </a:pPr>
+            <a:r>
+              <a:rPr b="1"/>
+              <a:t>New question:</a:t>
+            </a:r>
+            <a:r>
+              <a:rPr/>
+              <a:t> has the </a:t>
+            </a:r>
+            <a:r>
+              <a:rPr b="1"/>
+              <a:t>peak</a:t>
+            </a:r>
+            <a:r>
+              <a:rPr/>
+              <a:t> (maximum) ice cover of each winter changed over the last 50 years?</a:t>
+            </a:r>
+          </a:p>
+          <a:p>
+            <a:pPr lvl="0" indent="0">
+              <a:buNone/>
+            </a:pPr>
+            <a:r>
+              <a:rPr>
+                <a:solidFill>
+                  <a:srgbClr val="5E5E5E"/>
+                </a:solidFill>
+                <a:latin typeface="Courier"/>
+              </a:rPr>
+              <a:t># Find the single highest ice-cover day each year --------</a:t>
+            </a:r>
+            <a:br/>
+            <a:r>
+              <a:rPr>
+                <a:solidFill>
+                  <a:srgbClr val="003B4F"/>
+                </a:solidFill>
+                <a:latin typeface="Courier"/>
+              </a:rPr>
+              <a:t>max_ice_per_year &lt;- ice_clean </a:t>
+            </a:r>
+            <a:r>
+              <a:rPr>
+                <a:solidFill>
+                  <a:srgbClr val="5E5E5E"/>
+                </a:solidFill>
+                <a:latin typeface="Courier"/>
+              </a:rPr>
+              <a:t>%&gt;%</a:t>
+            </a:r>
+            <a:br/>
+            <a:r>
+              <a:rPr>
+                <a:solidFill>
+                  <a:srgbClr val="003B4F"/>
+                </a:solidFill>
+                <a:latin typeface="Courier"/>
+              </a:rPr>
+              <a:t>  </a:t>
+            </a:r>
+            <a:r>
+              <a:rPr>
+                <a:solidFill>
+                  <a:srgbClr val="4758AB"/>
+                </a:solidFill>
+                <a:latin typeface="Courier"/>
+              </a:rPr>
+              <a:t>group_by</a:t>
+            </a:r>
+            <a:r>
+              <a:rPr>
+                <a:solidFill>
+                  <a:srgbClr val="003B4F"/>
+                </a:solidFill>
+                <a:latin typeface="Courier"/>
+              </a:rPr>
+              <a:t>(year) </a:t>
+            </a:r>
+            <a:r>
+              <a:rPr>
+                <a:solidFill>
+                  <a:srgbClr val="5E5E5E"/>
+                </a:solidFill>
+                <a:latin typeface="Courier"/>
+              </a:rPr>
+              <a:t>%&gt;%</a:t>
+            </a:r>
+            <a:br/>
+            <a:r>
+              <a:rPr>
+                <a:solidFill>
+                  <a:srgbClr val="003B4F"/>
+                </a:solidFill>
+                <a:latin typeface="Courier"/>
+              </a:rPr>
+              <a:t>  </a:t>
+            </a:r>
+            <a:r>
+              <a:rPr>
+                <a:solidFill>
+                  <a:srgbClr val="4758AB"/>
+                </a:solidFill>
+                <a:latin typeface="Courier"/>
+              </a:rPr>
+              <a:t>slice_max</a:t>
+            </a:r>
+            <a:r>
+              <a:rPr>
+                <a:solidFill>
+                  <a:srgbClr val="003B4F"/>
+                </a:solidFill>
+                <a:latin typeface="Courier"/>
+              </a:rPr>
+              <a:t>(</a:t>
+            </a:r>
+            <a:r>
+              <a:rPr>
+                <a:solidFill>
+                  <a:srgbClr val="657422"/>
+                </a:solidFill>
+                <a:latin typeface="Courier"/>
+              </a:rPr>
+              <a:t>order_by =</a:t>
+            </a:r>
+            <a:r>
+              <a:rPr>
+                <a:solidFill>
+                  <a:srgbClr val="003B4F"/>
+                </a:solidFill>
+                <a:latin typeface="Courier"/>
+              </a:rPr>
+              <a:t> ice_cover, </a:t>
+            </a:r>
+            <a:r>
+              <a:rPr>
+                <a:solidFill>
+                  <a:srgbClr val="657422"/>
+                </a:solidFill>
+                <a:latin typeface="Courier"/>
+              </a:rPr>
+              <a:t>n =</a:t>
+            </a:r>
+            <a:r>
+              <a:rPr>
+                <a:solidFill>
+                  <a:srgbClr val="003B4F"/>
+                </a:solidFill>
+                <a:latin typeface="Courier"/>
+              </a:rPr>
+              <a:t> </a:t>
+            </a:r>
+            <a:r>
+              <a:rPr>
+                <a:solidFill>
+                  <a:srgbClr val="AD0000"/>
+                </a:solidFill>
+                <a:latin typeface="Courier"/>
+              </a:rPr>
+              <a:t>1</a:t>
+            </a:r>
+            <a:r>
+              <a:rPr>
+                <a:solidFill>
+                  <a:srgbClr val="003B4F"/>
+                </a:solidFill>
+                <a:latin typeface="Courier"/>
+              </a:rPr>
+              <a:t>, </a:t>
+            </a:r>
+            <a:r>
+              <a:rPr>
+                <a:solidFill>
+                  <a:srgbClr val="657422"/>
+                </a:solidFill>
+                <a:latin typeface="Courier"/>
+              </a:rPr>
+              <a:t>with_ties =</a:t>
+            </a:r>
+            <a:r>
+              <a:rPr>
+                <a:solidFill>
+                  <a:srgbClr val="003B4F"/>
+                </a:solidFill>
+                <a:latin typeface="Courier"/>
+              </a:rPr>
+              <a:t> </a:t>
+            </a:r>
+            <a:r>
+              <a:rPr>
+                <a:solidFill>
+                  <a:srgbClr val="8F5902"/>
+                </a:solidFill>
+                <a:latin typeface="Courier"/>
+              </a:rPr>
+              <a:t>FALSE</a:t>
+            </a:r>
+            <a:r>
+              <a:rPr>
+                <a:solidFill>
+                  <a:srgbClr val="003B4F"/>
+                </a:solidFill>
+                <a:latin typeface="Courier"/>
+              </a:rPr>
+              <a:t>)</a:t>
+            </a:r>
+            <a:br/>
+            <a:br/>
+            <a:r>
+              <a:rPr>
+                <a:solidFill>
+                  <a:srgbClr val="4758AB"/>
+                </a:solidFill>
+                <a:latin typeface="Courier"/>
+              </a:rPr>
+              <a:t>head</a:t>
+            </a:r>
+            <a:r>
+              <a:rPr>
+                <a:solidFill>
+                  <a:srgbClr val="003B4F"/>
+                </a:solidFill>
+                <a:latin typeface="Courier"/>
+              </a:rPr>
+              <a:t>(max_ice_per_year </a:t>
+            </a:r>
+            <a:r>
+              <a:rPr>
+                <a:solidFill>
+                  <a:srgbClr val="5E5E5E"/>
+                </a:solidFill>
+                <a:latin typeface="Courier"/>
+              </a:rPr>
+              <a:t>%&gt;%</a:t>
+            </a:r>
+            <a:r>
+              <a:rPr>
+                <a:solidFill>
+                  <a:srgbClr val="003B4F"/>
+                </a:solidFill>
+                <a:latin typeface="Courier"/>
+              </a:rPr>
+              <a:t> </a:t>
+            </a:r>
+            <a:r>
+              <a:rPr>
+                <a:solidFill>
+                  <a:srgbClr val="4758AB"/>
+                </a:solidFill>
+                <a:latin typeface="Courier"/>
+              </a:rPr>
+              <a:t>arrange</a:t>
+            </a:r>
+            <a:r>
+              <a:rPr>
+                <a:solidFill>
+                  <a:srgbClr val="003B4F"/>
+                </a:solidFill>
+                <a:latin typeface="Courier"/>
+              </a:rPr>
+              <a:t>(ice_cover))</a:t>
+            </a:r>
+          </a:p>
+          <a:p>
+            <a:pPr lvl="0" indent="0">
+              <a:buNone/>
+            </a:pPr>
+            <a:r>
+              <a:rPr>
+                <a:latin typeface="Courier"/>
+              </a:rPr>
+              <a:t># A tibble: 6 × 6
+# Groups:   year [6]
+  date    year ice_cover calendar_year full_date  month
+  &lt;chr&gt;  &lt;dbl&gt;     &lt;dbl&gt;         &lt;dbl&gt; &lt;date&gt;     &lt;ord&gt;
+1 Jan-22  2012       8.2          2012 2012-01-22 Jan  
+2 Mar-17  2002      10.3          2002 2002-03-17 Mar  
+3 Jan-16  1998      11.1          1998 1998-01-16 Jan  
+4 Feb-19  2024      12            2024 2024-02-19 Feb  
+5 Jan-25  1987      14.5          1987 1987-01-25 Jan  
+6 Mar-02  2006      16.7          2006 2006-03-02 Mar  </a:t>
+            </a:r>
+          </a:p>
+          <a:p>
+            <a:pPr lvl="0" indent="0" marL="0">
+              <a:buNone/>
+            </a:pPr>
+            <a:r>
+              <a:rPr>
+                <a:latin typeface="Courier"/>
+              </a:rPr>
+              <a:t>slice_max()</a:t>
+            </a:r>
+            <a:r>
+              <a:rPr/>
+              <a:t> keeps only the single row with the highest value in each group — here, one row per year: the date and value of that winter’s ice peak.</a:t>
+            </a:r>
+          </a:p>
+        </p:txBody>
+      </p:sp>
+      <p:sp>
+        <p:nvSpPr>
+          <p:cNvPr id="4" name="Content Placeholder 3"/>
+          <p:cNvSpPr>
+            <a:spLocks noGrp="1"/>
+          </p:cNvSpPr>
+          <p:nvPr>
+            <p:ph idx="2" sz="half"/>
+          </p:nvPr>
+        </p:nvSpPr>
+        <p:spPr/>
+        <p:txBody>
+          <a:bodyPr/>
+          <a:lstStyle/>
+          <a:p>
+            <a:pPr lvl="0" indent="0" marL="0">
+              <a:buNone/>
+            </a:pPr>
+            <a:r>
+              <a:rPr b="1"/>
+              <a:t>This also gives us the “ice-on/ice-off” story:</a:t>
+            </a:r>
+          </a:p>
+          <a:p>
+            <a:pPr lvl="0"/>
+            <a:r>
+              <a:rPr/>
+              <a:t>The </a:t>
+            </a:r>
+            <a:r>
+              <a:rPr b="1"/>
+              <a:t>date</a:t>
+            </a:r>
+            <a:r>
+              <a:rPr/>
+              <a:t> of each year’s maximum is itself meaningful — an early peak (Jan) vs. a late peak (Mar/Apr) tells you something about how long the ice season lasted</a:t>
+            </a:r>
+          </a:p>
+          <a:p>
+            <a:pPr lvl="0"/>
+            <a:r>
+              <a:rPr/>
+              <a:t>1998’s max ice cover was only ~11%, on Jan 16 — a nearly ice-free winter</a:t>
+            </a:r>
+          </a:p>
+          <a:p>
+            <a:pPr lvl="0"/>
+            <a:r>
+              <a:rPr/>
+              <a:t>1979’s max was ~97%, on Feb 25 — almost total coverage</a:t>
+            </a:r>
+          </a:p>
+        </p:txBody>
+      </p:sp>
+    </p:spTree>
+  </p:cSld>
+</p:sld>
+</file>
+
+<file path=ppt/slides/slide17.xml><?xml version="1.0" encoding="utf-8"?>
+<p:sld xmlns:a="http://schemas.openxmlformats.org/drawingml/2006/main" xmlns:r="http://schemas.openxmlformats.org/officeDocument/2006/relationships" xmlns:p="http://schemas.openxmlformats.org/presentationml/2006/main">
+  <p:cSld>
+    <p:spTree>
+      <p:nvGrpSpPr>
+        <p:cNvPr id="1" name=""/>
+        <p:cNvGrpSpPr/>
+        <p:nvPr/>
+      </p:nvGrpSpPr>
+      <p:grpSpPr>
+        <a:xfrm>
+          <a:off x="0" y="0"/>
+          <a:ext cx="0" cy="0"/>
+          <a:chOff x="0" y="0"/>
+          <a:chExt cx="0" cy="0"/>
+        </a:xfrm>
+      </p:grpSpPr>
+      <p:sp>
+        <p:nvSpPr>
+          <p:cNvPr id="2" name="Title 1"/>
+          <p:cNvSpPr>
+            <a:spLocks noGrp="1"/>
+          </p:cNvSpPr>
+          <p:nvPr>
+            <p:ph type="title"/>
+          </p:nvPr>
+        </p:nvSpPr>
+        <p:spPr>
+          <a:xfrm>
+            <a:off x="139485" y="78119"/>
+            <a:ext cx="8229600" cy="607682"/>
+          </a:xfrm>
+        </p:spPr>
+        <p:txBody>
+          <a:bodyPr/>
+          <a:lstStyle/>
+          <a:p>
+            <a:pPr lvl="0" indent="0" marL="0">
+              <a:buNone/>
+            </a:pPr>
+            <a:r>
+              <a:rPr/>
+              <a:t>Model the Trend in Maximum Ice Cover</a:t>
+            </a:r>
+          </a:p>
+        </p:txBody>
+      </p:sp>
+      <p:sp>
+        <p:nvSpPr>
+          <p:cNvPr id="3" name="Text Placeholder 2"/>
+          <p:cNvSpPr>
+            <a:spLocks noGrp="1"/>
+          </p:cNvSpPr>
+          <p:nvPr>
+            <p:ph idx="1" type="body"/>
+          </p:nvPr>
+        </p:nvSpPr>
+        <p:spPr/>
+        <p:txBody>
+          <a:bodyPr/>
+          <a:lstStyle/>
+          <a:p>
+            <a:pPr lvl="0" indent="0">
+              <a:buNone/>
+            </a:pPr>
+            <a:r>
+              <a:rPr>
+                <a:solidFill>
+                  <a:srgbClr val="5E5E5E"/>
+                </a:solidFill>
+                <a:latin typeface="Courier"/>
+              </a:rPr>
+              <a:t># Fit a regression: max ice cover by year -----------------</a:t>
+            </a:r>
+            <a:br/>
+            <a:r>
+              <a:rPr>
+                <a:solidFill>
+                  <a:srgbClr val="003B4F"/>
+                </a:solidFill>
+                <a:latin typeface="Courier"/>
+              </a:rPr>
+              <a:t>max_ice_model &lt;- </a:t>
+            </a:r>
+            <a:r>
+              <a:rPr>
+                <a:solidFill>
+                  <a:srgbClr val="4758AB"/>
+                </a:solidFill>
+                <a:latin typeface="Courier"/>
+              </a:rPr>
+              <a:t>lm</a:t>
+            </a:r>
+            <a:r>
+              <a:rPr>
+                <a:solidFill>
+                  <a:srgbClr val="003B4F"/>
+                </a:solidFill>
+                <a:latin typeface="Courier"/>
+              </a:rPr>
+              <a:t>(ice_cover </a:t>
+            </a:r>
+            <a:r>
+              <a:rPr>
+                <a:solidFill>
+                  <a:srgbClr val="5E5E5E"/>
+                </a:solidFill>
+                <a:latin typeface="Courier"/>
+              </a:rPr>
+              <a:t>~</a:t>
+            </a:r>
+            <a:r>
+              <a:rPr>
+                <a:solidFill>
+                  <a:srgbClr val="003B4F"/>
+                </a:solidFill>
+                <a:latin typeface="Courier"/>
+              </a:rPr>
+              <a:t> year, </a:t>
+            </a:r>
+            <a:r>
+              <a:rPr>
+                <a:solidFill>
+                  <a:srgbClr val="657422"/>
+                </a:solidFill>
+                <a:latin typeface="Courier"/>
+              </a:rPr>
+              <a:t>data =</a:t>
+            </a:r>
+            <a:r>
+              <a:rPr>
+                <a:solidFill>
+                  <a:srgbClr val="003B4F"/>
+                </a:solidFill>
+                <a:latin typeface="Courier"/>
+              </a:rPr>
+              <a:t> max_ice_per_year)</a:t>
+            </a:r>
+            <a:br/>
+            <a:br/>
+            <a:r>
+              <a:rPr>
+                <a:solidFill>
+                  <a:srgbClr val="4758AB"/>
+                </a:solidFill>
+                <a:latin typeface="Courier"/>
+              </a:rPr>
+              <a:t>summary</a:t>
+            </a:r>
+            <a:r>
+              <a:rPr>
+                <a:solidFill>
+                  <a:srgbClr val="003B4F"/>
+                </a:solidFill>
+                <a:latin typeface="Courier"/>
+              </a:rPr>
+              <a:t>(max_ice_model)</a:t>
+            </a:r>
+          </a:p>
+          <a:p>
+            <a:pPr lvl="0" indent="0">
+              <a:buNone/>
+            </a:pPr>
+            <a:r>
+              <a:rPr>
+                <a:latin typeface="Courier"/>
+              </a:rPr>
+              <a:t>
+Call:
+lm(formula = ice_cover ~ year, data = max_ice_per_year)
+Residuals:
+    Min      1Q  Median      3Q     Max 
+-53.692 -24.810   3.811  20.982  48.599 
+Coefficients:
+             Estimate Std. Error t value Pr(&gt;|t|)   
+(Intercept) 1427.4557   498.1910   2.865  0.00600 **
+year          -0.6841     0.2492  -2.746  0.00827 **
+---
+Signif. codes:  0 '***' 0.001 '**' 0.01 '*' 0.05 '.' 0.1 ' ' 1
+Residual standard error: 28.54 on 52 degrees of freedom
+Multiple R-squared:  0.1266,    Adjusted R-squared:  0.1098 
+F-statistic: 7.539 on 1 and 52 DF,  p-value: 0.008274</a:t>
+            </a:r>
+          </a:p>
+          <a:p>
+            <a:pPr lvl="0" indent="0">
+              <a:buNone/>
+            </a:pPr>
+            <a:r>
+              <a:rPr>
+                <a:solidFill>
+                  <a:srgbClr val="003B4F"/>
+                </a:solidFill>
+                <a:latin typeface="Courier"/>
+              </a:rPr>
+              <a:t>max_ice_plot &lt;- max_ice_per_year </a:t>
+            </a:r>
+            <a:r>
+              <a:rPr>
+                <a:solidFill>
+                  <a:srgbClr val="5E5E5E"/>
+                </a:solidFill>
+                <a:latin typeface="Courier"/>
+              </a:rPr>
+              <a:t>%&gt;%</a:t>
+            </a:r>
+            <a:br/>
+            <a:r>
+              <a:rPr>
+                <a:solidFill>
+                  <a:srgbClr val="003B4F"/>
+                </a:solidFill>
+                <a:latin typeface="Courier"/>
+              </a:rPr>
+              <a:t>  </a:t>
+            </a:r>
+            <a:r>
+              <a:rPr>
+                <a:solidFill>
+                  <a:srgbClr val="4758AB"/>
+                </a:solidFill>
+                <a:latin typeface="Courier"/>
+              </a:rPr>
+              <a:t>ggplot</a:t>
+            </a:r>
+            <a:r>
+              <a:rPr>
+                <a:solidFill>
+                  <a:srgbClr val="003B4F"/>
+                </a:solidFill>
+                <a:latin typeface="Courier"/>
+              </a:rPr>
+              <a:t>(</a:t>
+            </a:r>
+            <a:r>
+              <a:rPr>
+                <a:solidFill>
+                  <a:srgbClr val="4758AB"/>
+                </a:solidFill>
+                <a:latin typeface="Courier"/>
+              </a:rPr>
+              <a:t>aes</a:t>
+            </a:r>
+            <a:r>
+              <a:rPr>
+                <a:solidFill>
+                  <a:srgbClr val="003B4F"/>
+                </a:solidFill>
+                <a:latin typeface="Courier"/>
+              </a:rPr>
+              <a:t>(</a:t>
+            </a:r>
+            <a:r>
+              <a:rPr>
+                <a:solidFill>
+                  <a:srgbClr val="657422"/>
+                </a:solidFill>
+                <a:latin typeface="Courier"/>
+              </a:rPr>
+              <a:t>x =</a:t>
+            </a:r>
+            <a:r>
+              <a:rPr>
+                <a:solidFill>
+                  <a:srgbClr val="003B4F"/>
+                </a:solidFill>
+                <a:latin typeface="Courier"/>
+              </a:rPr>
+              <a:t> year, </a:t>
+            </a:r>
+            <a:r>
+              <a:rPr>
+                <a:solidFill>
+                  <a:srgbClr val="657422"/>
+                </a:solidFill>
+                <a:latin typeface="Courier"/>
+              </a:rPr>
+              <a:t>y =</a:t>
+            </a:r>
+            <a:r>
+              <a:rPr>
+                <a:solidFill>
+                  <a:srgbClr val="003B4F"/>
+                </a:solidFill>
+                <a:latin typeface="Courier"/>
+              </a:rPr>
+              <a:t> ice_cover)) </a:t>
+            </a:r>
+            <a:r>
+              <a:rPr>
+                <a:solidFill>
+                  <a:srgbClr val="5E5E5E"/>
+                </a:solidFill>
+                <a:latin typeface="Courier"/>
+              </a:rPr>
+              <a:t>+</a:t>
+            </a:r>
+            <a:br/>
+            <a:r>
+              <a:rPr>
+                <a:solidFill>
+                  <a:srgbClr val="003B4F"/>
+                </a:solidFill>
+                <a:latin typeface="Courier"/>
+              </a:rPr>
+              <a:t>  </a:t>
+            </a:r>
+            <a:r>
+              <a:rPr>
+                <a:solidFill>
+                  <a:srgbClr val="4758AB"/>
+                </a:solidFill>
+                <a:latin typeface="Courier"/>
+              </a:rPr>
+              <a:t>geom_point</a:t>
+            </a:r>
+            <a:r>
+              <a:rPr>
+                <a:solidFill>
+                  <a:srgbClr val="003B4F"/>
+                </a:solidFill>
+                <a:latin typeface="Courier"/>
+              </a:rPr>
+              <a:t>(</a:t>
+            </a:r>
+            <a:r>
+              <a:rPr>
+                <a:solidFill>
+                  <a:srgbClr val="657422"/>
+                </a:solidFill>
+                <a:latin typeface="Courier"/>
+              </a:rPr>
+              <a:t>size =</a:t>
+            </a:r>
+            <a:r>
+              <a:rPr>
+                <a:solidFill>
+                  <a:srgbClr val="003B4F"/>
+                </a:solidFill>
+                <a:latin typeface="Courier"/>
+              </a:rPr>
+              <a:t> </a:t>
+            </a:r>
+            <a:r>
+              <a:rPr>
+                <a:solidFill>
+                  <a:srgbClr val="AD0000"/>
+                </a:solidFill>
+                <a:latin typeface="Courier"/>
+              </a:rPr>
+              <a:t>2</a:t>
+            </a:r>
+            <a:r>
+              <a:rPr>
+                <a:solidFill>
+                  <a:srgbClr val="003B4F"/>
+                </a:solidFill>
+                <a:latin typeface="Courier"/>
+              </a:rPr>
+              <a:t>) </a:t>
+            </a:r>
+            <a:r>
+              <a:rPr>
+                <a:solidFill>
+                  <a:srgbClr val="5E5E5E"/>
+                </a:solidFill>
+                <a:latin typeface="Courier"/>
+              </a:rPr>
+              <a:t>+</a:t>
+            </a:r>
+            <a:br/>
+            <a:r>
+              <a:rPr>
+                <a:solidFill>
+                  <a:srgbClr val="003B4F"/>
+                </a:solidFill>
+                <a:latin typeface="Courier"/>
+              </a:rPr>
+              <a:t>  </a:t>
+            </a:r>
+            <a:r>
+              <a:rPr>
+                <a:solidFill>
+                  <a:srgbClr val="4758AB"/>
+                </a:solidFill>
+                <a:latin typeface="Courier"/>
+              </a:rPr>
+              <a:t>geom_smooth</a:t>
+            </a:r>
+            <a:r>
+              <a:rPr>
+                <a:solidFill>
+                  <a:srgbClr val="003B4F"/>
+                </a:solidFill>
+                <a:latin typeface="Courier"/>
+              </a:rPr>
+              <a:t>(</a:t>
+            </a:r>
+            <a:r>
+              <a:rPr>
+                <a:solidFill>
+                  <a:srgbClr val="657422"/>
+                </a:solidFill>
+                <a:latin typeface="Courier"/>
+              </a:rPr>
+              <a:t>method =</a:t>
+            </a:r>
+            <a:r>
+              <a:rPr>
+                <a:solidFill>
+                  <a:srgbClr val="003B4F"/>
+                </a:solidFill>
+                <a:latin typeface="Courier"/>
+              </a:rPr>
+              <a:t> </a:t>
+            </a:r>
+            <a:r>
+              <a:rPr>
+                <a:solidFill>
+                  <a:srgbClr val="20794D"/>
+                </a:solidFill>
+                <a:latin typeface="Courier"/>
+              </a:rPr>
+              <a:t>"lm"</a:t>
+            </a:r>
+            <a:r>
+              <a:rPr>
+                <a:solidFill>
+                  <a:srgbClr val="003B4F"/>
+                </a:solidFill>
+                <a:latin typeface="Courier"/>
+              </a:rPr>
+              <a:t>, </a:t>
+            </a:r>
+            <a:r>
+              <a:rPr>
+                <a:solidFill>
+                  <a:srgbClr val="657422"/>
+                </a:solidFill>
+                <a:latin typeface="Courier"/>
+              </a:rPr>
+              <a:t>color =</a:t>
+            </a:r>
+            <a:r>
+              <a:rPr>
+                <a:solidFill>
+                  <a:srgbClr val="003B4F"/>
+                </a:solidFill>
+                <a:latin typeface="Courier"/>
+              </a:rPr>
+              <a:t> </a:t>
+            </a:r>
+            <a:r>
+              <a:rPr>
+                <a:solidFill>
+                  <a:srgbClr val="20794D"/>
+                </a:solidFill>
+                <a:latin typeface="Courier"/>
+              </a:rPr>
+              <a:t>"firebrick"</a:t>
+            </a:r>
+            <a:r>
+              <a:rPr>
+                <a:solidFill>
+                  <a:srgbClr val="003B4F"/>
+                </a:solidFill>
+                <a:latin typeface="Courier"/>
+              </a:rPr>
+              <a:t>) </a:t>
+            </a:r>
+            <a:r>
+              <a:rPr>
+                <a:solidFill>
+                  <a:srgbClr val="5E5E5E"/>
+                </a:solidFill>
+                <a:latin typeface="Courier"/>
+              </a:rPr>
+              <a:t>+</a:t>
+            </a:r>
+            <a:br/>
+            <a:r>
+              <a:rPr>
+                <a:solidFill>
+                  <a:srgbClr val="003B4F"/>
+                </a:solidFill>
+                <a:latin typeface="Courier"/>
+              </a:rPr>
+              <a:t>  </a:t>
+            </a:r>
+            <a:r>
+              <a:rPr>
+                <a:solidFill>
+                  <a:srgbClr val="4758AB"/>
+                </a:solidFill>
+                <a:latin typeface="Courier"/>
+              </a:rPr>
+              <a:t>labs</a:t>
+            </a:r>
+            <a:r>
+              <a:rPr>
+                <a:solidFill>
+                  <a:srgbClr val="003B4F"/>
+                </a:solidFill>
+                <a:latin typeface="Courier"/>
+              </a:rPr>
+              <a:t>(</a:t>
+            </a:r>
+            <a:br/>
+            <a:r>
+              <a:rPr>
+                <a:solidFill>
+                  <a:srgbClr val="003B4F"/>
+                </a:solidFill>
+                <a:latin typeface="Courier"/>
+              </a:rPr>
+              <a:t>    </a:t>
+            </a:r>
+            <a:r>
+              <a:rPr>
+                <a:solidFill>
+                  <a:srgbClr val="657422"/>
+                </a:solidFill>
+                <a:latin typeface="Courier"/>
+              </a:rPr>
+              <a:t>title =</a:t>
+            </a:r>
+            <a:r>
+              <a:rPr>
+                <a:solidFill>
+                  <a:srgbClr val="003B4F"/>
+                </a:solidFill>
+                <a:latin typeface="Courier"/>
+              </a:rPr>
+              <a:t> </a:t>
+            </a:r>
+            <a:r>
+              <a:rPr>
+                <a:solidFill>
+                  <a:srgbClr val="20794D"/>
+                </a:solidFill>
+                <a:latin typeface="Courier"/>
+              </a:rPr>
+              <a:t>"Lake Superior — Annual Maximum Ice Cover"</a:t>
+            </a:r>
+            <a:r>
+              <a:rPr>
+                <a:solidFill>
+                  <a:srgbClr val="003B4F"/>
+                </a:solidFill>
+                <a:latin typeface="Courier"/>
+              </a:rPr>
+              <a:t>,</a:t>
+            </a:r>
+            <a:br/>
+            <a:r>
+              <a:rPr>
+                <a:solidFill>
+                  <a:srgbClr val="003B4F"/>
+                </a:solidFill>
+                <a:latin typeface="Courier"/>
+              </a:rPr>
+              <a:t>    </a:t>
+            </a:r>
+            <a:r>
+              <a:rPr>
+                <a:solidFill>
+                  <a:srgbClr val="657422"/>
+                </a:solidFill>
+                <a:latin typeface="Courier"/>
+              </a:rPr>
+              <a:t>x =</a:t>
+            </a:r>
+            <a:r>
+              <a:rPr>
+                <a:solidFill>
+                  <a:srgbClr val="003B4F"/>
+                </a:solidFill>
+                <a:latin typeface="Courier"/>
+              </a:rPr>
+              <a:t> </a:t>
+            </a:r>
+            <a:r>
+              <a:rPr>
+                <a:solidFill>
+                  <a:srgbClr val="20794D"/>
+                </a:solidFill>
+                <a:latin typeface="Courier"/>
+              </a:rPr>
+              <a:t>"Year"</a:t>
+            </a:r>
+            <a:r>
+              <a:rPr>
+                <a:solidFill>
+                  <a:srgbClr val="003B4F"/>
+                </a:solidFill>
+                <a:latin typeface="Courier"/>
+              </a:rPr>
+              <a:t>, </a:t>
+            </a:r>
+            <a:r>
+              <a:rPr>
+                <a:solidFill>
+                  <a:srgbClr val="657422"/>
+                </a:solidFill>
+                <a:latin typeface="Courier"/>
+              </a:rPr>
+              <a:t>y =</a:t>
+            </a:r>
+            <a:r>
+              <a:rPr>
+                <a:solidFill>
+                  <a:srgbClr val="003B4F"/>
+                </a:solidFill>
+                <a:latin typeface="Courier"/>
+              </a:rPr>
+              <a:t> </a:t>
+            </a:r>
+            <a:r>
+              <a:rPr>
+                <a:solidFill>
+                  <a:srgbClr val="20794D"/>
+                </a:solidFill>
+                <a:latin typeface="Courier"/>
+              </a:rPr>
+              <a:t>"Max Ice Cover (%)"</a:t>
+            </a:r>
+            <a:br/>
+            <a:r>
+              <a:rPr>
+                <a:solidFill>
+                  <a:srgbClr val="003B4F"/>
+                </a:solidFill>
+                <a:latin typeface="Courier"/>
+              </a:rPr>
+              <a:t>  ) </a:t>
+            </a:r>
+            <a:r>
+              <a:rPr>
+                <a:solidFill>
+                  <a:srgbClr val="5E5E5E"/>
+                </a:solidFill>
+                <a:latin typeface="Courier"/>
+              </a:rPr>
+              <a:t>+</a:t>
+            </a:r>
+            <a:br/>
+            <a:r>
+              <a:rPr>
+                <a:solidFill>
+                  <a:srgbClr val="003B4F"/>
+                </a:solidFill>
+                <a:latin typeface="Courier"/>
+              </a:rPr>
+              <a:t>  </a:t>
+            </a:r>
+            <a:r>
+              <a:rPr>
+                <a:solidFill>
+                  <a:srgbClr val="4758AB"/>
+                </a:solidFill>
+                <a:latin typeface="Courier"/>
+              </a:rPr>
+              <a:t>theme_minimal</a:t>
+            </a:r>
+            <a:r>
+              <a:rPr>
+                <a:solidFill>
+                  <a:srgbClr val="003B4F"/>
+                </a:solidFill>
+                <a:latin typeface="Courier"/>
+              </a:rPr>
+              <a:t>()</a:t>
+            </a:r>
+            <a:br/>
+            <a:br/>
+            <a:r>
+              <a:rPr>
+                <a:solidFill>
+                  <a:srgbClr val="003B4F"/>
+                </a:solidFill>
+                <a:latin typeface="Courier"/>
+              </a:rPr>
+              <a:t>max_ice_plot</a:t>
+            </a:r>
+          </a:p>
+        </p:txBody>
+      </p:sp>
+      <p:pic>
+        <p:nvPicPr>
+          <p:cNvPr descr="07_lecture_powerpoint_files/figure-pptx/max-ice-plot-07-1.png" id="0" name="Picture 1"/>
+          <p:cNvPicPr>
+            <a:picLocks noGrp="1" noChangeAspect="1"/>
+          </p:cNvPicPr>
+          <p:nvPr/>
+        </p:nvPicPr>
+        <p:blipFill>
+          <a:blip r:embed="rId2"/>
+          <a:stretch>
+            <a:fillRect/>
+          </a:stretch>
+        </p:blipFill>
+        <p:spPr bwMode="auto">
+          <a:xfrm>
+            <a:off x="127000" y="1562100"/>
+            <a:ext cx="4432300" cy="2730500"/>
+          </a:xfrm>
+          <a:prstGeom prst="rect">
+            <a:avLst/>
+          </a:prstGeom>
+          <a:noFill/>
+          <a:ln w="9525">
+            <a:noFill/>
+            <a:headEnd/>
+            <a:tailEnd/>
+          </a:ln>
+        </p:spPr>
+      </p:pic>
+      <p:sp>
+        <p:nvSpPr>
+          <p:cNvPr id="5" name="Text Placeholder 4"/>
+          <p:cNvSpPr>
+            <a:spLocks noGrp="1"/>
+          </p:cNvSpPr>
+          <p:nvPr>
+            <p:ph idx="3" sz="quarter" type="body"/>
+          </p:nvPr>
+        </p:nvSpPr>
+        <p:spPr/>
+        <p:txBody>
+          <a:bodyPr/>
+          <a:lstStyle/>
+          <a:p>
+            <a:pPr lvl="0" indent="0" marL="0">
+              <a:buNone/>
+            </a:pPr>
+            <a:r>
+              <a:rPr b="1"/>
+              <a:t>Same </a:t>
+            </a:r>
+            <a:r>
+              <a:rPr b="1">
+                <a:latin typeface="Courier"/>
+              </a:rPr>
+              <a:t>lm()</a:t>
+            </a:r>
+            <a:r>
+              <a:rPr b="1"/>
+              <a:t> syntax as Lecture 06</a:t>
+            </a:r>
+            <a:r>
+              <a:rPr/>
+              <a:t> — only now </a:t>
+            </a:r>
+            <a:r>
+              <a:rPr>
+                <a:latin typeface="Courier"/>
+              </a:rPr>
+              <a:t>X = year</a:t>
+            </a:r>
+            <a:r>
+              <a:rPr/>
+              <a:t> and </a:t>
+            </a:r>
+            <a:r>
+              <a:rPr>
+                <a:latin typeface="Courier"/>
+              </a:rPr>
+              <a:t>Y = ice_cover</a:t>
+            </a:r>
+            <a:r>
+              <a:rPr/>
+              <a:t> (the yearly peak, not a daily or monthly mean).</a:t>
+            </a:r>
+          </a:p>
+          <a:p>
+            <a:pPr lvl="0"/>
+            <a:r>
+              <a:rPr/>
+              <a:t>The slope tells us °C-equivalent: percentage points of max ice cover, per year</a:t>
+            </a:r>
+          </a:p>
+          <a:p>
+            <a:pPr lvl="0"/>
+            <a:r>
+              <a:rPr/>
+              <a:t>Notice the </a:t>
+            </a:r>
+            <a:r>
+              <a:rPr b="1"/>
+              <a:t>huge year-to-year scatter</a:t>
+            </a:r>
+            <a:r>
+              <a:rPr/>
+              <a:t> — Great Lakes ice cover is famously variable, driven by short-term weather patterns like ENSO and the polar vortex, not just a steady climate trend</a:t>
+            </a:r>
+          </a:p>
+          <a:p>
+            <a:pPr lvl="0" indent="0" marL="0">
+              <a:buNone/>
+            </a:pPr>
+            <a:r>
+              <a:rPr/>
+              <a:t>This is real data — the story is messier (and more honest) than a clean line.</a:t>
+            </a:r>
+          </a:p>
+        </p:txBody>
+      </p:sp>
+    </p:spTree>
+  </p:cSld>
+</p:sld>
+</file>
+
+<file path=ppt/slides/slide18.xml><?xml version="1.0" encoding="utf-8"?>
+<p:sld xmlns:a="http://schemas.openxmlformats.org/drawingml/2006/main" xmlns:r="http://schemas.openxmlformats.org/officeDocument/2006/relationships" xmlns:p="http://schemas.openxmlformats.org/presentationml/2006/main">
+  <p:cSld>
+    <p:spTree>
+      <p:nvGrpSpPr>
+        <p:cNvPr id="1" name=""/>
+        <p:cNvGrpSpPr/>
+        <p:nvPr/>
+      </p:nvGrpSpPr>
+      <p:grpSpPr>
+        <a:xfrm>
+          <a:off x="0" y="0"/>
+          <a:ext cx="0" cy="0"/>
+          <a:chOff x="0" y="0"/>
+          <a:chExt cx="0" cy="0"/>
+        </a:xfrm>
+      </p:grpSpPr>
+      <p:sp>
+        <p:nvSpPr>
+          <p:cNvPr id="2" name="Title 1"/>
+          <p:cNvSpPr>
+            <a:spLocks noGrp="1"/>
+          </p:cNvSpPr>
+          <p:nvPr>
+            <p:ph type="title"/>
+          </p:nvPr>
+        </p:nvSpPr>
+        <p:spPr>
+          <a:xfrm>
+            <a:off x="0" y="0"/>
+            <a:ext cx="9144000" cy="602780"/>
+          </a:xfrm>
+          <a:solidFill>
+            <a:srgbClr val="1A1A2E"/>
+          </a:solidFill>
+        </p:spPr>
+        <p:txBody>
+          <a:bodyPr/>
+          <a:lstStyle/>
+          <a:p>
+            <a:pPr lvl="0" indent="0" marL="0">
+              <a:buNone/>
+            </a:pPr>
+            <a:r>
+              <a:rPr/>
+              <a:t>What We Learned Today</a:t>
+            </a:r>
+          </a:p>
+        </p:txBody>
+      </p:sp>
+      <p:sp>
+        <p:nvSpPr>
+          <p:cNvPr id="3" name="Content Placeholder 2"/>
+          <p:cNvSpPr>
+            <a:spLocks noGrp="1"/>
+          </p:cNvSpPr>
+          <p:nvPr>
+            <p:ph idx="1" sz="half"/>
+          </p:nvPr>
+        </p:nvSpPr>
+        <p:spPr/>
+        <p:txBody>
+          <a:bodyPr/>
+          <a:lstStyle/>
+          <a:p>
+            <a:pPr lvl="0" indent="0" marL="0">
+              <a:buNone/>
+            </a:pPr>
+            <a:r>
+              <a:rPr b="1"/>
+              <a:t>Concepts:</a:t>
+            </a:r>
+          </a:p>
+          <a:p>
+            <a:pPr lvl="0"/>
+            <a:r>
+              <a:rPr/>
+              <a:t>Real-world data is often </a:t>
+            </a:r>
+            <a:r>
+              <a:rPr b="1"/>
+              <a:t>wide</a:t>
+            </a:r>
+            <a:r>
+              <a:rPr/>
+              <a:t> — shaped for human eyes, not for R</a:t>
+            </a:r>
+          </a:p>
+          <a:p>
+            <a:pPr lvl="0"/>
+            <a:r>
+              <a:rPr>
+                <a:latin typeface="Courier"/>
+              </a:rPr>
+              <a:t>pivot_longer()</a:t>
+            </a:r>
+            <a:r>
+              <a:rPr/>
+              <a:t> collapses many columns into key-value pairs — unlocking </a:t>
+            </a:r>
+            <a:r>
+              <a:rPr>
+                <a:latin typeface="Courier"/>
+              </a:rPr>
+              <a:t>group_by()</a:t>
+            </a:r>
+            <a:r>
+              <a:rPr/>
+              <a:t>, </a:t>
+            </a:r>
+            <a:r>
+              <a:rPr>
+                <a:latin typeface="Courier"/>
+              </a:rPr>
+              <a:t>summarize()</a:t>
+            </a:r>
+            <a:r>
+              <a:rPr/>
+              <a:t>, and </a:t>
+            </a:r>
+            <a:r>
+              <a:rPr>
+                <a:latin typeface="Courier"/>
+              </a:rPr>
+              <a:t>ggplot()</a:t>
+            </a:r>
+          </a:p>
+          <a:p>
+            <a:pPr lvl="0"/>
+            <a:r>
+              <a:rPr>
+                <a:latin typeface="Courier"/>
+              </a:rPr>
+              <a:t>pivot_wider()</a:t>
+            </a:r>
+            <a:r>
+              <a:rPr/>
+              <a:t> does the reverse — builds a readable summary table from tidy data</a:t>
+            </a:r>
+          </a:p>
+          <a:p>
+            <a:pPr lvl="0"/>
+            <a:r>
+              <a:rPr/>
+              <a:t>Seasonal data that </a:t>
+            </a:r>
+            <a:r>
+              <a:rPr b="1"/>
+              <a:t>crosses the calendar year boundary</a:t>
+            </a:r>
+            <a:r>
+              <a:rPr/>
+              <a:t> needs careful date logic</a:t>
+            </a:r>
+          </a:p>
+          <a:p>
+            <a:pPr lvl="0"/>
+            <a:r>
+              <a:rPr>
+                <a:latin typeface="Courier"/>
+              </a:rPr>
+              <a:t>slice_max()</a:t>
+            </a:r>
+            <a:r>
+              <a:rPr/>
+              <a:t> pulls out the single extreme value per group — useful for “ice-on/ice-off” type questions</a:t>
+            </a:r>
+          </a:p>
+          <a:p>
+            <a:pPr lvl="0"/>
+            <a:r>
+              <a:rPr/>
+              <a:t>The same </a:t>
+            </a:r>
+            <a:r>
+              <a:rPr>
+                <a:latin typeface="Courier"/>
+              </a:rPr>
+              <a:t>lm()</a:t>
+            </a:r>
+            <a:r>
+              <a:rPr/>
+              <a:t> workflow from Lecture 06 applies to </a:t>
+            </a:r>
+            <a:r>
+              <a:rPr i="1"/>
+              <a:t>any</a:t>
+            </a:r>
+            <a:r>
+              <a:rPr/>
+              <a:t> time-indexed variable, including a yearly maximum</a:t>
+            </a:r>
+          </a:p>
+          <a:p>
+            <a:pPr lvl="0" indent="0" marL="0">
+              <a:buNone/>
+            </a:pPr>
+            <a:r>
+              <a:rPr b="1"/>
+              <a:t>R skills:</a:t>
+            </a:r>
+          </a:p>
+          <a:p>
+            <a:pPr lvl="0"/>
+            <a:r>
+              <a:rPr>
+                <a:latin typeface="Courier"/>
+              </a:rPr>
+              <a:t>read.table()</a:t>
+            </a:r>
+            <a:r>
+              <a:rPr/>
+              <a:t> + </a:t>
+            </a:r>
+            <a:r>
+              <a:rPr>
+                <a:latin typeface="Courier"/>
+              </a:rPr>
+              <a:t>rownames_to_column()</a:t>
+            </a:r>
+            <a:r>
+              <a:rPr/>
+              <a:t> for messy text files</a:t>
+            </a:r>
+          </a:p>
+          <a:p>
+            <a:pPr lvl="0"/>
+            <a:r>
+              <a:rPr>
+                <a:latin typeface="Courier"/>
+              </a:rPr>
+              <a:t>pivot_longer()</a:t>
+            </a:r>
+            <a:r>
+              <a:rPr/>
+              <a:t> / </a:t>
+            </a:r>
+            <a:r>
+              <a:rPr>
+                <a:latin typeface="Courier"/>
+              </a:rPr>
+              <a:t>pivot_wider()</a:t>
+            </a:r>
+          </a:p>
+          <a:p>
+            <a:pPr lvl="0"/>
+            <a:r>
+              <a:rPr>
+                <a:latin typeface="Courier"/>
+              </a:rPr>
+              <a:t>str_starts()</a:t>
+            </a:r>
+            <a:r>
+              <a:rPr/>
+              <a:t>, </a:t>
+            </a:r>
+            <a:r>
+              <a:rPr>
+                <a:latin typeface="Courier"/>
+              </a:rPr>
+              <a:t>if_else()</a:t>
+            </a:r>
+            <a:r>
+              <a:rPr/>
+              <a:t>, </a:t>
+            </a:r>
+            <a:r>
+              <a:rPr>
+                <a:latin typeface="Courier"/>
+              </a:rPr>
+              <a:t>ymd()</a:t>
+            </a:r>
+            <a:r>
+              <a:rPr/>
+              <a:t>, </a:t>
+            </a:r>
+            <a:r>
+              <a:rPr>
+                <a:latin typeface="Courier"/>
+              </a:rPr>
+              <a:t>update()</a:t>
+            </a:r>
+            <a:r>
+              <a:rPr/>
+              <a:t> for date wrangling</a:t>
+            </a:r>
+          </a:p>
+          <a:p>
+            <a:pPr lvl="0"/>
+            <a:r>
+              <a:rPr>
+                <a:latin typeface="Courier"/>
+              </a:rPr>
+              <a:t>slice_max(order_by = ..., n = 1)</a:t>
+            </a:r>
+          </a:p>
+        </p:txBody>
+      </p:sp>
+      <p:sp>
+        <p:nvSpPr>
+          <p:cNvPr id="4" name="Content Placeholder 3"/>
+          <p:cNvSpPr>
+            <a:spLocks noGrp="1"/>
+          </p:cNvSpPr>
+          <p:nvPr>
+            <p:ph idx="2" sz="half"/>
+          </p:nvPr>
+        </p:nvSpPr>
+        <p:spPr/>
+        <p:txBody>
+          <a:bodyPr/>
+          <a:lstStyle/>
+          <a:p>
+            <a:pPr lvl="0" indent="0" marL="0">
+              <a:buNone/>
+            </a:pPr>
+            <a:r>
+              <a:rPr b="1"/>
+              <a:t>References:</a:t>
+            </a:r>
+          </a:p>
+          <a:p>
+            <a:pPr lvl="0"/>
+            <a:r>
+              <a:rPr/>
+              <a:t>📖 R4DS Ch. 5 — Data tidying</a:t>
+            </a:r>
+          </a:p>
+          <a:p>
+            <a:pPr lvl="0"/>
+            <a:r>
+              <a:rPr/>
+              <a:t>📖 R4DS Ch. 17 — Dates and times</a:t>
+            </a:r>
+          </a:p>
+          <a:p>
+            <a:pPr lvl="0"/>
+            <a:r>
+              <a:rPr/>
+              <a:t>📖 Data Carpentry — R for Ecologists</a:t>
+            </a:r>
+          </a:p>
+          <a:p>
+            <a:pPr lvl="0" indent="0" marL="0">
+              <a:buNone/>
+            </a:pPr>
+            <a:r>
+              <a:rPr b="1"/>
+              <a:t>Data source:</a:t>
+            </a:r>
+          </a:p>
+          <a:p>
+            <a:pPr lvl="0"/>
+            <a:r>
+              <a:rPr/>
+              <a:t>NOAA-GLERL Great Lakes Ice Cover Database</a:t>
+            </a:r>
+            <a:br/>
+            <a:r>
+              <a:rPr>
+                <a:latin typeface="Courier"/>
+              </a:rPr>
+              <a:t>glerl.noaa.gov/data/ice</a:t>
+            </a:r>
+          </a:p>
+          <a:p>
+            <a:pPr lvl="0" indent="0" marL="0">
+              <a:buNone/>
+            </a:pPr>
+            <a:r>
+              <a:rPr b="1"/>
+              <a:t>Up next — Homework:</a:t>
+            </a:r>
+          </a:p>
+          <a:p>
+            <a:pPr lvl="0"/>
+            <a:r>
+              <a:rPr/>
+              <a:t>Apply the same wide-to-long pivot workflow to a Great Lake of your choice</a:t>
+            </a:r>
+          </a:p>
+          <a:p>
+            <a:pPr lvl="0"/>
+            <a:r>
+              <a:rPr/>
+              <a:t>Compare your lake’s maximum ice trend to Lake Superior’s</a:t>
             </a:r>
           </a:p>
         </p:txBody>
@@ -3350,7 +8614,7 @@
         <p:spPr>
           <a:xfrm>
             <a:off x="0" y="0"/>
-            <a:ext cx="9144000" cy="1021556"/>
+            <a:ext cx="9144000" cy="582780"/>
           </a:xfrm>
         </p:spPr>
         <p:txBody>
@@ -3362,7 +8626,3585 @@
             </a:pPr>
             <a:r>
               <a:rPr/>
-              <a:t>Lecture 6 - A Brief review</a:t>
+              <a:t>Where We Left Off (Lecture 06)</a:t>
+            </a:r>
+          </a:p>
+        </p:txBody>
+      </p:sp>
+      <p:sp>
+        <p:nvSpPr>
+          <p:cNvPr id="3" name="Content Placeholder 2"/>
+          <p:cNvSpPr>
+            <a:spLocks noGrp="1"/>
+          </p:cNvSpPr>
+          <p:nvPr>
+            <p:ph idx="1"/>
+          </p:nvPr>
+        </p:nvSpPr>
+        <p:spPr/>
+        <p:txBody>
+          <a:bodyPr/>
+          <a:lstStyle/>
+          <a:p>
+            <a:pPr lvl="0"/>
+            <a:r>
+              <a:rPr b="1"/>
+              <a:t>Downloaded real data from inside R</a:t>
+            </a:r>
+            <a:r>
+              <a:rPr/>
+              <a:t> — NOAA’s </a:t>
+            </a:r>
+            <a:r>
+              <a:rPr>
+                <a:latin typeface="Courier"/>
+              </a:rPr>
+              <a:t>GSODR</a:t>
+            </a:r>
+            <a:r>
+              <a:rPr/>
+              <a:t> package, Duluth station</a:t>
+            </a:r>
+          </a:p>
+          <a:p>
+            <a:pPr lvl="0"/>
+            <a:r>
+              <a:rPr b="1"/>
+              <a:t>Raw vs. summarized data</a:t>
+            </a:r>
+            <a:r>
+              <a:rPr/>
+              <a:t> — daily data hides trends; </a:t>
+            </a:r>
+            <a:r>
+              <a:rPr>
+                <a:latin typeface="Courier"/>
+              </a:rPr>
+              <a:t>group_by() %&gt;% summarize()</a:t>
+            </a:r>
+            <a:r>
+              <a:rPr/>
+              <a:t> reveals them</a:t>
+            </a:r>
+          </a:p>
+          <a:p>
+            <a:pPr lvl="0"/>
+            <a:r>
+              <a:rPr b="1"/>
+              <a:t>Reused </a:t>
+            </a:r>
+            <a:r>
+              <a:rPr b="1">
+                <a:latin typeface="Courier"/>
+              </a:rPr>
+              <a:t>lm()</a:t>
+            </a:r>
+            <a:r>
+              <a:rPr/>
+              <a:t> to estimate a rate of change — °C per year, converted to °C per decade</a:t>
+            </a:r>
+          </a:p>
+          <a:p>
+            <a:pPr lvl="0"/>
+            <a:r>
+              <a:rPr b="1">
+                <a:latin typeface="Courier"/>
+              </a:rPr>
+              <a:t>case_when()</a:t>
+            </a:r>
+            <a:r>
+              <a:rPr/>
+              <a:t> to build a new categorical variable — summer vs. winter</a:t>
+            </a:r>
+          </a:p>
+          <a:p>
+            <a:pPr lvl="0"/>
+            <a:r>
+              <a:rPr b="1"/>
+              <a:t>Compared two group-specific models</a:t>
+            </a:r>
+            <a:r>
+              <a:rPr/>
+              <a:t> — found winter warming faster than summer</a:t>
+            </a:r>
+          </a:p>
+          <a:p>
+            <a:pPr lvl="0" indent="0" marL="1270000">
+              <a:buNone/>
+            </a:pPr>
+            <a:r>
+              <a:rPr sz="2000" b="1"/>
+              <a:t>Note</a:t>
+            </a:r>
+          </a:p>
+          <a:p>
+            <a:pPr lvl="0" indent="0" marL="1270000">
+              <a:buNone/>
+            </a:pPr>
+            <a:r>
+              <a:rPr sz="2000" b="1"/>
+              <a:t>✅ Transition</a:t>
+            </a:r>
+          </a:p>
+          <a:p>
+            <a:pPr lvl="0"/>
+            <a:r>
+              <a:rPr sz="2000"/>
+              <a:t>Duluth’s weather data came to us </a:t>
+            </a:r>
+            <a:r>
+              <a:rPr sz="2000" b="1"/>
+              <a:t>already tidy</a:t>
+            </a:r>
+          </a:p>
+          <a:p>
+            <a:pPr lvl="1"/>
+            <a:r>
+              <a:rPr sz="2000"/>
+              <a:t>one row per day, one column per variable.</a:t>
+            </a:r>
+          </a:p>
+          <a:p>
+            <a:pPr lvl="0"/>
+            <a:r>
+              <a:rPr sz="2000"/>
+              <a:t>Today’s dataset will </a:t>
+            </a:r>
+            <a:r>
+              <a:rPr sz="2000" b="1"/>
+              <a:t>not</a:t>
+            </a:r>
+            <a:r>
+              <a:rPr sz="2000"/>
+              <a:t> be tidy.</a:t>
+            </a:r>
+          </a:p>
+          <a:p>
+            <a:pPr lvl="0"/>
+            <a:r>
+              <a:rPr sz="2000"/>
+              <a:t>We’ll learn how to fix that.</a:t>
+            </a:r>
+          </a:p>
+        </p:txBody>
+      </p:sp>
+    </p:spTree>
+  </p:cSld>
+</p:sld>
+</file>
+
+<file path=ppt/slides/slide3.xml><?xml version="1.0" encoding="utf-8"?>
+<p:sld xmlns:a="http://schemas.openxmlformats.org/drawingml/2006/main" xmlns:r="http://schemas.openxmlformats.org/officeDocument/2006/relationships" xmlns:p="http://schemas.openxmlformats.org/presentationml/2006/main">
+  <p:cSld>
+    <p:spTree>
+      <p:nvGrpSpPr>
+        <p:cNvPr id="1" name=""/>
+        <p:cNvGrpSpPr/>
+        <p:nvPr/>
+      </p:nvGrpSpPr>
+      <p:grpSpPr>
+        <a:xfrm>
+          <a:off x="0" y="0"/>
+          <a:ext cx="0" cy="0"/>
+          <a:chOff x="0" y="0"/>
+          <a:chExt cx="0" cy="0"/>
+        </a:xfrm>
+      </p:grpSpPr>
+      <p:sp>
+        <p:nvSpPr>
+          <p:cNvPr id="2" name="Title 1"/>
+          <p:cNvSpPr>
+            <a:spLocks noGrp="1"/>
+          </p:cNvSpPr>
+          <p:nvPr>
+            <p:ph type="title"/>
+          </p:nvPr>
+        </p:nvSpPr>
+        <p:spPr>
+          <a:xfrm>
+            <a:off x="0" y="0"/>
+            <a:ext cx="9144000" cy="602780"/>
+          </a:xfrm>
+          <a:solidFill>
+            <a:srgbClr val="1A1A2E"/>
+          </a:solidFill>
+        </p:spPr>
+        <p:txBody>
+          <a:bodyPr/>
+          <a:lstStyle/>
+          <a:p>
+            <a:pPr lvl="0" indent="0" marL="0">
+              <a:buNone/>
+            </a:pPr>
+            <a:r>
+              <a:rPr/>
+              <a:t>Goals for Today</a:t>
+            </a:r>
+          </a:p>
+        </p:txBody>
+      </p:sp>
+      <p:sp>
+        <p:nvSpPr>
+          <p:cNvPr id="3" name="Content Placeholder 2"/>
+          <p:cNvSpPr>
+            <a:spLocks noGrp="1"/>
+          </p:cNvSpPr>
+          <p:nvPr>
+            <p:ph idx="1" sz="half"/>
+          </p:nvPr>
+        </p:nvSpPr>
+        <p:spPr/>
+        <p:txBody>
+          <a:bodyPr/>
+          <a:lstStyle/>
+          <a:p>
+            <a:pPr lvl="0"/>
+            <a:r>
+              <a:rPr/>
+              <a:t>Download a genuinely </a:t>
+            </a:r>
+            <a:r>
+              <a:rPr b="1"/>
+              <a:t>messy, wide</a:t>
+            </a:r>
+            <a:r>
+              <a:rPr/>
+              <a:t> real-world dataset — Lake Superior daily ice cover</a:t>
+            </a:r>
+          </a:p>
+          <a:p>
+            <a:pPr lvl="0"/>
+            <a:r>
+              <a:rPr/>
+              <a:t>Understand </a:t>
+            </a:r>
+            <a:r>
+              <a:rPr b="1"/>
+              <a:t>why</a:t>
+            </a:r>
+            <a:r>
+              <a:rPr/>
+              <a:t> wide data is hard for R (and great for humans)</a:t>
+            </a:r>
+          </a:p>
+          <a:p>
+            <a:pPr lvl="0"/>
+            <a:r>
+              <a:rPr/>
+              <a:t>Learn </a:t>
+            </a:r>
+            <a:r>
+              <a:rPr>
+                <a:latin typeface="Courier"/>
+              </a:rPr>
+              <a:t>pivot_longer()</a:t>
+            </a:r>
+            <a:r>
+              <a:rPr/>
+              <a:t> — turn wide data into tidy long data</a:t>
+            </a:r>
+          </a:p>
+          <a:p>
+            <a:pPr lvl="0"/>
+            <a:r>
+              <a:rPr/>
+              <a:t>Learn </a:t>
+            </a:r>
+            <a:r>
+              <a:rPr>
+                <a:latin typeface="Courier"/>
+              </a:rPr>
+              <a:t>pivot_wider()</a:t>
+            </a:r>
+            <a:r>
+              <a:rPr/>
+              <a:t> — turn long data back into a human-readable summary table</a:t>
+            </a:r>
+          </a:p>
+          <a:p>
+            <a:pPr lvl="0"/>
+            <a:r>
+              <a:rPr/>
+              <a:t>Handle a tricky real-world wrinkle: </a:t>
+            </a:r>
+            <a:r>
+              <a:rPr b="1"/>
+              <a:t>winter seasons that cross the new year</a:t>
+            </a:r>
+          </a:p>
+          <a:p>
+            <a:pPr lvl="0"/>
+            <a:r>
+              <a:rPr/>
+              <a:t>Recreate NOAA’s own “spaghetti plot” comparing every year of ice cover</a:t>
+            </a:r>
+          </a:p>
+          <a:p>
+            <a:pPr lvl="0"/>
+            <a:r>
+              <a:rPr/>
+              <a:t>Ask: is Lake Superior’s </a:t>
+            </a:r>
+            <a:r>
+              <a:rPr b="1"/>
+              <a:t>maximum ice cover</a:t>
+            </a:r>
+            <a:r>
+              <a:rPr/>
+              <a:t> changing over time?</a:t>
+            </a:r>
+          </a:p>
+          <a:p>
+            <a:pPr lvl="0" indent="0" marL="1270000">
+              <a:buNone/>
+            </a:pPr>
+            <a:r>
+              <a:rPr sz="2000" b="1"/>
+              <a:t>Tip</a:t>
+            </a:r>
+          </a:p>
+          <a:p>
+            <a:pPr lvl="0" indent="0" marL="1270000">
+              <a:buNone/>
+            </a:pPr>
+            <a:r>
+              <a:rPr sz="2000" b="1"/>
+              <a:t>🖐 Try it yourself</a:t>
+            </a:r>
+          </a:p>
+          <a:p>
+            <a:pPr lvl="0" indent="0" marL="1270000">
+              <a:buNone/>
+            </a:pPr>
+            <a:r>
+              <a:rPr sz="2000"/>
+              <a:t>By the end you’ll have reshaped real NOAA ice data and built the same kind of plot NOAA scientists publish.</a:t>
+            </a:r>
+          </a:p>
+        </p:txBody>
+      </p:sp>
+      <p:sp>
+        <p:nvSpPr>
+          <p:cNvPr id="4" name="Content Placeholder 3"/>
+          <p:cNvSpPr>
+            <a:spLocks noGrp="1"/>
+          </p:cNvSpPr>
+          <p:nvPr>
+            <p:ph idx="2" sz="half"/>
+          </p:nvPr>
+        </p:nvSpPr>
+        <p:spPr/>
+        <p:txBody>
+          <a:bodyPr/>
+          <a:lstStyle/>
+          <a:p>
+            <a:pPr lvl="0" indent="0" marL="0">
+              <a:buNone/>
+            </a:pPr>
+            <a:r>
+              <a:rPr b="1"/>
+              <a:t>Tools today:</a:t>
+            </a:r>
+          </a:p>
+          <a:p>
+            <a:pPr lvl="0"/>
+            <a:r>
+              <a:rPr>
+                <a:latin typeface="Courier"/>
+              </a:rPr>
+              <a:t>tidyverse</a:t>
+            </a:r>
+            <a:r>
+              <a:rPr/>
+              <a:t>, </a:t>
+            </a:r>
+            <a:r>
+              <a:rPr>
+                <a:latin typeface="Courier"/>
+              </a:rPr>
+              <a:t>janitor</a:t>
+            </a:r>
+          </a:p>
+          <a:p>
+            <a:pPr lvl="0" indent="0" marL="0">
+              <a:buNone/>
+            </a:pPr>
+            <a:r>
+              <a:rPr b="1"/>
+              <a:t>Textbook:</a:t>
+            </a:r>
+          </a:p>
+          <a:p>
+            <a:pPr lvl="0"/>
+            <a:r>
+              <a:rPr/>
+              <a:t>📖 R4DS 2e — Hadley Wickham</a:t>
+            </a:r>
+          </a:p>
+          <a:p>
+            <a:pPr lvl="1"/>
+            <a:r>
+              <a:rPr>
+                <a:hlinkClick r:id="rId2"/>
+              </a:rPr>
+              <a:t>Ch. 5 Data tidying</a:t>
+            </a:r>
+          </a:p>
+          <a:p>
+            <a:pPr lvl="1"/>
+            <a:r>
+              <a:rPr>
+                <a:hlinkClick r:id="rId3"/>
+              </a:rPr>
+              <a:t>Ch. 17 Dates and times</a:t>
+            </a:r>
+          </a:p>
+          <a:p>
+            <a:pPr lvl="0"/>
+            <a:r>
+              <a:rPr/>
+              <a:t>📖 Data Carpentry — </a:t>
+            </a:r>
+            <a:r>
+              <a:rPr>
+                <a:hlinkClick r:id="rId4"/>
+              </a:rPr>
+              <a:t>R for Ecologists</a:t>
+            </a:r>
+          </a:p>
+        </p:txBody>
+      </p:sp>
+    </p:spTree>
+  </p:cSld>
+</p:sld>
+</file>
+
+<file path=ppt/slides/slide4.xml><?xml version="1.0" encoding="utf-8"?>
+<p:sld xmlns:a="http://schemas.openxmlformats.org/drawingml/2006/main" xmlns:r="http://schemas.openxmlformats.org/officeDocument/2006/relationships" xmlns:p="http://schemas.openxmlformats.org/presentationml/2006/main">
+  <p:cSld>
+    <p:spTree>
+      <p:nvGrpSpPr>
+        <p:cNvPr id="1" name=""/>
+        <p:cNvGrpSpPr/>
+        <p:nvPr/>
+      </p:nvGrpSpPr>
+      <p:grpSpPr>
+        <a:xfrm>
+          <a:off x="0" y="0"/>
+          <a:ext cx="0" cy="0"/>
+          <a:chOff x="0" y="0"/>
+          <a:chExt cx="0" cy="0"/>
+        </a:xfrm>
+      </p:grpSpPr>
+      <p:sp>
+        <p:nvSpPr>
+          <p:cNvPr id="2" name="Title 1"/>
+          <p:cNvSpPr>
+            <a:spLocks noGrp="1"/>
+          </p:cNvSpPr>
+          <p:nvPr>
+            <p:ph type="title"/>
+          </p:nvPr>
+        </p:nvSpPr>
+        <p:spPr>
+          <a:xfrm>
+            <a:off x="0" y="0"/>
+            <a:ext cx="9144000" cy="602780"/>
+          </a:xfrm>
+          <a:solidFill>
+            <a:srgbClr val="1A1A2E"/>
+          </a:solidFill>
+        </p:spPr>
+        <p:txBody>
+          <a:bodyPr/>
+          <a:lstStyle/>
+          <a:p>
+            <a:pPr lvl="0" indent="0" marL="0">
+              <a:buNone/>
+            </a:pPr>
+            <a:r>
+              <a:rPr/>
+              <a:t>Meet the Data: Lake Superior Ice Cover</a:t>
+            </a:r>
+          </a:p>
+        </p:txBody>
+      </p:sp>
+      <p:sp>
+        <p:nvSpPr>
+          <p:cNvPr id="3" name="Content Placeholder 2"/>
+          <p:cNvSpPr>
+            <a:spLocks noGrp="1"/>
+          </p:cNvSpPr>
+          <p:nvPr>
+            <p:ph idx="1" sz="half"/>
+          </p:nvPr>
+        </p:nvSpPr>
+        <p:spPr/>
+        <p:txBody>
+          <a:bodyPr/>
+          <a:lstStyle/>
+          <a:p>
+            <a:pPr lvl="0" indent="0" marL="0">
+              <a:buNone/>
+            </a:pPr>
+            <a:r>
+              <a:rPr b="1"/>
+              <a:t>NOAA-GLERL</a:t>
+            </a:r>
+            <a:r>
+              <a:rPr/>
+              <a:t> (Great Lakes Environmental Research Laboratory) has tracked daily Great Lakes ice cover since </a:t>
+            </a:r>
+            <a:r>
+              <a:rPr b="1"/>
+              <a:t>1973</a:t>
+            </a:r>
+            <a:r>
+              <a:rPr/>
+              <a:t> — over 50 years of satellite-derived ice charts.</a:t>
+            </a:r>
+          </a:p>
+          <a:p>
+            <a:pPr lvl="0" indent="0" marL="0">
+              <a:buNone/>
+            </a:pPr>
+            <a:r>
+              <a:rPr b="1"/>
+              <a:t>Today’s dataset:</a:t>
+            </a:r>
+            <a:r>
+              <a:rPr/>
+              <a:t> daily percent ice cover for Lake Superior, one row per </a:t>
+            </a:r>
+            <a:r>
+              <a:rPr b="1"/>
+              <a:t>day-of-winter</a:t>
+            </a:r>
+            <a:r>
+              <a:rPr/>
+              <a:t>, one column per </a:t>
+            </a:r>
+            <a:r>
+              <a:rPr b="1"/>
+              <a:t>year</a:t>
+            </a:r>
+            <a:r>
+              <a:rPr/>
+              <a:t>.</a:t>
+            </a:r>
+          </a:p>
+          <a:p>
+            <a:pPr lvl="0" indent="0" marL="0">
+              <a:buNone/>
+            </a:pPr>
+            <a:r>
+              <a:rPr b="1"/>
+              <a:t>Source:</a:t>
+            </a:r>
+            <a:br/>
+            <a:r>
+              <a:rPr>
+                <a:latin typeface="Courier"/>
+              </a:rPr>
+              <a:t>https://www.glerl.noaa.gov/data/ice/glicd/daily/sup.txt</a:t>
+            </a:r>
+          </a:p>
+          <a:p>
+            <a:pPr lvl="0" indent="0" marL="1270000">
+              <a:buNone/>
+            </a:pPr>
+            <a:r>
+              <a:rPr sz="2000" b="1"/>
+              <a:t>Important</a:t>
+            </a:r>
+          </a:p>
+          <a:p>
+            <a:pPr lvl="0" indent="0" marL="1270000">
+              <a:buNone/>
+            </a:pPr>
+            <a:r>
+              <a:rPr sz="2000"/>
+              <a:t>This is a </a:t>
+            </a:r>
+            <a:r>
+              <a:rPr sz="2000" b="1"/>
+              <a:t>plain text file living on a government server</a:t>
+            </a:r>
+            <a:r>
+              <a:rPr sz="2000"/>
+              <a:t> — not a tidy CSV. This is what real environmental data often looks like.</a:t>
+            </a:r>
+          </a:p>
+        </p:txBody>
+      </p:sp>
+      <p:pic>
+        <p:nvPicPr>
+          <p:cNvPr descr="https://www.glerl.noaa.gov/data/ice/imgs/ice_collage.jpg" id="0" name="Picture 1"/>
+          <p:cNvPicPr>
+            <a:picLocks noGrp="1" noChangeAspect="1"/>
+          </p:cNvPicPr>
+          <p:nvPr/>
+        </p:nvPicPr>
+        <p:blipFill>
+          <a:blip r:embed="rId2"/>
+          <a:stretch>
+            <a:fillRect/>
+          </a:stretch>
+        </p:blipFill>
+        <p:spPr bwMode="auto">
+          <a:xfrm>
+            <a:off x="4495800" y="1155700"/>
+            <a:ext cx="4406900" cy="2324100"/>
+          </a:xfrm>
+          <a:prstGeom prst="rect">
+            <a:avLst/>
+          </a:prstGeom>
+          <a:noFill/>
+          <a:ln w="9525">
+            <a:noFill/>
+            <a:headEnd/>
+            <a:tailEnd/>
+          </a:ln>
+        </p:spPr>
+      </p:pic>
+      <p:sp>
+        <p:nvSpPr>
+          <p:cNvPr id="1" name="TextBox 3"/>
+          <p:cNvSpPr txBox="1"/>
+          <p:nvPr>
+            <p:ph idx="1"/>
+          </p:nvPr>
+        </p:nvSpPr>
+        <p:spPr>
+          <a:xfrm>
+            <a:off x="4495800" y="3962400"/>
+            <a:ext cx="4406900" cy="508000"/>
+          </a:xfrm>
+          <a:prstGeom prst="rect">
+            <a:avLst/>
+          </a:prstGeom>
+          <a:noFill/>
+        </p:spPr>
+        <p:txBody>
+          <a:bodyPr/>
+          <a:lstStyle/>
+          <a:p>
+            <a:pPr lvl="0" indent="0" marL="0" algn="ctr">
+              <a:buNone/>
+            </a:pPr>
+            <a:r>
+              <a:rPr/>
+              <a:t>Great Lakes ice cover monitoring includes satellite imagery, field sampling, and decades of charts.</a:t>
+            </a:r>
+          </a:p>
+        </p:txBody>
+      </p:sp>
+    </p:spTree>
+  </p:cSld>
+</p:sld>
+</file>
+
+<file path=ppt/slides/slide5.xml><?xml version="1.0" encoding="utf-8"?>
+<p:sld xmlns:a="http://schemas.openxmlformats.org/drawingml/2006/main" xmlns:r="http://schemas.openxmlformats.org/officeDocument/2006/relationships" xmlns:p="http://schemas.openxmlformats.org/presentationml/2006/main">
+  <p:cSld>
+    <p:spTree>
+      <p:nvGrpSpPr>
+        <p:cNvPr id="1" name=""/>
+        <p:cNvGrpSpPr/>
+        <p:nvPr/>
+      </p:nvGrpSpPr>
+      <p:grpSpPr>
+        <a:xfrm>
+          <a:off x="0" y="0"/>
+          <a:ext cx="0" cy="0"/>
+          <a:chOff x="0" y="0"/>
+          <a:chExt cx="0" cy="0"/>
+        </a:xfrm>
+      </p:grpSpPr>
+      <p:sp>
+        <p:nvSpPr>
+          <p:cNvPr id="2" name="Title 1"/>
+          <p:cNvSpPr>
+            <a:spLocks noGrp="1"/>
+          </p:cNvSpPr>
+          <p:nvPr>
+            <p:ph type="title"/>
+          </p:nvPr>
+        </p:nvSpPr>
+        <p:spPr>
+          <a:xfrm>
+            <a:off x="0" y="0"/>
+            <a:ext cx="9144000" cy="602780"/>
+          </a:xfrm>
+          <a:solidFill>
+            <a:srgbClr val="1A1A2E"/>
+          </a:solidFill>
+        </p:spPr>
+        <p:txBody>
+          <a:bodyPr/>
+          <a:lstStyle/>
+          <a:p>
+            <a:pPr lvl="0" indent="0" marL="0">
+              <a:buNone/>
+            </a:pPr>
+            <a:r>
+              <a:rPr/>
+              <a:t>What Does “Wide” Data Look Like?</a:t>
+            </a:r>
+          </a:p>
+        </p:txBody>
+      </p:sp>
+      <p:sp>
+        <p:nvSpPr>
+          <p:cNvPr id="3" name="Content Placeholder 2"/>
+          <p:cNvSpPr>
+            <a:spLocks noGrp="1"/>
+          </p:cNvSpPr>
+          <p:nvPr>
+            <p:ph idx="1" sz="half"/>
+          </p:nvPr>
+        </p:nvSpPr>
+        <p:spPr/>
+        <p:txBody>
+          <a:bodyPr/>
+          <a:lstStyle/>
+          <a:p>
+            <a:pPr lvl="0" indent="0">
+              <a:buNone/>
+            </a:pPr>
+            <a:r>
+              <a:rPr>
+                <a:latin typeface="Courier"/>
+              </a:rPr>
+              <a:t>        1973 1974 1975 ... 2024 2025
+Nov-10    NA   NA   NA       NA   NA
+Nov-11    NA   NA   NA       NA   NA
+...
+Jan-15   2.1  4.0  1.8      8.2  6.5
+...</a:t>
+            </a:r>
+          </a:p>
+          <a:p>
+            <a:pPr lvl="0"/>
+            <a:r>
+              <a:rPr b="1"/>
+              <a:t>One row</a:t>
+            </a:r>
+            <a:r>
+              <a:rPr/>
+              <a:t> per calendar day-of-winter (Nov 10 → ~May)</a:t>
+            </a:r>
+          </a:p>
+          <a:p>
+            <a:pPr lvl="0"/>
+            <a:r>
+              <a:rPr b="1"/>
+              <a:t>One column per year</a:t>
+            </a:r>
+            <a:r>
+              <a:rPr/>
+              <a:t> — 53 columns, one for each ice season since 1973</a:t>
+            </a:r>
+          </a:p>
+          <a:p>
+            <a:pPr lvl="0"/>
+            <a:r>
+              <a:rPr/>
+              <a:t>Lots of </a:t>
+            </a:r>
+            <a:r>
+              <a:rPr>
+                <a:latin typeface="Courier"/>
+              </a:rPr>
+              <a:t>NA</a:t>
+            </a:r>
+            <a:r>
+              <a:rPr/>
+              <a:t> — many days simply had no ice that year or that month</a:t>
+            </a:r>
+          </a:p>
+          <a:p>
+            <a:pPr lvl="0" indent="0" marL="0">
+              <a:buNone/>
+            </a:pPr>
+            <a:r>
+              <a:rPr/>
+              <a:t>This format is </a:t>
+            </a:r>
+            <a:r>
+              <a:rPr b="1"/>
+              <a:t>perfect for a human</a:t>
+            </a:r>
+            <a:r>
+              <a:rPr/>
+              <a:t> scanning a printed table. It’s </a:t>
+            </a:r>
+            <a:r>
+              <a:rPr b="1"/>
+              <a:t>terrible for R and ggplot</a:t>
+            </a:r>
+            <a:r>
+              <a:rPr/>
+              <a:t>.</a:t>
+            </a:r>
+          </a:p>
+        </p:txBody>
+      </p:sp>
+      <p:sp>
+        <p:nvSpPr>
+          <p:cNvPr id="4" name="Content Placeholder 3"/>
+          <p:cNvSpPr>
+            <a:spLocks noGrp="1"/>
+          </p:cNvSpPr>
+          <p:nvPr>
+            <p:ph idx="2" sz="half"/>
+          </p:nvPr>
+        </p:nvSpPr>
+        <p:spPr/>
+        <p:txBody>
+          <a:bodyPr/>
+          <a:lstStyle/>
+          <a:p>
+            <a:pPr lvl="0" indent="0" marL="0">
+              <a:buNone/>
+            </a:pPr>
+            <a:r>
+              <a:rPr b="1"/>
+              <a:t>Why this breaks tidy tools:</a:t>
+            </a:r>
+          </a:p>
+          <a:p>
+            <a:pPr lvl="0"/>
+            <a:r>
+              <a:rPr>
+                <a:latin typeface="Courier"/>
+              </a:rPr>
+              <a:t>ggplot()</a:t>
+            </a:r>
+            <a:r>
+              <a:rPr/>
+              <a:t> wants one column to map to </a:t>
+            </a:r>
+            <a:r>
+              <a:rPr>
+                <a:latin typeface="Courier"/>
+              </a:rPr>
+              <a:t>x</a:t>
+            </a:r>
+            <a:r>
+              <a:rPr/>
+              <a:t>, one to </a:t>
+            </a:r>
+            <a:r>
+              <a:rPr>
+                <a:latin typeface="Courier"/>
+              </a:rPr>
+              <a:t>y</a:t>
+            </a:r>
+          </a:p>
+          <a:p>
+            <a:pPr lvl="0"/>
+            <a:r>
+              <a:rPr/>
+              <a:t>Here, “year” is hiding as 53 separate </a:t>
+            </a:r>
+            <a:r>
+              <a:rPr b="1"/>
+              <a:t>column names</a:t>
+            </a:r>
+            <a:r>
+              <a:rPr/>
+              <a:t>, not as data values</a:t>
+            </a:r>
+          </a:p>
+          <a:p>
+            <a:pPr lvl="0"/>
+            <a:r>
+              <a:rPr>
+                <a:latin typeface="Courier"/>
+              </a:rPr>
+              <a:t>group_by(year)</a:t>
+            </a:r>
+            <a:r>
+              <a:rPr/>
+              <a:t> is impossible — there’s no </a:t>
+            </a:r>
+            <a:r>
+              <a:rPr>
+                <a:latin typeface="Courier"/>
+              </a:rPr>
+              <a:t>year</a:t>
+            </a:r>
+            <a:r>
+              <a:rPr/>
+              <a:t> column to group by!</a:t>
+            </a:r>
+          </a:p>
+          <a:p>
+            <a:pPr lvl="0" indent="0" marL="0">
+              <a:buNone/>
+            </a:pPr>
+            <a:r>
+              <a:rPr/>
+              <a:t>📖 R4DS Ch. 5.2 — “every value in its own cell”</a:t>
+            </a:r>
+          </a:p>
+        </p:txBody>
+      </p:sp>
+    </p:spTree>
+  </p:cSld>
+</p:sld>
+</file>
+
+<file path=ppt/slides/slide6.xml><?xml version="1.0" encoding="utf-8"?>
+<p:sld xmlns:a="http://schemas.openxmlformats.org/drawingml/2006/main" xmlns:r="http://schemas.openxmlformats.org/officeDocument/2006/relationships" xmlns:p="http://schemas.openxmlformats.org/presentationml/2006/main">
+  <p:cSld>
+    <p:spTree>
+      <p:nvGrpSpPr>
+        <p:cNvPr id="1" name=""/>
+        <p:cNvGrpSpPr/>
+        <p:nvPr/>
+      </p:nvGrpSpPr>
+      <p:grpSpPr>
+        <a:xfrm>
+          <a:off x="0" y="0"/>
+          <a:ext cx="0" cy="0"/>
+          <a:chOff x="0" y="0"/>
+          <a:chExt cx="0" cy="0"/>
+        </a:xfrm>
+      </p:grpSpPr>
+      <p:sp>
+        <p:nvSpPr>
+          <p:cNvPr id="2" name="Title 1"/>
+          <p:cNvSpPr>
+            <a:spLocks noGrp="1"/>
+          </p:cNvSpPr>
+          <p:nvPr>
+            <p:ph type="title"/>
+          </p:nvPr>
+        </p:nvSpPr>
+        <p:spPr>
+          <a:xfrm>
+            <a:off x="0" y="0"/>
+            <a:ext cx="9144000" cy="602780"/>
+          </a:xfrm>
+          <a:solidFill>
+            <a:srgbClr val="1A1A2E"/>
+          </a:solidFill>
+        </p:spPr>
+        <p:txBody>
+          <a:bodyPr/>
+          <a:lstStyle/>
+          <a:p>
+            <a:pPr lvl="0" indent="0" marL="0">
+              <a:buNone/>
+            </a:pPr>
+            <a:r>
+              <a:rPr/>
+              <a:t>Load Libraries and Read the Raw File</a:t>
+            </a:r>
+          </a:p>
+        </p:txBody>
+      </p:sp>
+      <p:sp>
+        <p:nvSpPr>
+          <p:cNvPr id="3" name="Content Placeholder 2"/>
+          <p:cNvSpPr>
+            <a:spLocks noGrp="1"/>
+          </p:cNvSpPr>
+          <p:nvPr>
+            <p:ph idx="1" sz="half"/>
+          </p:nvPr>
+        </p:nvSpPr>
+        <p:spPr/>
+        <p:txBody>
+          <a:bodyPr/>
+          <a:lstStyle/>
+          <a:p>
+            <a:pPr lvl="0" indent="0">
+              <a:buNone/>
+            </a:pPr>
+            <a:r>
+              <a:rPr>
+                <a:solidFill>
+                  <a:srgbClr val="5E5E5E"/>
+                </a:solidFill>
+                <a:latin typeface="Courier"/>
+              </a:rPr>
+              <a:t># Load packages at the top — always -------------------</a:t>
+            </a:r>
+            <a:br/>
+            <a:r>
+              <a:rPr>
+                <a:solidFill>
+                  <a:srgbClr val="4758AB"/>
+                </a:solidFill>
+                <a:latin typeface="Courier"/>
+              </a:rPr>
+              <a:t>library</a:t>
+            </a:r>
+            <a:r>
+              <a:rPr>
+                <a:solidFill>
+                  <a:srgbClr val="003B4F"/>
+                </a:solidFill>
+                <a:latin typeface="Courier"/>
+              </a:rPr>
+              <a:t>(tidyverse)   </a:t>
+            </a:r>
+            <a:r>
+              <a:rPr>
+                <a:solidFill>
+                  <a:srgbClr val="5E5E5E"/>
+                </a:solidFill>
+                <a:latin typeface="Courier"/>
+              </a:rPr>
+              <a:t># data manipulation + ggplot2</a:t>
+            </a:r>
+            <a:br/>
+            <a:r>
+              <a:rPr>
+                <a:solidFill>
+                  <a:srgbClr val="4758AB"/>
+                </a:solidFill>
+                <a:latin typeface="Courier"/>
+              </a:rPr>
+              <a:t>library</a:t>
+            </a:r>
+            <a:r>
+              <a:rPr>
+                <a:solidFill>
+                  <a:srgbClr val="003B4F"/>
+                </a:solidFill>
+                <a:latin typeface="Courier"/>
+              </a:rPr>
+              <a:t>(janitor)      </a:t>
+            </a:r>
+            <a:r>
+              <a:rPr>
+                <a:solidFill>
+                  <a:srgbClr val="5E5E5E"/>
+                </a:solidFill>
+                <a:latin typeface="Courier"/>
+              </a:rPr>
+              <a:t># clean_names() and friends</a:t>
+            </a:r>
+          </a:p>
+          <a:p>
+            <a:pPr lvl="0" indent="0">
+              <a:buNone/>
+            </a:pPr>
+            <a:r>
+              <a:rPr>
+                <a:solidFill>
+                  <a:srgbClr val="5E5E5E"/>
+                </a:solidFill>
+                <a:latin typeface="Courier"/>
+              </a:rPr>
+              <a:t># Read the messy text file directly from the web -------</a:t>
+            </a:r>
+            <a:br/>
+            <a:r>
+              <a:rPr>
+                <a:solidFill>
+                  <a:srgbClr val="003B4F"/>
+                </a:solidFill>
+                <a:latin typeface="Courier"/>
+              </a:rPr>
+              <a:t>url &lt;- </a:t>
+            </a:r>
+            <a:r>
+              <a:rPr>
+                <a:solidFill>
+                  <a:srgbClr val="20794D"/>
+                </a:solidFill>
+                <a:latin typeface="Courier"/>
+              </a:rPr>
+              <a:t>"https://www.glerl.noaa.gov/data/ice/glicd/daily/sup.txt"</a:t>
+            </a:r>
+            <a:br/>
+            <a:br/>
+            <a:r>
+              <a:rPr>
+                <a:solidFill>
+                  <a:srgbClr val="003B4F"/>
+                </a:solidFill>
+                <a:latin typeface="Courier"/>
+              </a:rPr>
+              <a:t>ice_raw &lt;- </a:t>
+            </a:r>
+            <a:r>
+              <a:rPr>
+                <a:solidFill>
+                  <a:srgbClr val="4758AB"/>
+                </a:solidFill>
+                <a:latin typeface="Courier"/>
+              </a:rPr>
+              <a:t>read.table</a:t>
+            </a:r>
+            <a:r>
+              <a:rPr>
+                <a:solidFill>
+                  <a:srgbClr val="003B4F"/>
+                </a:solidFill>
+                <a:latin typeface="Courier"/>
+              </a:rPr>
+              <a:t>(</a:t>
+            </a:r>
+            <a:br/>
+            <a:r>
+              <a:rPr>
+                <a:solidFill>
+                  <a:srgbClr val="003B4F"/>
+                </a:solidFill>
+                <a:latin typeface="Courier"/>
+              </a:rPr>
+              <a:t>  url,</a:t>
+            </a:r>
+            <a:br/>
+            <a:r>
+              <a:rPr>
+                <a:solidFill>
+                  <a:srgbClr val="003B4F"/>
+                </a:solidFill>
+                <a:latin typeface="Courier"/>
+              </a:rPr>
+              <a:t>  </a:t>
+            </a:r>
+            <a:r>
+              <a:rPr>
+                <a:solidFill>
+                  <a:srgbClr val="657422"/>
+                </a:solidFill>
+                <a:latin typeface="Courier"/>
+              </a:rPr>
+              <a:t>header =</a:t>
+            </a:r>
+            <a:r>
+              <a:rPr>
+                <a:solidFill>
+                  <a:srgbClr val="003B4F"/>
+                </a:solidFill>
+                <a:latin typeface="Courier"/>
+              </a:rPr>
+              <a:t> </a:t>
+            </a:r>
+            <a:r>
+              <a:rPr>
+                <a:solidFill>
+                  <a:srgbClr val="8F5902"/>
+                </a:solidFill>
+                <a:latin typeface="Courier"/>
+              </a:rPr>
+              <a:t>TRUE</a:t>
+            </a:r>
+            <a:r>
+              <a:rPr>
+                <a:solidFill>
+                  <a:srgbClr val="003B4F"/>
+                </a:solidFill>
+                <a:latin typeface="Courier"/>
+              </a:rPr>
+              <a:t>,</a:t>
+            </a:r>
+            <a:br/>
+            <a:r>
+              <a:rPr>
+                <a:solidFill>
+                  <a:srgbClr val="003B4F"/>
+                </a:solidFill>
+                <a:latin typeface="Courier"/>
+              </a:rPr>
+              <a:t>  </a:t>
+            </a:r>
+            <a:r>
+              <a:rPr>
+                <a:solidFill>
+                  <a:srgbClr val="657422"/>
+                </a:solidFill>
+                <a:latin typeface="Courier"/>
+              </a:rPr>
+              <a:t>na.strings =</a:t>
+            </a:r>
+            <a:r>
+              <a:rPr>
+                <a:solidFill>
+                  <a:srgbClr val="003B4F"/>
+                </a:solidFill>
+                <a:latin typeface="Courier"/>
+              </a:rPr>
+              <a:t> </a:t>
+            </a:r>
+            <a:r>
+              <a:rPr>
+                <a:solidFill>
+                  <a:srgbClr val="4758AB"/>
+                </a:solidFill>
+                <a:latin typeface="Courier"/>
+              </a:rPr>
+              <a:t>c</a:t>
+            </a:r>
+            <a:r>
+              <a:rPr>
+                <a:solidFill>
+                  <a:srgbClr val="003B4F"/>
+                </a:solidFill>
+                <a:latin typeface="Courier"/>
+              </a:rPr>
+              <a:t>(</a:t>
+            </a:r>
+            <a:r>
+              <a:rPr>
+                <a:solidFill>
+                  <a:srgbClr val="20794D"/>
+                </a:solidFill>
+                <a:latin typeface="Courier"/>
+              </a:rPr>
+              <a:t>"-999"</a:t>
+            </a:r>
+            <a:r>
+              <a:rPr>
+                <a:solidFill>
+                  <a:srgbClr val="003B4F"/>
+                </a:solidFill>
+                <a:latin typeface="Courier"/>
+              </a:rPr>
+              <a:t>, </a:t>
+            </a:r>
+            <a:r>
+              <a:rPr>
+                <a:solidFill>
+                  <a:srgbClr val="20794D"/>
+                </a:solidFill>
+                <a:latin typeface="Courier"/>
+              </a:rPr>
+              <a:t>"-99.00"</a:t>
+            </a:r>
+            <a:r>
+              <a:rPr>
+                <a:solidFill>
+                  <a:srgbClr val="003B4F"/>
+                </a:solidFill>
+                <a:latin typeface="Courier"/>
+              </a:rPr>
+              <a:t>, </a:t>
+            </a:r>
+            <a:r>
+              <a:rPr>
+                <a:solidFill>
+                  <a:srgbClr val="20794D"/>
+                </a:solidFill>
+                <a:latin typeface="Courier"/>
+              </a:rPr>
+              <a:t>"NA"</a:t>
+            </a:r>
+            <a:r>
+              <a:rPr>
+                <a:solidFill>
+                  <a:srgbClr val="003B4F"/>
+                </a:solidFill>
+                <a:latin typeface="Courier"/>
+              </a:rPr>
+              <a:t>)</a:t>
+            </a:r>
+            <a:br/>
+            <a:r>
+              <a:rPr>
+                <a:solidFill>
+                  <a:srgbClr val="003B4F"/>
+                </a:solidFill>
+                <a:latin typeface="Courier"/>
+              </a:rPr>
+              <a:t>) </a:t>
+            </a:r>
+            <a:r>
+              <a:rPr>
+                <a:solidFill>
+                  <a:srgbClr val="5E5E5E"/>
+                </a:solidFill>
+                <a:latin typeface="Courier"/>
+              </a:rPr>
+              <a:t>%&gt;%</a:t>
+            </a:r>
+            <a:br/>
+            <a:r>
+              <a:rPr>
+                <a:solidFill>
+                  <a:srgbClr val="003B4F"/>
+                </a:solidFill>
+                <a:latin typeface="Courier"/>
+              </a:rPr>
+              <a:t>  </a:t>
+            </a:r>
+            <a:r>
+              <a:rPr>
+                <a:solidFill>
+                  <a:srgbClr val="4758AB"/>
+                </a:solidFill>
+                <a:latin typeface="Courier"/>
+              </a:rPr>
+              <a:t>rownames_to_column</a:t>
+            </a:r>
+            <a:r>
+              <a:rPr>
+                <a:solidFill>
+                  <a:srgbClr val="003B4F"/>
+                </a:solidFill>
+                <a:latin typeface="Courier"/>
+              </a:rPr>
+              <a:t>(</a:t>
+            </a:r>
+            <a:r>
+              <a:rPr>
+                <a:solidFill>
+                  <a:srgbClr val="657422"/>
+                </a:solidFill>
+                <a:latin typeface="Courier"/>
+              </a:rPr>
+              <a:t>var =</a:t>
+            </a:r>
+            <a:r>
+              <a:rPr>
+                <a:solidFill>
+                  <a:srgbClr val="003B4F"/>
+                </a:solidFill>
+                <a:latin typeface="Courier"/>
+              </a:rPr>
+              <a:t> </a:t>
+            </a:r>
+            <a:r>
+              <a:rPr>
+                <a:solidFill>
+                  <a:srgbClr val="20794D"/>
+                </a:solidFill>
+                <a:latin typeface="Courier"/>
+              </a:rPr>
+              <a:t>"date"</a:t>
+            </a:r>
+            <a:r>
+              <a:rPr>
+                <a:solidFill>
+                  <a:srgbClr val="003B4F"/>
+                </a:solidFill>
+                <a:latin typeface="Courier"/>
+              </a:rPr>
+              <a:t>) </a:t>
+            </a:r>
+            <a:r>
+              <a:rPr>
+                <a:solidFill>
+                  <a:srgbClr val="5E5E5E"/>
+                </a:solidFill>
+                <a:latin typeface="Courier"/>
+              </a:rPr>
+              <a:t>%&gt;%</a:t>
+            </a:r>
+            <a:br/>
+            <a:r>
+              <a:rPr>
+                <a:solidFill>
+                  <a:srgbClr val="003B4F"/>
+                </a:solidFill>
+                <a:latin typeface="Courier"/>
+              </a:rPr>
+              <a:t>  </a:t>
+            </a:r>
+            <a:r>
+              <a:rPr>
+                <a:solidFill>
+                  <a:srgbClr val="4758AB"/>
+                </a:solidFill>
+                <a:latin typeface="Courier"/>
+              </a:rPr>
+              <a:t>as_tibble</a:t>
+            </a:r>
+            <a:r>
+              <a:rPr>
+                <a:solidFill>
+                  <a:srgbClr val="003B4F"/>
+                </a:solidFill>
+                <a:latin typeface="Courier"/>
+              </a:rPr>
+              <a:t>()</a:t>
+            </a:r>
+            <a:br/>
+            <a:br/>
+            <a:r>
+              <a:rPr>
+                <a:solidFill>
+                  <a:srgbClr val="4758AB"/>
+                </a:solidFill>
+                <a:latin typeface="Courier"/>
+              </a:rPr>
+              <a:t>head</a:t>
+            </a:r>
+            <a:r>
+              <a:rPr>
+                <a:solidFill>
+                  <a:srgbClr val="003B4F"/>
+                </a:solidFill>
+                <a:latin typeface="Courier"/>
+              </a:rPr>
+              <a:t>(ice_raw)</a:t>
+            </a:r>
+          </a:p>
+          <a:p>
+            <a:pPr lvl="0" indent="0">
+              <a:buNone/>
+            </a:pPr>
+            <a:r>
+              <a:rPr>
+                <a:latin typeface="Courier"/>
+              </a:rPr>
+              <a:t># A tibble: 6 × 55
+  date   X1973 X1974 X1975 X1976 X1977 X1978 X1979 X1980 X1981 X1982 X1983 X1984
+  &lt;chr&gt;  &lt;dbl&gt; &lt;dbl&gt; &lt;dbl&gt; &lt;dbl&gt; &lt;dbl&gt; &lt;dbl&gt; &lt;dbl&gt; &lt;dbl&gt; &lt;dbl&gt; &lt;dbl&gt; &lt;dbl&gt; &lt;dbl&gt;
+1 Nov-10    NA    NA    NA    NA    NA    NA    NA    NA    NA    NA    NA    NA
+2 Nov-11    NA    NA    NA    NA    NA    NA    NA    NA    NA    NA    NA    NA
+3 Nov-12    NA    NA    NA    NA    NA    NA    NA    NA    NA    NA    NA    NA
+4 Nov-13    NA    NA    NA    NA    NA    NA    NA    NA    NA    NA    NA    NA
+5 Nov-14    NA    NA    NA    NA    NA    NA    NA    NA    NA    NA    NA    NA
+6 Nov-15    NA    NA    NA    NA    NA    NA    NA    NA    NA    NA    NA    NA
+# ℹ 42 more variables: X1985 &lt;dbl&gt;, X1986 &lt;dbl&gt;, X1987 &lt;dbl&gt;, X1988 &lt;dbl&gt;,
+#   X1989 &lt;dbl&gt;, X1990 &lt;dbl&gt;, X1991 &lt;dbl&gt;, X1992 &lt;dbl&gt;, X1993 &lt;dbl&gt;,
+#   X1994 &lt;dbl&gt;, X1995 &lt;dbl&gt;, X1996 &lt;dbl&gt;, X1997 &lt;dbl&gt;, X1998 &lt;dbl&gt;,
+#   X1999 &lt;dbl&gt;, X2000 &lt;dbl&gt;, X2001 &lt;dbl&gt;, X2002 &lt;dbl&gt;, X2003 &lt;dbl&gt;,
+#   X2004 &lt;dbl&gt;, X2005 &lt;dbl&gt;, X2006 &lt;dbl&gt;, X2007 &lt;dbl&gt;, X2008 &lt;dbl&gt;,
+#   X2009 &lt;dbl&gt;, X2010 &lt;dbl&gt;, X2011 &lt;dbl&gt;, X2012 &lt;dbl&gt;, X2013 &lt;dbl&gt;,
+#   X2014 &lt;dbl&gt;, X2015 &lt;dbl&gt;, X2016 &lt;dbl&gt;, X2017 &lt;dbl&gt;, X2018 &lt;dbl&gt;, …</a:t>
+            </a:r>
+          </a:p>
+        </p:txBody>
+      </p:sp>
+      <p:sp>
+        <p:nvSpPr>
+          <p:cNvPr id="4" name="Content Placeholder 3"/>
+          <p:cNvSpPr>
+            <a:spLocks noGrp="1"/>
+          </p:cNvSpPr>
+          <p:nvPr>
+            <p:ph idx="2" sz="half"/>
+          </p:nvPr>
+        </p:nvSpPr>
+        <p:spPr/>
+        <p:txBody>
+          <a:bodyPr/>
+          <a:lstStyle/>
+          <a:p>
+            <a:pPr lvl="0" indent="0" marL="0">
+              <a:buNone/>
+            </a:pPr>
+            <a:r>
+              <a:rPr b="1"/>
+              <a:t>What’s happening here:</a:t>
+            </a:r>
+          </a:p>
+          <a:p>
+            <a:pPr lvl="0"/>
+            <a:r>
+              <a:rPr>
+                <a:latin typeface="Courier"/>
+              </a:rPr>
+              <a:t>read.table()</a:t>
+            </a:r>
+            <a:r>
+              <a:rPr/>
+              <a:t> (base R) handles this better than </a:t>
+            </a:r>
+            <a:r>
+              <a:rPr>
+                <a:latin typeface="Courier"/>
+              </a:rPr>
+              <a:t>read_csv()</a:t>
+            </a:r>
+            <a:r>
+              <a:rPr/>
+              <a:t> since the file isn’t comma-separated</a:t>
+            </a:r>
+          </a:p>
+          <a:p>
+            <a:pPr lvl="0"/>
+            <a:r>
+              <a:rPr>
+                <a:latin typeface="Courier"/>
+              </a:rPr>
+              <a:t>na.strings</a:t>
+            </a:r>
+            <a:r>
+              <a:rPr/>
+              <a:t> tells R which placeholder values actually mean “missing”</a:t>
+            </a:r>
+          </a:p>
+          <a:p>
+            <a:pPr lvl="0"/>
+            <a:r>
+              <a:rPr/>
+              <a:t>The day-of-winter labels (</a:t>
+            </a:r>
+            <a:r>
+              <a:rPr>
+                <a:latin typeface="Courier"/>
+              </a:rPr>
+              <a:t>Nov-10</a:t>
+            </a:r>
+            <a:r>
+              <a:rPr/>
+              <a:t>, </a:t>
+            </a:r>
+            <a:r>
+              <a:rPr>
+                <a:latin typeface="Courier"/>
+              </a:rPr>
+              <a:t>Nov-11</a:t>
+            </a:r>
+            <a:r>
+              <a:rPr/>
+              <a:t>…) were row names, not a real column — </a:t>
+            </a:r>
+            <a:r>
+              <a:rPr>
+                <a:latin typeface="Courier"/>
+              </a:rPr>
+              <a:t>rownames_to_column()</a:t>
+            </a:r>
+            <a:r>
+              <a:rPr/>
+              <a:t> fixes that</a:t>
+            </a:r>
+          </a:p>
+          <a:p>
+            <a:pPr lvl="0" indent="0" marL="1270000">
+              <a:buNone/>
+            </a:pPr>
+            <a:r>
+              <a:rPr sz="2000" b="1"/>
+              <a:t>Important</a:t>
+            </a:r>
+          </a:p>
+          <a:p>
+            <a:pPr lvl="0" indent="0" marL="1270000">
+              <a:buNone/>
+            </a:pPr>
+            <a:r>
+              <a:rPr sz="2000"/>
+              <a:t>Look at the column names: </a:t>
+            </a:r>
+            <a:r>
+              <a:rPr sz="2000">
+                <a:latin typeface="Courier"/>
+              </a:rPr>
+              <a:t>X1973</a:t>
+            </a:r>
+            <a:r>
+              <a:rPr sz="2000"/>
+              <a:t>, </a:t>
+            </a:r>
+            <a:r>
+              <a:rPr sz="2000">
+                <a:latin typeface="Courier"/>
+              </a:rPr>
+              <a:t>X1974</a:t>
+            </a:r>
+            <a:r>
+              <a:rPr sz="2000"/>
+              <a:t>… R adds an </a:t>
+            </a:r>
+            <a:r>
+              <a:rPr sz="2000">
+                <a:latin typeface="Courier"/>
+              </a:rPr>
+              <a:t>X</a:t>
+            </a:r>
+            <a:r>
+              <a:rPr sz="2000"/>
+              <a:t> because column names can’t start with a number!</a:t>
+            </a:r>
+          </a:p>
+        </p:txBody>
+      </p:sp>
+    </p:spTree>
+  </p:cSld>
+</p:sld>
+</file>
+
+<file path=ppt/slides/slide7.xml><?xml version="1.0" encoding="utf-8"?>
+<p:sld xmlns:a="http://schemas.openxmlformats.org/drawingml/2006/main" xmlns:r="http://schemas.openxmlformats.org/officeDocument/2006/relationships" xmlns:p="http://schemas.openxmlformats.org/presentationml/2006/main">
+  <p:cSld>
+    <p:spTree>
+      <p:nvGrpSpPr>
+        <p:cNvPr id="1" name=""/>
+        <p:cNvGrpSpPr/>
+        <p:nvPr/>
+      </p:nvGrpSpPr>
+      <p:grpSpPr>
+        <a:xfrm>
+          <a:off x="0" y="0"/>
+          <a:ext cx="0" cy="0"/>
+          <a:chOff x="0" y="0"/>
+          <a:chExt cx="0" cy="0"/>
+        </a:xfrm>
+      </p:grpSpPr>
+      <p:sp>
+        <p:nvSpPr>
+          <p:cNvPr id="2" name="Title 1"/>
+          <p:cNvSpPr>
+            <a:spLocks noGrp="1"/>
+          </p:cNvSpPr>
+          <p:nvPr>
+            <p:ph type="title"/>
+          </p:nvPr>
+        </p:nvSpPr>
+        <p:spPr>
+          <a:xfrm>
+            <a:off x="0" y="0"/>
+            <a:ext cx="9144000" cy="602780"/>
+          </a:xfrm>
+          <a:solidFill>
+            <a:srgbClr val="1A1A2E"/>
+          </a:solidFill>
+        </p:spPr>
+        <p:txBody>
+          <a:bodyPr/>
+          <a:lstStyle/>
+          <a:p>
+            <a:pPr lvl="0" indent="0" marL="0">
+              <a:buNone/>
+            </a:pPr>
+            <a:r>
+              <a:rPr>
+                <a:latin typeface="Courier"/>
+              </a:rPr>
+              <a:t>pivot_longer()</a:t>
+            </a:r>
+            <a:r>
+              <a:rPr/>
+              <a:t> — Collapsing Wide to Long</a:t>
+            </a:r>
+          </a:p>
+        </p:txBody>
+      </p:sp>
+      <p:sp>
+        <p:nvSpPr>
+          <p:cNvPr id="3" name="Content Placeholder 2"/>
+          <p:cNvSpPr>
+            <a:spLocks noGrp="1"/>
+          </p:cNvSpPr>
+          <p:nvPr>
+            <p:ph idx="1" sz="half"/>
+          </p:nvPr>
+        </p:nvSpPr>
+        <p:spPr/>
+        <p:txBody>
+          <a:bodyPr/>
+          <a:lstStyle/>
+          <a:p>
+            <a:pPr lvl="0" indent="0">
+              <a:buNone/>
+            </a:pPr>
+            <a:r>
+              <a:rPr>
+                <a:solidFill>
+                  <a:srgbClr val="5E5E5E"/>
+                </a:solidFill>
+                <a:latin typeface="Courier"/>
+              </a:rPr>
+              <a:t># Collapse all year columns into year + ice_cover ------</a:t>
+            </a:r>
+            <a:br/>
+            <a:r>
+              <a:rPr>
+                <a:solidFill>
+                  <a:srgbClr val="003B4F"/>
+                </a:solidFill>
+                <a:latin typeface="Courier"/>
+              </a:rPr>
+              <a:t>ice_long &lt;- ice_raw </a:t>
+            </a:r>
+            <a:r>
+              <a:rPr>
+                <a:solidFill>
+                  <a:srgbClr val="5E5E5E"/>
+                </a:solidFill>
+                <a:latin typeface="Courier"/>
+              </a:rPr>
+              <a:t>%&gt;%</a:t>
+            </a:r>
+            <a:br/>
+            <a:r>
+              <a:rPr>
+                <a:solidFill>
+                  <a:srgbClr val="003B4F"/>
+                </a:solidFill>
+                <a:latin typeface="Courier"/>
+              </a:rPr>
+              <a:t>  </a:t>
+            </a:r>
+            <a:r>
+              <a:rPr>
+                <a:solidFill>
+                  <a:srgbClr val="4758AB"/>
+                </a:solidFill>
+                <a:latin typeface="Courier"/>
+              </a:rPr>
+              <a:t>pivot_longer</a:t>
+            </a:r>
+            <a:r>
+              <a:rPr>
+                <a:solidFill>
+                  <a:srgbClr val="003B4F"/>
+                </a:solidFill>
+                <a:latin typeface="Courier"/>
+              </a:rPr>
+              <a:t>(</a:t>
+            </a:r>
+            <a:br/>
+            <a:r>
+              <a:rPr>
+                <a:solidFill>
+                  <a:srgbClr val="003B4F"/>
+                </a:solidFill>
+                <a:latin typeface="Courier"/>
+              </a:rPr>
+              <a:t>    </a:t>
+            </a:r>
+            <a:r>
+              <a:rPr>
+                <a:solidFill>
+                  <a:srgbClr val="657422"/>
+                </a:solidFill>
+                <a:latin typeface="Courier"/>
+              </a:rPr>
+              <a:t>cols         =</a:t>
+            </a:r>
+            <a:r>
+              <a:rPr>
+                <a:solidFill>
+                  <a:srgbClr val="003B4F"/>
+                </a:solidFill>
+                <a:latin typeface="Courier"/>
+              </a:rPr>
+              <a:t> </a:t>
+            </a:r>
+            <a:r>
+              <a:rPr>
+                <a:solidFill>
+                  <a:srgbClr val="5E5E5E"/>
+                </a:solidFill>
+                <a:latin typeface="Courier"/>
+              </a:rPr>
+              <a:t>-</a:t>
+            </a:r>
+            <a:r>
+              <a:rPr>
+                <a:solidFill>
+                  <a:srgbClr val="003B4F"/>
+                </a:solidFill>
+                <a:latin typeface="Courier"/>
+              </a:rPr>
+              <a:t>date,</a:t>
+            </a:r>
+            <a:br/>
+            <a:r>
+              <a:rPr>
+                <a:solidFill>
+                  <a:srgbClr val="003B4F"/>
+                </a:solidFill>
+                <a:latin typeface="Courier"/>
+              </a:rPr>
+              <a:t>    </a:t>
+            </a:r>
+            <a:r>
+              <a:rPr>
+                <a:solidFill>
+                  <a:srgbClr val="657422"/>
+                </a:solidFill>
+                <a:latin typeface="Courier"/>
+              </a:rPr>
+              <a:t>names_to     =</a:t>
+            </a:r>
+            <a:r>
+              <a:rPr>
+                <a:solidFill>
+                  <a:srgbClr val="003B4F"/>
+                </a:solidFill>
+                <a:latin typeface="Courier"/>
+              </a:rPr>
+              <a:t> </a:t>
+            </a:r>
+            <a:r>
+              <a:rPr>
+                <a:solidFill>
+                  <a:srgbClr val="20794D"/>
+                </a:solidFill>
+                <a:latin typeface="Courier"/>
+              </a:rPr>
+              <a:t>"year"</a:t>
+            </a:r>
+            <a:r>
+              <a:rPr>
+                <a:solidFill>
+                  <a:srgbClr val="003B4F"/>
+                </a:solidFill>
+                <a:latin typeface="Courier"/>
+              </a:rPr>
+              <a:t>,</a:t>
+            </a:r>
+            <a:br/>
+            <a:r>
+              <a:rPr>
+                <a:solidFill>
+                  <a:srgbClr val="003B4F"/>
+                </a:solidFill>
+                <a:latin typeface="Courier"/>
+              </a:rPr>
+              <a:t>    </a:t>
+            </a:r>
+            <a:r>
+              <a:rPr>
+                <a:solidFill>
+                  <a:srgbClr val="657422"/>
+                </a:solidFill>
+                <a:latin typeface="Courier"/>
+              </a:rPr>
+              <a:t>names_prefix =</a:t>
+            </a:r>
+            <a:r>
+              <a:rPr>
+                <a:solidFill>
+                  <a:srgbClr val="003B4F"/>
+                </a:solidFill>
+                <a:latin typeface="Courier"/>
+              </a:rPr>
+              <a:t> </a:t>
+            </a:r>
+            <a:r>
+              <a:rPr>
+                <a:solidFill>
+                  <a:srgbClr val="20794D"/>
+                </a:solidFill>
+                <a:latin typeface="Courier"/>
+              </a:rPr>
+              <a:t>"X"</a:t>
+            </a:r>
+            <a:r>
+              <a:rPr>
+                <a:solidFill>
+                  <a:srgbClr val="003B4F"/>
+                </a:solidFill>
+                <a:latin typeface="Courier"/>
+              </a:rPr>
+              <a:t>,</a:t>
+            </a:r>
+            <a:br/>
+            <a:r>
+              <a:rPr>
+                <a:solidFill>
+                  <a:srgbClr val="003B4F"/>
+                </a:solidFill>
+                <a:latin typeface="Courier"/>
+              </a:rPr>
+              <a:t>    </a:t>
+            </a:r>
+            <a:r>
+              <a:rPr>
+                <a:solidFill>
+                  <a:srgbClr val="657422"/>
+                </a:solidFill>
+                <a:latin typeface="Courier"/>
+              </a:rPr>
+              <a:t>values_to    =</a:t>
+            </a:r>
+            <a:r>
+              <a:rPr>
+                <a:solidFill>
+                  <a:srgbClr val="003B4F"/>
+                </a:solidFill>
+                <a:latin typeface="Courier"/>
+              </a:rPr>
+              <a:t> </a:t>
+            </a:r>
+            <a:r>
+              <a:rPr>
+                <a:solidFill>
+                  <a:srgbClr val="20794D"/>
+                </a:solidFill>
+                <a:latin typeface="Courier"/>
+              </a:rPr>
+              <a:t>"ice_cover"</a:t>
+            </a:r>
+            <a:br/>
+            <a:r>
+              <a:rPr>
+                <a:solidFill>
+                  <a:srgbClr val="003B4F"/>
+                </a:solidFill>
+                <a:latin typeface="Courier"/>
+              </a:rPr>
+              <a:t>  )</a:t>
+            </a:r>
+            <a:br/>
+            <a:br/>
+            <a:r>
+              <a:rPr>
+                <a:solidFill>
+                  <a:srgbClr val="003B4F"/>
+                </a:solidFill>
+                <a:latin typeface="Courier"/>
+              </a:rPr>
+              <a:t>ice_long &lt;- ice_long </a:t>
+            </a:r>
+            <a:r>
+              <a:rPr>
+                <a:solidFill>
+                  <a:srgbClr val="5E5E5E"/>
+                </a:solidFill>
+                <a:latin typeface="Courier"/>
+              </a:rPr>
+              <a:t>%&gt;%</a:t>
+            </a:r>
+            <a:br/>
+            <a:r>
+              <a:rPr>
+                <a:solidFill>
+                  <a:srgbClr val="003B4F"/>
+                </a:solidFill>
+                <a:latin typeface="Courier"/>
+              </a:rPr>
+              <a:t>  </a:t>
+            </a:r>
+            <a:r>
+              <a:rPr>
+                <a:solidFill>
+                  <a:srgbClr val="4758AB"/>
+                </a:solidFill>
+                <a:latin typeface="Courier"/>
+              </a:rPr>
+              <a:t>arrange</a:t>
+            </a:r>
+            <a:r>
+              <a:rPr>
+                <a:solidFill>
+                  <a:srgbClr val="003B4F"/>
+                </a:solidFill>
+                <a:latin typeface="Courier"/>
+              </a:rPr>
+              <a:t>(year, date)</a:t>
+            </a:r>
+            <a:br/>
+            <a:br/>
+            <a:r>
+              <a:rPr>
+                <a:solidFill>
+                  <a:srgbClr val="4758AB"/>
+                </a:solidFill>
+                <a:latin typeface="Courier"/>
+              </a:rPr>
+              <a:t>head</a:t>
+            </a:r>
+            <a:r>
+              <a:rPr>
+                <a:solidFill>
+                  <a:srgbClr val="003B4F"/>
+                </a:solidFill>
+                <a:latin typeface="Courier"/>
+              </a:rPr>
+              <a:t>(ice_long)</a:t>
+            </a:r>
+          </a:p>
+          <a:p>
+            <a:pPr lvl="0" indent="0">
+              <a:buNone/>
+            </a:pPr>
+            <a:r>
+              <a:rPr>
+                <a:latin typeface="Courier"/>
+              </a:rPr>
+              <a:t># A tibble: 6 × 3
+  date   year  ice_cover
+  &lt;chr&gt;  &lt;chr&gt;     &lt;dbl&gt;
+1 Apr-01 1973        3  
+2 Apr-02 1973        2.7
+3 Apr-03 1973        2.4
+4 Apr-04 1973        2  
+5 Apr-05 1973        1.7
+6 Apr-06 1973        1.4</a:t>
+            </a:r>
+          </a:p>
+        </p:txBody>
+      </p:sp>
+      <p:sp>
+        <p:nvSpPr>
+          <p:cNvPr id="4" name="Content Placeholder 3"/>
+          <p:cNvSpPr>
+            <a:spLocks noGrp="1"/>
+          </p:cNvSpPr>
+          <p:nvPr>
+            <p:ph idx="2" sz="half"/>
+          </p:nvPr>
+        </p:nvSpPr>
+        <p:spPr/>
+        <p:txBody>
+          <a:bodyPr/>
+          <a:lstStyle/>
+          <a:p>
+            <a:pPr lvl="0" indent="0" marL="0">
+              <a:buNone/>
+            </a:pPr>
+            <a:r>
+              <a:rPr b="1"/>
+              <a:t>Reading the arguments:</a:t>
+            </a:r>
+          </a:p>
+          <a:p>
+            <a:pPr lvl="0"/>
+            <a:r>
+              <a:rPr>
+                <a:latin typeface="Courier"/>
+              </a:rPr>
+              <a:t>cols = -date</a:t>
+            </a:r>
+            <a:r>
+              <a:rPr/>
+              <a:t> — pivot </a:t>
+            </a:r>
+            <a:r>
+              <a:rPr i="1"/>
+              <a:t>every column except</a:t>
+            </a:r>
+            <a:r>
+              <a:rPr/>
+              <a:t> </a:t>
+            </a:r>
+            <a:r>
+              <a:rPr>
+                <a:latin typeface="Courier"/>
+              </a:rPr>
+              <a:t>date</a:t>
+            </a:r>
+          </a:p>
+          <a:p>
+            <a:pPr lvl="0"/>
+            <a:r>
+              <a:rPr>
+                <a:latin typeface="Courier"/>
+              </a:rPr>
+              <a:t>names_to = "year"</a:t>
+            </a:r>
+            <a:r>
+              <a:rPr/>
+              <a:t> — the old </a:t>
+            </a:r>
+            <a:r>
+              <a:rPr b="1"/>
+              <a:t>column names</a:t>
+            </a:r>
+            <a:r>
+              <a:rPr/>
+              <a:t> become values in a new </a:t>
+            </a:r>
+            <a:r>
+              <a:rPr>
+                <a:latin typeface="Courier"/>
+              </a:rPr>
+              <a:t>year</a:t>
+            </a:r>
+            <a:r>
+              <a:rPr/>
+              <a:t> column</a:t>
+            </a:r>
+          </a:p>
+          <a:p>
+            <a:pPr lvl="0"/>
+            <a:r>
+              <a:rPr>
+                <a:latin typeface="Courier"/>
+              </a:rPr>
+              <a:t>names_prefix = "X"</a:t>
+            </a:r>
+            <a:r>
+              <a:rPr/>
+              <a:t> — strip the </a:t>
+            </a:r>
+            <a:r>
+              <a:rPr>
+                <a:latin typeface="Courier"/>
+              </a:rPr>
+              <a:t>X</a:t>
+            </a:r>
+            <a:r>
+              <a:rPr/>
+              <a:t> that R glued onto the numbers</a:t>
+            </a:r>
+          </a:p>
+          <a:p>
+            <a:pPr lvl="0"/>
+            <a:r>
+              <a:rPr>
+                <a:latin typeface="Courier"/>
+              </a:rPr>
+              <a:t>values_to = "ice_cover"</a:t>
+            </a:r>
+            <a:r>
+              <a:rPr/>
+              <a:t> — the old </a:t>
+            </a:r>
+            <a:r>
+              <a:rPr b="1"/>
+              <a:t>cell values</a:t>
+            </a:r>
+            <a:r>
+              <a:rPr/>
+              <a:t> become a new </a:t>
+            </a:r>
+            <a:r>
+              <a:rPr>
+                <a:latin typeface="Courier"/>
+              </a:rPr>
+              <a:t>ice_cover</a:t>
+            </a:r>
+            <a:r>
+              <a:rPr/>
+              <a:t> column</a:t>
+            </a:r>
+          </a:p>
+          <a:p>
+            <a:pPr lvl="0" indent="0" marL="0">
+              <a:buNone/>
+            </a:pPr>
+            <a:r>
+              <a:rPr/>
+              <a:t>📖 R4DS Ch. 5.3 — </a:t>
+            </a:r>
+            <a:r>
+              <a:rPr>
+                <a:latin typeface="Courier"/>
+              </a:rPr>
+              <a:t>pivot_longer()</a:t>
+            </a:r>
+            <a:r>
+              <a:rPr/>
+              <a:t> for wide-to-long</a:t>
+            </a:r>
+          </a:p>
+        </p:txBody>
+      </p:sp>
+    </p:spTree>
+  </p:cSld>
+</p:sld>
+</file>
+
+<file path=ppt/slides/slide8.xml><?xml version="1.0" encoding="utf-8"?>
+<p:sld xmlns:a="http://schemas.openxmlformats.org/drawingml/2006/main" xmlns:r="http://schemas.openxmlformats.org/officeDocument/2006/relationships" xmlns:p="http://schemas.openxmlformats.org/presentationml/2006/main">
+  <p:cSld>
+    <p:spTree>
+      <p:nvGrpSpPr>
+        <p:cNvPr id="1" name=""/>
+        <p:cNvGrpSpPr/>
+        <p:nvPr/>
+      </p:nvGrpSpPr>
+      <p:grpSpPr>
+        <a:xfrm>
+          <a:off x="0" y="0"/>
+          <a:ext cx="0" cy="0"/>
+          <a:chOff x="0" y="0"/>
+          <a:chExt cx="0" cy="0"/>
+        </a:xfrm>
+      </p:grpSpPr>
+      <p:sp>
+        <p:nvSpPr>
+          <p:cNvPr id="2" name="Title 1"/>
+          <p:cNvSpPr>
+            <a:spLocks noGrp="1"/>
+          </p:cNvSpPr>
+          <p:nvPr>
+            <p:ph type="title"/>
+          </p:nvPr>
+        </p:nvSpPr>
+        <p:spPr>
+          <a:xfrm>
+            <a:off x="139485" y="78119"/>
+            <a:ext cx="8229600" cy="607682"/>
+          </a:xfrm>
+        </p:spPr>
+        <p:txBody>
+          <a:bodyPr/>
+          <a:lstStyle/>
+          <a:p>
+            <a:pPr lvl="0" indent="0" marL="0">
+              <a:buNone/>
+            </a:pPr>
+            <a:r>
+              <a:rPr/>
+              <a:t>Before and After: Same Data, Different Shape</a:t>
+            </a:r>
+          </a:p>
+        </p:txBody>
+      </p:sp>
+      <p:sp>
+        <p:nvSpPr>
+          <p:cNvPr id="3" name="Text Placeholder 2"/>
+          <p:cNvSpPr>
+            <a:spLocks noGrp="1"/>
+          </p:cNvSpPr>
+          <p:nvPr>
+            <p:ph idx="1" type="body"/>
+          </p:nvPr>
+        </p:nvSpPr>
+        <p:spPr/>
+        <p:txBody>
+          <a:bodyPr/>
+          <a:lstStyle/>
+          <a:p>
+            <a:pPr lvl="0" indent="0" marL="0">
+              <a:buNone/>
+            </a:pPr>
+            <a:r>
+              <a:rPr b="1"/>
+              <a:t>Wide (</a:t>
+            </a:r>
+            <a:r>
+              <a:rPr b="1">
+                <a:latin typeface="Courier"/>
+              </a:rPr>
+              <a:t>ice_raw</a:t>
+            </a:r>
+            <a:r>
+              <a:rPr b="1"/>
+              <a:t>):</a:t>
+            </a:r>
+          </a:p>
+        </p:txBody>
+      </p:sp>
+      <p:graphicFrame>
+        <p:nvGraphicFramePr>
+          <p:cNvPr id="6" name="Content Placeholder 5"/>
+          <p:cNvGraphicFramePr>
+            <a:graphicFrameLocks noGrp="1"/>
+          </p:cNvGraphicFramePr>
+          <p:nvPr>
+            <p:ph idx="1"/>
+          </p:nvPr>
+        </p:nvGraphicFramePr>
+        <p:xfrm>
+          <a:off x="127000" y="1270000"/>
+          <a:ext cx="4432300" cy="3302000"/>
+        </p:xfrm>
+        <a:graphic>
+          <a:graphicData uri="http://schemas.openxmlformats.org/drawingml/2006/table">
+            <a:tbl>
+              <a:tblPr firstRow="1" bandRow="1">
+                <a:tableStyleId>{5C22544A-7EE6-4342-B048-85BDC9FD1C3A}</a:tableStyleId>
+              </a:tblPr>
+              <a:tblGrid>
+                <a:gridCol w="1104900"/>
+                <a:gridCol w="1104900"/>
+                <a:gridCol w="1104900"/>
+                <a:gridCol w="1104900"/>
+              </a:tblGrid>
+              <a:tr h="0">
+                <a:tc>
+                  <a:txBody>
+                    <a:bodyPr/>
+                    <a:lstStyle/>
+                    <a:p>
+                      <a:pPr lvl="0" indent="0" marL="0">
+                        <a:buNone/>
+                      </a:pPr>
+                      <a:r>
+                        <a:rPr/>
+                        <a:t>date</a:t>
+                      </a:r>
+                    </a:p>
+                  </a:txBody>
+                  <a:tcPr/>
+                </a:tc>
+                <a:tc>
+                  <a:txBody>
+                    <a:bodyPr/>
+                    <a:lstStyle/>
+                    <a:p>
+                      <a:pPr lvl="0" indent="0" marL="0">
+                        <a:buNone/>
+                      </a:pPr>
+                      <a:r>
+                        <a:rPr/>
+                        <a:t>X1973</a:t>
+                      </a:r>
+                    </a:p>
+                  </a:txBody>
+                  <a:tcPr/>
+                </a:tc>
+                <a:tc>
+                  <a:txBody>
+                    <a:bodyPr/>
+                    <a:lstStyle/>
+                    <a:p>
+                      <a:pPr lvl="0" indent="0" marL="0">
+                        <a:buNone/>
+                      </a:pPr>
+                      <a:r>
+                        <a:rPr/>
+                        <a:t>X1974</a:t>
+                      </a:r>
+                    </a:p>
+                  </a:txBody>
+                  <a:tcPr/>
+                </a:tc>
+                <a:tc>
+                  <a:txBody>
+                    <a:bodyPr/>
+                    <a:lstStyle/>
+                    <a:p>
+                      <a:pPr lvl="0" indent="0" marL="0">
+                        <a:buNone/>
+                      </a:pPr>
+                      <a:r>
+                        <a:rPr/>
+                        <a:t>X1975</a:t>
+                      </a:r>
+                    </a:p>
+                  </a:txBody>
+                  <a:tcPr/>
+                </a:tc>
+              </a:tr>
+              <a:tr h="0">
+                <a:tc>
+                  <a:txBody>
+                    <a:bodyPr/>
+                    <a:lstStyle/>
+                    <a:p>
+                      <a:pPr lvl="0" indent="0" marL="0">
+                        <a:buNone/>
+                      </a:pPr>
+                      <a:r>
+                        <a:rPr/>
+                        <a:t>Nov-10</a:t>
+                      </a:r>
+                    </a:p>
+                  </a:txBody>
+                </a:tc>
+                <a:tc>
+                  <a:txBody>
+                    <a:bodyPr/>
+                    <a:lstStyle/>
+                    <a:p>
+                      <a:pPr lvl="0" indent="0" marL="0">
+                        <a:buNone/>
+                      </a:pPr>
+                      <a:r>
+                        <a:rPr/>
+                        <a:t>NA</a:t>
+                      </a:r>
+                    </a:p>
+                  </a:txBody>
+                </a:tc>
+                <a:tc>
+                  <a:txBody>
+                    <a:bodyPr/>
+                    <a:lstStyle/>
+                    <a:p>
+                      <a:pPr lvl="0" indent="0" marL="0">
+                        <a:buNone/>
+                      </a:pPr>
+                      <a:r>
+                        <a:rPr/>
+                        <a:t>NA</a:t>
+                      </a:r>
+                    </a:p>
+                  </a:txBody>
+                </a:tc>
+                <a:tc>
+                  <a:txBody>
+                    <a:bodyPr/>
+                    <a:lstStyle/>
+                    <a:p>
+                      <a:pPr lvl="0" indent="0" marL="0">
+                        <a:buNone/>
+                      </a:pPr>
+                      <a:r>
+                        <a:rPr/>
+                        <a:t>NA</a:t>
+                      </a:r>
+                    </a:p>
+                  </a:txBody>
+                </a:tc>
+              </a:tr>
+              <a:tr h="0">
+                <a:tc>
+                  <a:txBody>
+                    <a:bodyPr/>
+                    <a:lstStyle/>
+                    <a:p>
+                      <a:pPr lvl="0" indent="0" marL="0">
+                        <a:buNone/>
+                      </a:pPr>
+                      <a:r>
+                        <a:rPr/>
+                        <a:t>Jan-15</a:t>
+                      </a:r>
+                    </a:p>
+                  </a:txBody>
+                </a:tc>
+                <a:tc>
+                  <a:txBody>
+                    <a:bodyPr/>
+                    <a:lstStyle/>
+                    <a:p>
+                      <a:pPr lvl="0" indent="0" marL="0">
+                        <a:buNone/>
+                      </a:pPr>
+                      <a:r>
+                        <a:rPr/>
+                        <a:t>2.1</a:t>
+                      </a:r>
+                    </a:p>
+                  </a:txBody>
+                </a:tc>
+                <a:tc>
+                  <a:txBody>
+                    <a:bodyPr/>
+                    <a:lstStyle/>
+                    <a:p>
+                      <a:pPr lvl="0" indent="0" marL="0">
+                        <a:buNone/>
+                      </a:pPr>
+                      <a:r>
+                        <a:rPr/>
+                        <a:t>4.0</a:t>
+                      </a:r>
+                    </a:p>
+                  </a:txBody>
+                </a:tc>
+                <a:tc>
+                  <a:txBody>
+                    <a:bodyPr/>
+                    <a:lstStyle/>
+                    <a:p>
+                      <a:pPr lvl="0" indent="0" marL="0">
+                        <a:buNone/>
+                      </a:pPr>
+                      <a:r>
+                        <a:rPr/>
+                        <a:t>1.8</a:t>
+                      </a:r>
+                    </a:p>
+                  </a:txBody>
+                </a:tc>
+              </a:tr>
+            </a:tbl>
+          </a:graphicData>
+        </a:graphic>
+      </p:graphicFrame>
+      <p:sp>
+        <p:nvSpPr>
+          <p:cNvPr id="4" name="Content Placeholder 3"/>
+          <p:cNvSpPr>
+            <a:spLocks noGrp="1"/>
+          </p:cNvSpPr>
+          <p:nvPr>
+            <p:ph idx="2" sz="half"/>
+          </p:nvPr>
+        </p:nvSpPr>
+        <p:spPr/>
+        <p:txBody>
+          <a:bodyPr/>
+          <a:lstStyle/>
+          <a:p>
+            <a:pPr lvl="0" indent="0" marL="0">
+              <a:buNone/>
+            </a:pPr>
+            <a:r>
+              <a:rPr b="1"/>
+              <a:t>Long (</a:t>
+            </a:r>
+            <a:r>
+              <a:rPr b="1">
+                <a:latin typeface="Courier"/>
+              </a:rPr>
+              <a:t>ice_long</a:t>
+            </a:r>
+            <a:r>
+              <a:rPr b="1"/>
+              <a:t>):</a:t>
+            </a:r>
+          </a:p>
+        </p:txBody>
+      </p:sp>
+      <p:graphicFrame>
+        <p:nvGraphicFramePr>
+          <p:cNvPr id="6" name="Content Placeholder 5"/>
+          <p:cNvGraphicFramePr>
+            <a:graphicFrameLocks noGrp="1"/>
+          </p:cNvGraphicFramePr>
+          <p:nvPr>
+            <p:ph idx="1"/>
+          </p:nvPr>
+        </p:nvGraphicFramePr>
+        <p:xfrm>
+          <a:off x="127000" y="1270000"/>
+          <a:ext cx="4432300" cy="3302000"/>
+        </p:xfrm>
+        <a:graphic>
+          <a:graphicData uri="http://schemas.openxmlformats.org/drawingml/2006/table">
+            <a:tbl>
+              <a:tblPr firstRow="1" bandRow="1">
+                <a:tableStyleId>{5C22544A-7EE6-4342-B048-85BDC9FD1C3A}</a:tableStyleId>
+              </a:tblPr>
+              <a:tblGrid>
+                <a:gridCol w="1473200"/>
+                <a:gridCol w="1473200"/>
+                <a:gridCol w="1473200"/>
+              </a:tblGrid>
+              <a:tr h="0">
+                <a:tc>
+                  <a:txBody>
+                    <a:bodyPr/>
+                    <a:lstStyle/>
+                    <a:p>
+                      <a:pPr lvl="0" indent="0" marL="0">
+                        <a:buNone/>
+                      </a:pPr>
+                      <a:r>
+                        <a:rPr/>
+                        <a:t>date</a:t>
+                      </a:r>
+                    </a:p>
+                  </a:txBody>
+                  <a:tcPr/>
+                </a:tc>
+                <a:tc>
+                  <a:txBody>
+                    <a:bodyPr/>
+                    <a:lstStyle/>
+                    <a:p>
+                      <a:pPr lvl="0" indent="0" marL="0">
+                        <a:buNone/>
+                      </a:pPr>
+                      <a:r>
+                        <a:rPr/>
+                        <a:t>year</a:t>
+                      </a:r>
+                    </a:p>
+                  </a:txBody>
+                  <a:tcPr/>
+                </a:tc>
+                <a:tc>
+                  <a:txBody>
+                    <a:bodyPr/>
+                    <a:lstStyle/>
+                    <a:p>
+                      <a:pPr lvl="0" indent="0" marL="0">
+                        <a:buNone/>
+                      </a:pPr>
+                      <a:r>
+                        <a:rPr/>
+                        <a:t>ice_cover</a:t>
+                      </a:r>
+                    </a:p>
+                  </a:txBody>
+                  <a:tcPr/>
+                </a:tc>
+              </a:tr>
+              <a:tr h="0">
+                <a:tc>
+                  <a:txBody>
+                    <a:bodyPr/>
+                    <a:lstStyle/>
+                    <a:p>
+                      <a:pPr lvl="0" indent="0" marL="0">
+                        <a:buNone/>
+                      </a:pPr>
+                      <a:r>
+                        <a:rPr/>
+                        <a:t>Jan-15</a:t>
+                      </a:r>
+                    </a:p>
+                  </a:txBody>
+                </a:tc>
+                <a:tc>
+                  <a:txBody>
+                    <a:bodyPr/>
+                    <a:lstStyle/>
+                    <a:p>
+                      <a:pPr lvl="0" indent="0" marL="0">
+                        <a:buNone/>
+                      </a:pPr>
+                      <a:r>
+                        <a:rPr/>
+                        <a:t>1973</a:t>
+                      </a:r>
+                    </a:p>
+                  </a:txBody>
+                </a:tc>
+                <a:tc>
+                  <a:txBody>
+                    <a:bodyPr/>
+                    <a:lstStyle/>
+                    <a:p>
+                      <a:pPr lvl="0" indent="0" marL="0">
+                        <a:buNone/>
+                      </a:pPr>
+                      <a:r>
+                        <a:rPr/>
+                        <a:t>2.1</a:t>
+                      </a:r>
+                    </a:p>
+                  </a:txBody>
+                </a:tc>
+              </a:tr>
+              <a:tr h="0">
+                <a:tc>
+                  <a:txBody>
+                    <a:bodyPr/>
+                    <a:lstStyle/>
+                    <a:p>
+                      <a:pPr lvl="0" indent="0" marL="0">
+                        <a:buNone/>
+                      </a:pPr>
+                      <a:r>
+                        <a:rPr/>
+                        <a:t>Jan-15</a:t>
+                      </a:r>
+                    </a:p>
+                  </a:txBody>
+                </a:tc>
+                <a:tc>
+                  <a:txBody>
+                    <a:bodyPr/>
+                    <a:lstStyle/>
+                    <a:p>
+                      <a:pPr lvl="0" indent="0" marL="0">
+                        <a:buNone/>
+                      </a:pPr>
+                      <a:r>
+                        <a:rPr/>
+                        <a:t>1974</a:t>
+                      </a:r>
+                    </a:p>
+                  </a:txBody>
+                </a:tc>
+                <a:tc>
+                  <a:txBody>
+                    <a:bodyPr/>
+                    <a:lstStyle/>
+                    <a:p>
+                      <a:pPr lvl="0" indent="0" marL="0">
+                        <a:buNone/>
+                      </a:pPr>
+                      <a:r>
+                        <a:rPr/>
+                        <a:t>4.0</a:t>
+                      </a:r>
+                    </a:p>
+                  </a:txBody>
+                </a:tc>
+              </a:tr>
+              <a:tr h="0">
+                <a:tc>
+                  <a:txBody>
+                    <a:bodyPr/>
+                    <a:lstStyle/>
+                    <a:p>
+                      <a:pPr lvl="0" indent="0" marL="0">
+                        <a:buNone/>
+                      </a:pPr>
+                      <a:r>
+                        <a:rPr/>
+                        <a:t>Jan-15</a:t>
+                      </a:r>
+                    </a:p>
+                  </a:txBody>
+                </a:tc>
+                <a:tc>
+                  <a:txBody>
+                    <a:bodyPr/>
+                    <a:lstStyle/>
+                    <a:p>
+                      <a:pPr lvl="0" indent="0" marL="0">
+                        <a:buNone/>
+                      </a:pPr>
+                      <a:r>
+                        <a:rPr/>
+                        <a:t>1975</a:t>
+                      </a:r>
+                    </a:p>
+                  </a:txBody>
+                </a:tc>
+                <a:tc>
+                  <a:txBody>
+                    <a:bodyPr/>
+                    <a:lstStyle/>
+                    <a:p>
+                      <a:pPr lvl="0" indent="0" marL="0">
+                        <a:buNone/>
+                      </a:pPr>
+                      <a:r>
+                        <a:rPr/>
+                        <a:t>1.8</a:t>
+                      </a:r>
+                    </a:p>
+                  </a:txBody>
+                </a:tc>
+              </a:tr>
+            </a:tbl>
+          </a:graphicData>
+        </a:graphic>
+      </p:graphicFrame>
+      <p:sp>
+        <p:nvSpPr>
+          <p:cNvPr id="5" name="Text Placeholder 4"/>
+          <p:cNvSpPr>
+            <a:spLocks noGrp="1"/>
+          </p:cNvSpPr>
+          <p:nvPr>
+            <p:ph idx="3" sz="quarter" type="body"/>
+          </p:nvPr>
+        </p:nvSpPr>
+        <p:spPr/>
+        <p:txBody>
+          <a:bodyPr/>
+          <a:lstStyle/>
+          <a:p>
+            <a:pPr lvl="0" indent="0" marL="0">
+              <a:buNone/>
+            </a:pPr>
+            <a:r>
+              <a:rPr b="1"/>
+              <a:t>Same information. Completely different shape.</a:t>
+            </a:r>
+          </a:p>
+          <a:p>
+            <a:pPr lvl="0"/>
+            <a:r>
+              <a:rPr/>
+              <a:t>Wide: 53 columns, ~190 rows</a:t>
+            </a:r>
+          </a:p>
+          <a:p>
+            <a:pPr lvl="0"/>
+            <a:r>
+              <a:rPr/>
+              <a:t>Long: 3 columns, ~190 × 53 rows</a:t>
+            </a:r>
+          </a:p>
+          <a:p>
+            <a:pPr lvl="0"/>
+            <a:r>
+              <a:rPr/>
+              <a:t>The long version has </a:t>
+            </a:r>
+            <a:r>
+              <a:rPr b="1"/>
+              <a:t>one row per observation</a:t>
+            </a:r>
+            <a:r>
+              <a:rPr/>
+              <a:t> — exactly what </a:t>
+            </a:r>
+            <a:r>
+              <a:rPr>
+                <a:latin typeface="Courier"/>
+              </a:rPr>
+              <a:t>ggplot()</a:t>
+            </a:r>
+            <a:r>
+              <a:rPr/>
+              <a:t> and </a:t>
+            </a:r>
+            <a:r>
+              <a:rPr>
+                <a:latin typeface="Courier"/>
+              </a:rPr>
+              <a:t>group_by()</a:t>
+            </a:r>
+            <a:r>
+              <a:rPr/>
+              <a:t> expect</a:t>
+            </a:r>
+          </a:p>
+          <a:p>
+            <a:pPr lvl="0" indent="0" marL="1270000">
+              <a:buNone/>
+            </a:pPr>
+            <a:r>
+              <a:rPr sz="2000" b="1"/>
+              <a:t>Tip</a:t>
+            </a:r>
+          </a:p>
+          <a:p>
+            <a:pPr lvl="0" indent="0" marL="1270000">
+              <a:buNone/>
+            </a:pPr>
+            <a:r>
+              <a:rPr sz="2000"/>
+              <a:t>This is the single most important reshaping skill in all of data science — almost every messy dataset needs this.</a:t>
+            </a:r>
+          </a:p>
+        </p:txBody>
+      </p:sp>
+    </p:spTree>
+  </p:cSld>
+</p:sld>
+</file>
+
+<file path=ppt/slides/slide9.xml><?xml version="1.0" encoding="utf-8"?>
+<p:sld xmlns:a="http://schemas.openxmlformats.org/drawingml/2006/main" xmlns:r="http://schemas.openxmlformats.org/officeDocument/2006/relationships" xmlns:p="http://schemas.openxmlformats.org/presentationml/2006/main">
+  <p:cSld>
+    <p:spTree>
+      <p:nvGrpSpPr>
+        <p:cNvPr id="1" name=""/>
+        <p:cNvGrpSpPr/>
+        <p:nvPr/>
+      </p:nvGrpSpPr>
+      <p:grpSpPr>
+        <a:xfrm>
+          <a:off x="0" y="0"/>
+          <a:ext cx="0" cy="0"/>
+          <a:chOff x="0" y="0"/>
+          <a:chExt cx="0" cy="0"/>
+        </a:xfrm>
+      </p:grpSpPr>
+      <p:sp>
+        <p:nvSpPr>
+          <p:cNvPr id="2" name="Title 1"/>
+          <p:cNvSpPr>
+            <a:spLocks noGrp="1"/>
+          </p:cNvSpPr>
+          <p:nvPr>
+            <p:ph type="title"/>
+          </p:nvPr>
+        </p:nvSpPr>
+        <p:spPr>
+          <a:xfrm>
+            <a:off x="0" y="0"/>
+            <a:ext cx="9144000" cy="602780"/>
+          </a:xfrm>
+          <a:solidFill>
+            <a:srgbClr val="1A1A2E"/>
+          </a:solidFill>
+        </p:spPr>
+        <p:txBody>
+          <a:bodyPr/>
+          <a:lstStyle/>
+          <a:p>
+            <a:pPr lvl="0" indent="0" marL="0">
+              <a:buNone/>
+            </a:pPr>
+            <a:r>
+              <a:rPr/>
+              <a:t>A Tricky Real-World Wrinkle: Winters Cross the New Year</a:t>
+            </a:r>
+          </a:p>
+        </p:txBody>
+      </p:sp>
+      <p:sp>
+        <p:nvSpPr>
+          <p:cNvPr id="3" name="Content Placeholder 2"/>
+          <p:cNvSpPr>
+            <a:spLocks noGrp="1"/>
+          </p:cNvSpPr>
+          <p:nvPr>
+            <p:ph idx="1" sz="half"/>
+          </p:nvPr>
+        </p:nvSpPr>
+        <p:spPr/>
+        <p:txBody>
+          <a:bodyPr/>
+          <a:lstStyle/>
+          <a:p>
+            <a:pPr lvl="0" indent="0" marL="0">
+              <a:buNone/>
+            </a:pPr>
+            <a:r>
+              <a:rPr b="1"/>
+              <a:t>The problem:</a:t>
+            </a:r>
+            <a:r>
+              <a:rPr/>
+              <a:t> an ice season runs </a:t>
+            </a:r>
+            <a:r>
+              <a:rPr b="1"/>
+              <a:t>Nov → May</a:t>
+            </a:r>
+            <a:r>
+              <a:rPr/>
+              <a:t>, but NOAA labels the whole season by the year </a:t>
+            </a:r>
+            <a:r>
+              <a:rPr b="1"/>
+              <a:t>winter ends in</a:t>
+            </a:r>
+            <a:r>
+              <a:rPr/>
+              <a:t>. So </a:t>
+            </a:r>
+            <a:r>
+              <a:rPr>
+                <a:latin typeface="Courier"/>
+              </a:rPr>
+              <a:t>Nov-10</a:t>
+            </a:r>
+            <a:r>
+              <a:rPr/>
+              <a:t> under column </a:t>
+            </a:r>
+            <a:r>
+              <a:rPr>
+                <a:latin typeface="Courier"/>
+              </a:rPr>
+              <a:t>1974</a:t>
+            </a:r>
+            <a:r>
+              <a:rPr/>
+              <a:t> actually happened in </a:t>
+            </a:r>
+            <a:r>
+              <a:rPr b="1"/>
+              <a:t>November 1973</a:t>
+            </a:r>
+            <a:r>
+              <a:rPr/>
+              <a:t>.</a:t>
+            </a:r>
+          </a:p>
+          <a:p>
+            <a:pPr lvl="0" indent="0">
+              <a:buNone/>
+            </a:pPr>
+            <a:r>
+              <a:rPr>
+                <a:solidFill>
+                  <a:srgbClr val="5E5E5E"/>
+                </a:solidFill>
+                <a:latin typeface="Courier"/>
+              </a:rPr>
+              <a:t># Assign Nov/Dec to the PREVIOUS calendar year ----------</a:t>
+            </a:r>
+            <a:br/>
+            <a:r>
+              <a:rPr>
+                <a:solidFill>
+                  <a:srgbClr val="003B4F"/>
+                </a:solidFill>
+                <a:latin typeface="Courier"/>
+              </a:rPr>
+              <a:t>ice_clean &lt;- ice_long </a:t>
+            </a:r>
+            <a:r>
+              <a:rPr>
+                <a:solidFill>
+                  <a:srgbClr val="5E5E5E"/>
+                </a:solidFill>
+                <a:latin typeface="Courier"/>
+              </a:rPr>
+              <a:t>%&gt;%</a:t>
+            </a:r>
+            <a:br/>
+            <a:r>
+              <a:rPr>
+                <a:solidFill>
+                  <a:srgbClr val="003B4F"/>
+                </a:solidFill>
+                <a:latin typeface="Courier"/>
+              </a:rPr>
+              <a:t>  </a:t>
+            </a:r>
+            <a:r>
+              <a:rPr>
+                <a:solidFill>
+                  <a:srgbClr val="4758AB"/>
+                </a:solidFill>
+                <a:latin typeface="Courier"/>
+              </a:rPr>
+              <a:t>mutate</a:t>
+            </a:r>
+            <a:r>
+              <a:rPr>
+                <a:solidFill>
+                  <a:srgbClr val="003B4F"/>
+                </a:solidFill>
+                <a:latin typeface="Courier"/>
+              </a:rPr>
+              <a:t>(</a:t>
+            </a:r>
+            <a:br/>
+            <a:r>
+              <a:rPr>
+                <a:solidFill>
+                  <a:srgbClr val="003B4F"/>
+                </a:solidFill>
+                <a:latin typeface="Courier"/>
+              </a:rPr>
+              <a:t>    </a:t>
+            </a:r>
+            <a:r>
+              <a:rPr>
+                <a:solidFill>
+                  <a:srgbClr val="657422"/>
+                </a:solidFill>
+                <a:latin typeface="Courier"/>
+              </a:rPr>
+              <a:t>year          =</a:t>
+            </a:r>
+            <a:r>
+              <a:rPr>
+                <a:solidFill>
+                  <a:srgbClr val="003B4F"/>
+                </a:solidFill>
+                <a:latin typeface="Courier"/>
+              </a:rPr>
+              <a:t> </a:t>
+            </a:r>
+            <a:r>
+              <a:rPr>
+                <a:solidFill>
+                  <a:srgbClr val="4758AB"/>
+                </a:solidFill>
+                <a:latin typeface="Courier"/>
+              </a:rPr>
+              <a:t>as.numeric</a:t>
+            </a:r>
+            <a:r>
+              <a:rPr>
+                <a:solidFill>
+                  <a:srgbClr val="003B4F"/>
+                </a:solidFill>
+                <a:latin typeface="Courier"/>
+              </a:rPr>
+              <a:t>(year),</a:t>
+            </a:r>
+            <a:br/>
+            <a:r>
+              <a:rPr>
+                <a:solidFill>
+                  <a:srgbClr val="003B4F"/>
+                </a:solidFill>
+                <a:latin typeface="Courier"/>
+              </a:rPr>
+              <a:t>    </a:t>
+            </a:r>
+            <a:r>
+              <a:rPr>
+                <a:solidFill>
+                  <a:srgbClr val="657422"/>
+                </a:solidFill>
+                <a:latin typeface="Courier"/>
+              </a:rPr>
+              <a:t>calendar_year =</a:t>
+            </a:r>
+            <a:r>
+              <a:rPr>
+                <a:solidFill>
+                  <a:srgbClr val="003B4F"/>
+                </a:solidFill>
+                <a:latin typeface="Courier"/>
+              </a:rPr>
+              <a:t> </a:t>
+            </a:r>
+            <a:r>
+              <a:rPr>
+                <a:solidFill>
+                  <a:srgbClr val="4758AB"/>
+                </a:solidFill>
+                <a:latin typeface="Courier"/>
+              </a:rPr>
+              <a:t>if_else</a:t>
+            </a:r>
+            <a:r>
+              <a:rPr>
+                <a:solidFill>
+                  <a:srgbClr val="003B4F"/>
+                </a:solidFill>
+                <a:latin typeface="Courier"/>
+              </a:rPr>
+              <a:t>(</a:t>
+            </a:r>
+            <a:br/>
+            <a:r>
+              <a:rPr>
+                <a:solidFill>
+                  <a:srgbClr val="003B4F"/>
+                </a:solidFill>
+                <a:latin typeface="Courier"/>
+              </a:rPr>
+              <a:t>      </a:t>
+            </a:r>
+            <a:r>
+              <a:rPr>
+                <a:solidFill>
+                  <a:srgbClr val="4758AB"/>
+                </a:solidFill>
+                <a:latin typeface="Courier"/>
+              </a:rPr>
+              <a:t>str_starts</a:t>
+            </a:r>
+            <a:r>
+              <a:rPr>
+                <a:solidFill>
+                  <a:srgbClr val="003B4F"/>
+                </a:solidFill>
+                <a:latin typeface="Courier"/>
+              </a:rPr>
+              <a:t>(date, </a:t>
+            </a:r>
+            <a:r>
+              <a:rPr>
+                <a:solidFill>
+                  <a:srgbClr val="20794D"/>
+                </a:solidFill>
+                <a:latin typeface="Courier"/>
+              </a:rPr>
+              <a:t>"Nov|Dec"</a:t>
+            </a:r>
+            <a:r>
+              <a:rPr>
+                <a:solidFill>
+                  <a:srgbClr val="003B4F"/>
+                </a:solidFill>
+                <a:latin typeface="Courier"/>
+              </a:rPr>
+              <a:t>),</a:t>
+            </a:r>
+            <a:br/>
+            <a:r>
+              <a:rPr>
+                <a:solidFill>
+                  <a:srgbClr val="003B4F"/>
+                </a:solidFill>
+                <a:latin typeface="Courier"/>
+              </a:rPr>
+              <a:t>      year </a:t>
+            </a:r>
+            <a:r>
+              <a:rPr>
+                <a:solidFill>
+                  <a:srgbClr val="5E5E5E"/>
+                </a:solidFill>
+                <a:latin typeface="Courier"/>
+              </a:rPr>
+              <a:t>-</a:t>
+            </a:r>
+            <a:r>
+              <a:rPr>
+                <a:solidFill>
+                  <a:srgbClr val="003B4F"/>
+                </a:solidFill>
+                <a:latin typeface="Courier"/>
+              </a:rPr>
+              <a:t> </a:t>
+            </a:r>
+            <a:r>
+              <a:rPr>
+                <a:solidFill>
+                  <a:srgbClr val="AD0000"/>
+                </a:solidFill>
+                <a:latin typeface="Courier"/>
+              </a:rPr>
+              <a:t>1</a:t>
+            </a:r>
+            <a:r>
+              <a:rPr>
+                <a:solidFill>
+                  <a:srgbClr val="003B4F"/>
+                </a:solidFill>
+                <a:latin typeface="Courier"/>
+              </a:rPr>
+              <a:t>,</a:t>
+            </a:r>
+            <a:br/>
+            <a:r>
+              <a:rPr>
+                <a:solidFill>
+                  <a:srgbClr val="003B4F"/>
+                </a:solidFill>
+                <a:latin typeface="Courier"/>
+              </a:rPr>
+              <a:t>      year</a:t>
+            </a:r>
+            <a:br/>
+            <a:r>
+              <a:rPr>
+                <a:solidFill>
+                  <a:srgbClr val="003B4F"/>
+                </a:solidFill>
+                <a:latin typeface="Courier"/>
+              </a:rPr>
+              <a:t>    ),</a:t>
+            </a:r>
+            <a:br/>
+            <a:r>
+              <a:rPr>
+                <a:solidFill>
+                  <a:srgbClr val="003B4F"/>
+                </a:solidFill>
+                <a:latin typeface="Courier"/>
+              </a:rPr>
+              <a:t>    </a:t>
+            </a:r>
+            <a:r>
+              <a:rPr>
+                <a:solidFill>
+                  <a:srgbClr val="657422"/>
+                </a:solidFill>
+                <a:latin typeface="Courier"/>
+              </a:rPr>
+              <a:t>full_date =</a:t>
+            </a:r>
+            <a:r>
+              <a:rPr>
+                <a:solidFill>
+                  <a:srgbClr val="003B4F"/>
+                </a:solidFill>
+                <a:latin typeface="Courier"/>
+              </a:rPr>
+              <a:t> </a:t>
+            </a:r>
+            <a:r>
+              <a:rPr>
+                <a:solidFill>
+                  <a:srgbClr val="4758AB"/>
+                </a:solidFill>
+                <a:latin typeface="Courier"/>
+              </a:rPr>
+              <a:t>ymd</a:t>
+            </a:r>
+            <a:r>
+              <a:rPr>
+                <a:solidFill>
+                  <a:srgbClr val="003B4F"/>
+                </a:solidFill>
+                <a:latin typeface="Courier"/>
+              </a:rPr>
+              <a:t>(</a:t>
+            </a:r>
+            <a:r>
+              <a:rPr>
+                <a:solidFill>
+                  <a:srgbClr val="4758AB"/>
+                </a:solidFill>
+                <a:latin typeface="Courier"/>
+              </a:rPr>
+              <a:t>paste</a:t>
+            </a:r>
+            <a:r>
+              <a:rPr>
+                <a:solidFill>
+                  <a:srgbClr val="003B4F"/>
+                </a:solidFill>
+                <a:latin typeface="Courier"/>
+              </a:rPr>
+              <a:t>(calendar_year, date, </a:t>
+            </a:r>
+            <a:r>
+              <a:rPr>
+                <a:solidFill>
+                  <a:srgbClr val="657422"/>
+                </a:solidFill>
+                <a:latin typeface="Courier"/>
+              </a:rPr>
+              <a:t>sep =</a:t>
+            </a:r>
+            <a:r>
+              <a:rPr>
+                <a:solidFill>
+                  <a:srgbClr val="003B4F"/>
+                </a:solidFill>
+                <a:latin typeface="Courier"/>
+              </a:rPr>
+              <a:t> </a:t>
+            </a:r>
+            <a:r>
+              <a:rPr>
+                <a:solidFill>
+                  <a:srgbClr val="20794D"/>
+                </a:solidFill>
+                <a:latin typeface="Courier"/>
+              </a:rPr>
+              <a:t>"-"</a:t>
+            </a:r>
+            <a:r>
+              <a:rPr>
+                <a:solidFill>
+                  <a:srgbClr val="003B4F"/>
+                </a:solidFill>
+                <a:latin typeface="Courier"/>
+              </a:rPr>
+              <a:t>)),</a:t>
+            </a:r>
+            <a:br/>
+            <a:r>
+              <a:rPr>
+                <a:solidFill>
+                  <a:srgbClr val="003B4F"/>
+                </a:solidFill>
+                <a:latin typeface="Courier"/>
+              </a:rPr>
+              <a:t>    </a:t>
+            </a:r>
+            <a:r>
+              <a:rPr>
+                <a:solidFill>
+                  <a:srgbClr val="657422"/>
+                </a:solidFill>
+                <a:latin typeface="Courier"/>
+              </a:rPr>
+              <a:t>month     =</a:t>
+            </a:r>
+            <a:r>
+              <a:rPr>
+                <a:solidFill>
+                  <a:srgbClr val="003B4F"/>
+                </a:solidFill>
+                <a:latin typeface="Courier"/>
+              </a:rPr>
+              <a:t> </a:t>
+            </a:r>
+            <a:r>
+              <a:rPr>
+                <a:solidFill>
+                  <a:srgbClr val="4758AB"/>
+                </a:solidFill>
+                <a:latin typeface="Courier"/>
+              </a:rPr>
+              <a:t>month</a:t>
+            </a:r>
+            <a:r>
+              <a:rPr>
+                <a:solidFill>
+                  <a:srgbClr val="003B4F"/>
+                </a:solidFill>
+                <a:latin typeface="Courier"/>
+              </a:rPr>
+              <a:t>(full_date, </a:t>
+            </a:r>
+            <a:r>
+              <a:rPr>
+                <a:solidFill>
+                  <a:srgbClr val="657422"/>
+                </a:solidFill>
+                <a:latin typeface="Courier"/>
+              </a:rPr>
+              <a:t>label =</a:t>
+            </a:r>
+            <a:r>
+              <a:rPr>
+                <a:solidFill>
+                  <a:srgbClr val="003B4F"/>
+                </a:solidFill>
+                <a:latin typeface="Courier"/>
+              </a:rPr>
+              <a:t> </a:t>
+            </a:r>
+            <a:r>
+              <a:rPr>
+                <a:solidFill>
+                  <a:srgbClr val="8F5902"/>
+                </a:solidFill>
+                <a:latin typeface="Courier"/>
+              </a:rPr>
+              <a:t>TRUE</a:t>
+            </a:r>
+            <a:r>
+              <a:rPr>
+                <a:solidFill>
+                  <a:srgbClr val="003B4F"/>
+                </a:solidFill>
+                <a:latin typeface="Courier"/>
+              </a:rPr>
+              <a:t>)</a:t>
+            </a:r>
+            <a:br/>
+            <a:r>
+              <a:rPr>
+                <a:solidFill>
+                  <a:srgbClr val="003B4F"/>
+                </a:solidFill>
+                <a:latin typeface="Courier"/>
+              </a:rPr>
+              <a:t>  ) </a:t>
+            </a:r>
+            <a:r>
+              <a:rPr>
+                <a:solidFill>
+                  <a:srgbClr val="5E5E5E"/>
+                </a:solidFill>
+                <a:latin typeface="Courier"/>
+              </a:rPr>
+              <a:t>%&gt;%</a:t>
+            </a:r>
+            <a:br/>
+            <a:r>
+              <a:rPr>
+                <a:solidFill>
+                  <a:srgbClr val="003B4F"/>
+                </a:solidFill>
+                <a:latin typeface="Courier"/>
+              </a:rPr>
+              <a:t>  </a:t>
+            </a:r>
+            <a:r>
+              <a:rPr>
+                <a:solidFill>
+                  <a:srgbClr val="4758AB"/>
+                </a:solidFill>
+                <a:latin typeface="Courier"/>
+              </a:rPr>
+              <a:t>drop_na</a:t>
+            </a:r>
+            <a:r>
+              <a:rPr>
+                <a:solidFill>
+                  <a:srgbClr val="003B4F"/>
+                </a:solidFill>
+                <a:latin typeface="Courier"/>
+              </a:rPr>
+              <a:t>(ice_cover, full_date)</a:t>
+            </a:r>
+            <a:br/>
+            <a:br/>
+            <a:r>
+              <a:rPr>
+                <a:solidFill>
+                  <a:srgbClr val="4758AB"/>
+                </a:solidFill>
+                <a:latin typeface="Courier"/>
+              </a:rPr>
+              <a:t>head</a:t>
+            </a:r>
+            <a:r>
+              <a:rPr>
+                <a:solidFill>
+                  <a:srgbClr val="003B4F"/>
+                </a:solidFill>
+                <a:latin typeface="Courier"/>
+              </a:rPr>
+              <a:t>(ice_clean)</a:t>
+            </a:r>
+          </a:p>
+          <a:p>
+            <a:pPr lvl="0" indent="0">
+              <a:buNone/>
+            </a:pPr>
+            <a:r>
+              <a:rPr>
+                <a:latin typeface="Courier"/>
+              </a:rPr>
+              <a:t># A tibble: 6 × 6
+  date    year ice_cover calendar_year full_date  month
+  &lt;chr&gt;  &lt;dbl&gt;     &lt;dbl&gt;         &lt;dbl&gt; &lt;date&gt;     &lt;ord&gt;
+1 Apr-01  1973       3            1973 1973-04-01 Apr  
+2 Apr-02  1973       2.7          1973 1973-04-02 Apr  
+3 Apr-03  1973       2.4          1973 1973-04-03 Apr  
+4 Apr-04  1973       2            1973 1973-04-04 Apr  
+5 Apr-05  1973       1.7          1973 1973-04-05 Apr  
+6 Apr-06  1973       1.4          1973 1973-04-06 Apr  </a:t>
+            </a:r>
+          </a:p>
+        </p:txBody>
+      </p:sp>
+      <p:sp>
+        <p:nvSpPr>
+          <p:cNvPr id="4" name="Content Placeholder 3"/>
+          <p:cNvSpPr>
+            <a:spLocks noGrp="1"/>
+          </p:cNvSpPr>
+          <p:nvPr>
+            <p:ph idx="2" sz="half"/>
+          </p:nvPr>
+        </p:nvSpPr>
+        <p:spPr/>
+        <p:txBody>
+          <a:bodyPr/>
+          <a:lstStyle/>
+          <a:p>
+            <a:pPr lvl="0" indent="0" marL="0">
+              <a:buNone/>
+            </a:pPr>
+            <a:r>
+              <a:rPr b="1"/>
+              <a:t>Reading the logic:</a:t>
+            </a:r>
+          </a:p>
+          <a:p>
+            <a:pPr lvl="0"/>
+            <a:r>
+              <a:rPr>
+                <a:latin typeface="Courier"/>
+              </a:rPr>
+              <a:t>str_starts(date, "Nov|Dec")</a:t>
+            </a:r>
+            <a:r>
+              <a:rPr/>
+              <a:t> — does this row’s day-of-winter text start with “Nov” or “Dec”?</a:t>
+            </a:r>
+          </a:p>
+          <a:p>
+            <a:pPr lvl="0"/>
+            <a:r>
+              <a:rPr/>
+              <a:t>If yes, subtract 1 from </a:t>
+            </a:r>
+            <a:r>
+              <a:rPr>
+                <a:latin typeface="Courier"/>
+              </a:rPr>
+              <a:t>year</a:t>
+            </a:r>
+            <a:r>
+              <a:rPr/>
+              <a:t> to get the real calendar year</a:t>
+            </a:r>
+          </a:p>
+          <a:p>
+            <a:pPr lvl="0"/>
+            <a:r>
+              <a:rPr>
+                <a:latin typeface="Courier"/>
+              </a:rPr>
+              <a:t>ymd()</a:t>
+            </a:r>
+            <a:r>
+              <a:rPr/>
+              <a:t> (from </a:t>
+            </a:r>
+            <a:r>
+              <a:rPr>
+                <a:latin typeface="Courier"/>
+              </a:rPr>
+              <a:t>lubridate</a:t>
+            </a:r>
+            <a:r>
+              <a:rPr/>
+              <a:t>) glues the pieces into one real R </a:t>
+            </a:r>
+            <a:r>
+              <a:rPr>
+                <a:latin typeface="Courier"/>
+              </a:rPr>
+              <a:t>Date</a:t>
+            </a:r>
+          </a:p>
+          <a:p>
+            <a:pPr lvl="0"/>
+            <a:r>
+              <a:rPr>
+                <a:latin typeface="Courier"/>
+              </a:rPr>
+              <a:t>drop_na()</a:t>
+            </a:r>
+            <a:r>
+              <a:rPr/>
+              <a:t> removes rows with no real date or no ice reading</a:t>
+            </a:r>
+          </a:p>
+          <a:p>
+            <a:pPr lvl="0" indent="0" marL="0">
+              <a:buNone/>
+            </a:pPr>
+            <a:r>
+              <a:rPr/>
+              <a:t>📖 R4DS Ch. 17 — working with dates and times</a:t>
             </a:r>
           </a:p>
         </p:txBody>
